--- a/03-Python程序设计-项目实战/V2授课PPT/W05-第10次课-每天早上8点的生产日报.pptx
+++ b/03-Python程序设计-项目实战/V2授课PPT/W05-第10次课-每天早上8点的生产日报.pptx
@@ -9,6 +9,9 @@
     <p:sldId id="311" r:id="rId63"/>
     <p:sldId id="321" r:id="rId73"/>
     <p:sldId id="369" r:id="rId121"/>
+    <p:sldId id="370" r:id="rId15"/>
+    <p:sldId id="371" r:id="rId16"/>
+    <p:sldId id="372" r:id="rId17"/>
     <p:sldId id="340" r:id="rId92"/>
     <p:sldId id="367" r:id="rId119"/>
     <p:sldId id="368" r:id="rId120"/>
@@ -4210,6 +4213,658 @@
 </p:sld>
 </file>
 
+<file path=ppt/slides/slide10.xml><?xml version="1.0" encoding="utf-8"?>
+<p:sld xmlns:a="http://schemas.openxmlformats.org/drawingml/2006/main" xmlns:p="http://schemas.openxmlformats.org/presentationml/2006/main" xmlns:r="http://schemas.openxmlformats.org/officeDocument/2006/relationships">
+  <p:cSld>
+    <p:spTree>
+      <p:nvGrpSpPr>
+        <p:cNvPr id="1" name=""/>
+        <p:cNvGrpSpPr/>
+        <p:nvPr/>
+      </p:nvGrpSpPr>
+      <p:grpSpPr/>
+      <p:sp>
+        <p:nvSpPr>
+          <p:cNvPr id="2" name="Rounded Rectangle 1"/>
+          <p:cNvSpPr/>
+          <p:nvPr/>
+        </p:nvSpPr>
+        <p:spPr>
+          <a:xfrm>
+            <a:off x="0" y="0"/>
+            <a:ext cx="12191695" cy="64008"/>
+          </a:xfrm>
+          <a:prstGeom prst="roundRect">
+            <a:avLst>
+              <a:gd name="adj" fmla="val 50000"/>
+            </a:avLst>
+          </a:prstGeom>
+          <a:solidFill>
+            <a:srgbClr val="0B5E54"/>
+          </a:solidFill>
+          <a:ln>
+            <a:noFill/>
+          </a:ln>
+          <a:effectLst/>
+        </p:spPr>
+        <p:style>
+          <a:lnRef idx="1">
+            <a:schemeClr val="accent1"/>
+          </a:lnRef>
+          <a:fillRef idx="3">
+            <a:schemeClr val="accent1"/>
+          </a:fillRef>
+          <a:effectRef idx="2">
+            <a:schemeClr val="accent1"/>
+          </a:effectRef>
+          <a:fontRef idx="minor">
+            <a:schemeClr val="lt1"/>
+          </a:fontRef>
+        </p:style>
+        <p:txBody>
+          <a:bodyPr rtlCol="0" anchor="ctr"/>
+          <a:lstStyle/>
+          <a:p>
+            <a:pPr algn="ctr"/>
+          </a:p>
+        </p:txBody>
+      </p:sp>
+      <p:sp>
+        <p:nvSpPr>
+          <p:cNvPr id="3" name="TextBox 2"/>
+          <p:cNvSpPr txBox="1"/>
+          <p:nvPr/>
+        </p:nvSpPr>
+        <p:spPr>
+          <a:xfrm>
+            <a:off x="475488" y="146304"/>
+            <a:ext cx="8229600" cy="292608"/>
+          </a:xfrm>
+          <a:prstGeom prst="rect">
+            <a:avLst/>
+          </a:prstGeom>
+          <a:noFill/>
+        </p:spPr>
+        <p:txBody>
+          <a:bodyPr wrap="square" anchor="t" lIns="0" rIns="0" tIns="0" bIns="0">
+            <a:spAutoFit/>
+          </a:bodyPr>
+          <a:lstStyle/>
+          <a:p>
+            <a:pPr algn="l">
+              <a:lnSpc>
+                <a:spcPct val="114000"/>
+              </a:lnSpc>
+            </a:pPr>
+            <a:r>
+              <a:rPr sz="1100" b="1">
+                <a:solidFill>
+                  <a:srgbClr val="0B5E54"/>
+                </a:solidFill>
+              </a:rPr>
+              <a:t>工单实战 · 运行留证</a:t>
+            </a:r>
+          </a:p>
+        </p:txBody>
+      </p:sp>
+      <p:sp>
+        <p:nvSpPr>
+          <p:cNvPr id="4" name="Rounded Rectangle 3"/>
+          <p:cNvSpPr/>
+          <p:nvPr/>
+        </p:nvSpPr>
+        <p:spPr>
+          <a:xfrm>
+            <a:off x="475488" y="475488"/>
+            <a:ext cx="2027872" cy="310896"/>
+          </a:xfrm>
+          <a:prstGeom prst="roundRect">
+            <a:avLst>
+              <a:gd name="adj" fmla="val 50000"/>
+            </a:avLst>
+          </a:prstGeom>
+          <a:solidFill>
+            <a:srgbClr val="C9A227"/>
+          </a:solidFill>
+          <a:ln>
+            <a:noFill/>
+          </a:ln>
+          <a:effectLst/>
+        </p:spPr>
+        <p:style>
+          <a:lnRef idx="1">
+            <a:schemeClr val="accent1"/>
+          </a:lnRef>
+          <a:fillRef idx="3">
+            <a:schemeClr val="accent1"/>
+          </a:fillRef>
+          <a:effectRef idx="2">
+            <a:schemeClr val="accent1"/>
+          </a:effectRef>
+          <a:fontRef idx="minor">
+            <a:schemeClr val="lt1"/>
+          </a:fontRef>
+        </p:style>
+        <p:txBody>
+          <a:bodyPr rtlCol="0" anchor="ctr"/>
+          <a:lstStyle/>
+          <a:p>
+            <a:pPr algn="ctr"/>
+          </a:p>
+        </p:txBody>
+      </p:sp>
+      <p:sp>
+        <p:nvSpPr>
+          <p:cNvPr id="5" name="TextBox 4"/>
+          <p:cNvSpPr txBox="1"/>
+          <p:nvPr/>
+        </p:nvSpPr>
+        <p:spPr>
+          <a:xfrm>
+            <a:off x="475488" y="475488"/>
+            <a:ext cx="2027872" cy="310896"/>
+          </a:xfrm>
+          <a:prstGeom prst="rect">
+            <a:avLst/>
+          </a:prstGeom>
+          <a:noFill/>
+        </p:spPr>
+        <p:txBody>
+          <a:bodyPr wrap="square" anchor="ctr" lIns="0" rIns="0" tIns="0" bIns="0">
+            <a:spAutoFit/>
+          </a:bodyPr>
+          <a:lstStyle/>
+          <a:p>
+            <a:pPr algn="ctr">
+              <a:lnSpc>
+                <a:spcPct val="114000"/>
+              </a:lnSpc>
+            </a:pPr>
+            <a:r>
+              <a:rPr sz="1050" b="1">
+                <a:solidFill>
+                  <a:srgbClr val="FFFFFF"/>
+                </a:solidFill>
+              </a:rPr>
+              <a:t>SCREENSHOT · 终端逐字截图</a:t>
+            </a:r>
+          </a:p>
+        </p:txBody>
+      </p:sp>
+      <p:sp>
+        <p:nvSpPr>
+          <p:cNvPr id="6" name="TextBox 5"/>
+          <p:cNvSpPr txBox="1"/>
+          <p:nvPr/>
+        </p:nvSpPr>
+        <p:spPr>
+          <a:xfrm>
+            <a:off x="475488" y="859536"/>
+            <a:ext cx="11237976" cy="502920"/>
+          </a:xfrm>
+          <a:prstGeom prst="rect">
+            <a:avLst/>
+          </a:prstGeom>
+          <a:noFill/>
+        </p:spPr>
+        <p:txBody>
+          <a:bodyPr wrap="square" anchor="t" lIns="0" rIns="0" tIns="0" bIns="0">
+            <a:spAutoFit/>
+          </a:bodyPr>
+          <a:lstStyle/>
+          <a:p>
+            <a:pPr algn="l">
+              <a:lnSpc>
+                <a:spcPct val="114000"/>
+              </a:lnSpc>
+            </a:pPr>
+            <a:r>
+              <a:rPr sz="2200" b="1">
+                <a:solidFill>
+                  <a:srgbClr val="1B2B28"/>
+                </a:solidFill>
+              </a:rPr>
+              <a:t>P3.1/P3.2 · 测试全绿证据＋pytest 全量实跑</a:t>
+            </a:r>
+          </a:p>
+        </p:txBody>
+      </p:sp>
+      <p:sp>
+        <p:nvSpPr>
+          <p:cNvPr id="7" name="Rounded Rectangle 6"/>
+          <p:cNvSpPr/>
+          <p:nvPr/>
+        </p:nvSpPr>
+        <p:spPr>
+          <a:xfrm>
+            <a:off x="475488" y="1389888"/>
+            <a:ext cx="1234440" cy="27432"/>
+          </a:xfrm>
+          <a:prstGeom prst="roundRect">
+            <a:avLst>
+              <a:gd name="adj" fmla="val 50000"/>
+            </a:avLst>
+          </a:prstGeom>
+          <a:solidFill>
+            <a:srgbClr val="C9A227"/>
+          </a:solidFill>
+          <a:ln>
+            <a:noFill/>
+          </a:ln>
+          <a:effectLst/>
+        </p:spPr>
+        <p:style>
+          <a:lnRef idx="1">
+            <a:schemeClr val="accent1"/>
+          </a:lnRef>
+          <a:fillRef idx="3">
+            <a:schemeClr val="accent1"/>
+          </a:fillRef>
+          <a:effectRef idx="2">
+            <a:schemeClr val="accent1"/>
+          </a:effectRef>
+          <a:fontRef idx="minor">
+            <a:schemeClr val="lt1"/>
+          </a:fontRef>
+        </p:style>
+        <p:txBody>
+          <a:bodyPr rtlCol="0" anchor="ctr"/>
+          <a:lstStyle/>
+          <a:p>
+            <a:pPr algn="ctr"/>
+          </a:p>
+        </p:txBody>
+      </p:sp>
+      <p:sp>
+        <p:nvSpPr>
+          <p:cNvPr id="8" name="Rounded Rectangle 7"/>
+          <p:cNvSpPr/>
+          <p:nvPr/>
+        </p:nvSpPr>
+        <p:spPr>
+          <a:xfrm>
+            <a:off x="475488" y="6419088"/>
+            <a:ext cx="11237976" cy="10972"/>
+          </a:xfrm>
+          <a:prstGeom prst="roundRect">
+            <a:avLst>
+              <a:gd name="adj" fmla="val 50000"/>
+            </a:avLst>
+          </a:prstGeom>
+          <a:solidFill>
+            <a:srgbClr val="E4F1EE"/>
+          </a:solidFill>
+          <a:ln>
+            <a:noFill/>
+          </a:ln>
+          <a:effectLst/>
+        </p:spPr>
+        <p:style>
+          <a:lnRef idx="1">
+            <a:schemeClr val="accent1"/>
+          </a:lnRef>
+          <a:fillRef idx="3">
+            <a:schemeClr val="accent1"/>
+          </a:fillRef>
+          <a:effectRef idx="2">
+            <a:schemeClr val="accent1"/>
+          </a:effectRef>
+          <a:fontRef idx="minor">
+            <a:schemeClr val="lt1"/>
+          </a:fontRef>
+        </p:style>
+        <p:txBody>
+          <a:bodyPr rtlCol="0" anchor="ctr"/>
+          <a:lstStyle/>
+          <a:p>
+            <a:pPr algn="ctr"/>
+          </a:p>
+        </p:txBody>
+      </p:sp>
+      <p:sp>
+        <p:nvSpPr>
+          <p:cNvPr id="9" name="TextBox 8"/>
+          <p:cNvSpPr txBox="1"/>
+          <p:nvPr/>
+        </p:nvSpPr>
+        <p:spPr>
+          <a:xfrm>
+            <a:off x="475488" y="6455664"/>
+            <a:ext cx="7315200" cy="292608"/>
+          </a:xfrm>
+          <a:prstGeom prst="rect">
+            <a:avLst/>
+          </a:prstGeom>
+          <a:noFill/>
+        </p:spPr>
+        <p:txBody>
+          <a:bodyPr wrap="square" anchor="t" lIns="0" rIns="0" tIns="0" bIns="0">
+            <a:spAutoFit/>
+          </a:bodyPr>
+          <a:lstStyle/>
+          <a:p>
+            <a:pPr algn="l">
+              <a:lnSpc>
+                <a:spcPct val="114000"/>
+              </a:lnSpc>
+            </a:pPr>
+            <a:r>
+              <a:rPr sz="900" b="0">
+                <a:solidFill>
+                  <a:srgbClr val="5C6E6A"/>
+                </a:solidFill>
+              </a:rPr>
+              <a:t>两江智造集团 · Python程序设计（项目实战）</a:t>
+            </a:r>
+          </a:p>
+        </p:txBody>
+      </p:sp>
+      <p:sp>
+        <p:nvSpPr>
+          <p:cNvPr id="10" name="TextBox 9"/>
+          <p:cNvSpPr txBox="1"/>
+          <p:nvPr/>
+        </p:nvSpPr>
+        <p:spPr>
+          <a:xfrm>
+            <a:off x="10597896" y="6537960"/>
+            <a:ext cx="996696" cy="301752"/>
+          </a:xfrm>
+          <a:prstGeom prst="rect">
+            <a:avLst/>
+          </a:prstGeom>
+          <a:noFill/>
+        </p:spPr>
+        <p:txBody>
+          <a:bodyPr wrap="square" anchor="t" lIns="0" rIns="0" tIns="0" bIns="0">
+            <a:spAutoFit/>
+          </a:bodyPr>
+          <a:lstStyle/>
+          <a:p>
+            <a:pPr algn="r">
+              <a:lnSpc>
+                <a:spcPct val="114000"/>
+              </a:lnSpc>
+            </a:pPr>
+            <a:r>
+              <a:rPr sz="1000" b="0">
+                <a:solidFill>
+                  <a:srgbClr val="8A97B5"/>
+                </a:solidFill>
+              </a:rPr>
+              <a:t>7 / 10</a:t>
+            </a:r>
+          </a:p>
+        </p:txBody>
+      </p:sp>
+      <p:sp>
+        <p:nvSpPr>
+          <p:cNvPr id="11" name="TextBox 10"/>
+          <p:cNvSpPr txBox="1"/>
+          <p:nvPr/>
+        </p:nvSpPr>
+        <p:spPr>
+          <a:xfrm>
+            <a:off x="475488" y="1517904"/>
+            <a:ext cx="11237976" cy="237744"/>
+          </a:xfrm>
+          <a:prstGeom prst="rect">
+            <a:avLst/>
+          </a:prstGeom>
+          <a:noFill/>
+        </p:spPr>
+        <p:txBody>
+          <a:bodyPr wrap="square" anchor="t" lIns="0" rIns="0" tIns="0" bIns="0">
+            <a:spAutoFit/>
+          </a:bodyPr>
+          <a:lstStyle/>
+          <a:p>
+            <a:pPr algn="l">
+              <a:lnSpc>
+                <a:spcPct val="114000"/>
+              </a:lnSpc>
+            </a:pPr>
+            <a:r>
+              <a:rPr sz="1000" b="0">
+                <a:solidFill>
+                  <a:srgbClr val="5C6E6A"/>
+                </a:solidFill>
+              </a:rPr>
+              <a:t>pytest 全量实跑：本机真实运行输出，非示例、非节选</a:t>
+            </a:r>
+          </a:p>
+        </p:txBody>
+      </p:sp>
+      <p:pic>
+        <p:nvPicPr>
+          <p:cNvPr id="12" name="Picture 11" descr="p33_kpi_cockpit_pytest.png"/>
+          <p:cNvPicPr>
+            <a:picLocks noChangeAspect="1"/>
+          </p:cNvPicPr>
+          <p:nvPr/>
+        </p:nvPicPr>
+        <p:blipFill>
+          <a:blip r:embed="rId2"/>
+          <a:stretch>
+            <a:fillRect/>
+          </a:stretch>
+        </p:blipFill>
+        <p:spPr>
+          <a:xfrm>
+            <a:off x="475488" y="2265275"/>
+            <a:ext cx="11237976" cy="1989122"/>
+          </a:xfrm>
+          <a:prstGeom prst="rect">
+            <a:avLst/>
+          </a:prstGeom>
+        </p:spPr>
+      </p:pic>
+      <p:sp>
+        <p:nvSpPr>
+          <p:cNvPr id="13" name="TextBox 12"/>
+          <p:cNvSpPr txBox="1"/>
+          <p:nvPr/>
+        </p:nvSpPr>
+        <p:spPr>
+          <a:xfrm>
+            <a:off x="475488" y="4290972"/>
+            <a:ext cx="11237976" cy="256032"/>
+          </a:xfrm>
+          <a:prstGeom prst="rect">
+            <a:avLst/>
+          </a:prstGeom>
+          <a:noFill/>
+        </p:spPr>
+        <p:txBody>
+          <a:bodyPr wrap="square" anchor="t" lIns="0" rIns="0" tIns="0" bIns="0">
+            <a:spAutoFit/>
+          </a:bodyPr>
+          <a:lstStyle/>
+          <a:p>
+            <a:pPr algn="l">
+              <a:lnSpc>
+                <a:spcPct val="114000"/>
+              </a:lnSpc>
+            </a:pPr>
+            <a:r>
+              <a:rPr sz="850" b="0">
+                <a:solidFill>
+                  <a:srgbClr val="5C6E6A"/>
+                </a:solidFill>
+              </a:rPr>
+              <a:t>▲ pytest：270 passed in 18.75s（本机实跑，非示例）</a:t>
+            </a:r>
+          </a:p>
+        </p:txBody>
+      </p:sp>
+      <p:sp>
+        <p:nvSpPr>
+          <p:cNvPr id="14" name="Rounded Rectangle 13"/>
+          <p:cNvSpPr/>
+          <p:nvPr/>
+        </p:nvSpPr>
+        <p:spPr>
+          <a:xfrm>
+            <a:off x="475488" y="4656732"/>
+            <a:ext cx="11237976" cy="822960"/>
+          </a:xfrm>
+          <a:prstGeom prst="roundRect">
+            <a:avLst>
+              <a:gd name="adj" fmla="val 5000"/>
+            </a:avLst>
+          </a:prstGeom>
+          <a:solidFill>
+            <a:srgbClr val="E4F1EE"/>
+          </a:solidFill>
+          <a:ln>
+            <a:noFill/>
+          </a:ln>
+          <a:effectLst/>
+        </p:spPr>
+        <p:style>
+          <a:lnRef idx="1">
+            <a:schemeClr val="accent1"/>
+          </a:lnRef>
+          <a:fillRef idx="3">
+            <a:schemeClr val="accent1"/>
+          </a:fillRef>
+          <a:effectRef idx="2">
+            <a:schemeClr val="accent1"/>
+          </a:effectRef>
+          <a:fontRef idx="minor">
+            <a:schemeClr val="lt1"/>
+          </a:fontRef>
+        </p:style>
+        <p:txBody>
+          <a:bodyPr rtlCol="0" anchor="ctr"/>
+          <a:lstStyle/>
+          <a:p>
+            <a:pPr algn="ctr"/>
+          </a:p>
+        </p:txBody>
+      </p:sp>
+      <p:sp>
+        <p:nvSpPr>
+          <p:cNvPr id="15" name="Rounded Rectangle 14"/>
+          <p:cNvSpPr/>
+          <p:nvPr/>
+        </p:nvSpPr>
+        <p:spPr>
+          <a:xfrm>
+            <a:off x="475488" y="4656732"/>
+            <a:ext cx="54864" cy="822960"/>
+          </a:xfrm>
+          <a:prstGeom prst="roundRect">
+            <a:avLst>
+              <a:gd name="adj" fmla="val 50000"/>
+            </a:avLst>
+          </a:prstGeom>
+          <a:solidFill>
+            <a:srgbClr val="C9A227"/>
+          </a:solidFill>
+          <a:ln>
+            <a:noFill/>
+          </a:ln>
+          <a:effectLst/>
+        </p:spPr>
+        <p:style>
+          <a:lnRef idx="1">
+            <a:schemeClr val="accent1"/>
+          </a:lnRef>
+          <a:fillRef idx="3">
+            <a:schemeClr val="accent1"/>
+          </a:fillRef>
+          <a:effectRef idx="2">
+            <a:schemeClr val="accent1"/>
+          </a:effectRef>
+          <a:fontRef idx="minor">
+            <a:schemeClr val="lt1"/>
+          </a:fontRef>
+        </p:style>
+        <p:txBody>
+          <a:bodyPr rtlCol="0" anchor="ctr"/>
+          <a:lstStyle/>
+          <a:p>
+            <a:pPr algn="ctr"/>
+          </a:p>
+        </p:txBody>
+      </p:sp>
+      <p:sp>
+        <p:nvSpPr>
+          <p:cNvPr id="16" name="TextBox 15"/>
+          <p:cNvSpPr txBox="1"/>
+          <p:nvPr/>
+        </p:nvSpPr>
+        <p:spPr>
+          <a:xfrm>
+            <a:off x="676656" y="4739028"/>
+            <a:ext cx="10908792" cy="658368"/>
+          </a:xfrm>
+          <a:prstGeom prst="rect">
+            <a:avLst/>
+          </a:prstGeom>
+          <a:noFill/>
+        </p:spPr>
+        <p:txBody>
+          <a:bodyPr wrap="square" anchor="t" lIns="0" rIns="0" tIns="0" bIns="0">
+            <a:spAutoFit/>
+          </a:bodyPr>
+          <a:lstStyle/>
+          <a:p>
+            <a:pPr algn="l">
+              <a:lnSpc>
+                <a:spcPct val="126000"/>
+              </a:lnSpc>
+            </a:pPr>
+            <a:r>
+              <a:rPr sz="850" b="0">
+                <a:solidFill>
+                  <a:srgbClr val="1B2B28"/>
+                </a:solidFill>
+              </a:rPr>
+              <a:t>本项目四档只有一套阶梯口径（课堂 D/C/B/A 即工单及格/良好/优秀/超优），逐字实测见上一页截图；本页补的是测试全绿证据。</a:t>
+            </a:r>
+          </a:p>
+          <a:p>
+            <a:pPr algn="l">
+              <a:lnSpc>
+                <a:spcPct val="126000"/>
+              </a:lnSpc>
+            </a:pPr>
+            <a:r>
+              <a:rPr sz="850" b="0">
+                <a:solidFill>
+                  <a:srgbClr val="1B2B28"/>
+                </a:solidFill>
+              </a:rPr>
+              <a:t>复现：cd 工程化项目/p33_kpi_cockpit &amp;&amp; python -m pytest -q -o addopts=''</a:t>
+            </a:r>
+          </a:p>
+          <a:p>
+            <a:pPr algn="l">
+              <a:lnSpc>
+                <a:spcPct val="126000"/>
+              </a:lnSpc>
+            </a:pPr>
+            <a:r>
+              <a:rPr sz="850" b="0">
+                <a:solidFill>
+                  <a:srgbClr val="1B2B28"/>
+                </a:solidFill>
+              </a:rPr>
+              <a:t>工单提交：截图需含终端标题栏的文件名与完整输出，退出码 0 才算全绿。</a:t>
+            </a:r>
+          </a:p>
+        </p:txBody>
+      </p:sp>
+    </p:spTree>
+  </p:cSld>
+  <p:clrMapOvr>
+    <a:masterClrMapping/>
+  </p:clrMapOvr>
+</p:sld>
+</file>
+
 <file path=ppt/slides/slide2.xml><?xml version="1.0" encoding="utf-8"?>
 <p:sld xmlns:a="http://schemas.openxmlformats.org/drawingml/2006/main" xmlns:p="http://schemas.openxmlformats.org/presentationml/2006/main" xmlns:r="http://schemas.openxmlformats.org/officeDocument/2006/relationships">
   <p:cSld>
@@ -4903,7 +5558,7 @@
                 </a:solidFill>
                 <a:latin typeface="微软雅黑"/>
               </a:rPr>
-              <a:t>2 / 7</a:t>
+              <a:t>2 / 10</a:t>
             </a:r>
           </a:p>
         </p:txBody>
@@ -5536,7 +6191,7 @@
                 </a:solidFill>
                 <a:latin typeface="微软雅黑"/>
               </a:rPr>
-              <a:t>3 / 7</a:t>
+              <a:t>3 / 10</a:t>
             </a:r>
           </a:p>
         </p:txBody>
@@ -7317,7 +7972,7 @@
                 </a:solidFill>
                 <a:latin typeface="微软雅黑"/>
               </a:rPr>
-              <a:t>5 / 7</a:t>
+              <a:t>8 / 10</a:t>
             </a:r>
           </a:p>
         </p:txBody>
@@ -7677,7 +8332,7 @@
                 </a:solidFill>
                 <a:latin typeface="微软雅黑"/>
               </a:rPr>
-              <a:t>6 / 7</a:t>
+              <a:t>9 / 10</a:t>
             </a:r>
           </a:p>
         </p:txBody>
@@ -8036,6 +8691,2466 @@
                 <a:latin typeface="微软雅黑"/>
               </a:rPr>
               <a:t>带着问题来上课——Predict先于Run</a:t>
+            </a:r>
+          </a:p>
+        </p:txBody>
+      </p:sp>
+    </p:spTree>
+  </p:cSld>
+  <p:clrMapOvr>
+    <a:masterClrMapping/>
+  </p:clrMapOvr>
+</p:sld>
+</file>
+
+<file path=ppt/slides/slide8.xml><?xml version="1.0" encoding="utf-8"?>
+<p:sld xmlns:a="http://schemas.openxmlformats.org/drawingml/2006/main" xmlns:p="http://schemas.openxmlformats.org/presentationml/2006/main" xmlns:r="http://schemas.openxmlformats.org/officeDocument/2006/relationships">
+  <p:cSld>
+    <p:spTree>
+      <p:nvGrpSpPr>
+        <p:cNvPr id="1" name=""/>
+        <p:cNvGrpSpPr/>
+        <p:nvPr/>
+      </p:nvGrpSpPr>
+      <p:grpSpPr/>
+      <p:sp>
+        <p:nvSpPr>
+          <p:cNvPr id="2" name="Rounded Rectangle 1"/>
+          <p:cNvSpPr/>
+          <p:nvPr/>
+        </p:nvSpPr>
+        <p:spPr>
+          <a:xfrm>
+            <a:off x="0" y="0"/>
+            <a:ext cx="12191695" cy="64008"/>
+          </a:xfrm>
+          <a:prstGeom prst="roundRect">
+            <a:avLst>
+              <a:gd name="adj" fmla="val 50000"/>
+            </a:avLst>
+          </a:prstGeom>
+          <a:solidFill>
+            <a:srgbClr val="0B5E54"/>
+          </a:solidFill>
+          <a:ln>
+            <a:noFill/>
+          </a:ln>
+          <a:effectLst/>
+        </p:spPr>
+        <p:style>
+          <a:lnRef idx="1">
+            <a:schemeClr val="accent1"/>
+          </a:lnRef>
+          <a:fillRef idx="3">
+            <a:schemeClr val="accent1"/>
+          </a:fillRef>
+          <a:effectRef idx="2">
+            <a:schemeClr val="accent1"/>
+          </a:effectRef>
+          <a:fontRef idx="minor">
+            <a:schemeClr val="lt1"/>
+          </a:fontRef>
+        </p:style>
+        <p:txBody>
+          <a:bodyPr rtlCol="0" anchor="ctr"/>
+          <a:lstStyle/>
+          <a:p>
+            <a:pPr algn="ctr"/>
+          </a:p>
+        </p:txBody>
+      </p:sp>
+      <p:sp>
+        <p:nvSpPr>
+          <p:cNvPr id="3" name="TextBox 2"/>
+          <p:cNvSpPr txBox="1"/>
+          <p:nvPr/>
+        </p:nvSpPr>
+        <p:spPr>
+          <a:xfrm>
+            <a:off x="475488" y="146304"/>
+            <a:ext cx="8229600" cy="292608"/>
+          </a:xfrm>
+          <a:prstGeom prst="rect">
+            <a:avLst/>
+          </a:prstGeom>
+          <a:noFill/>
+        </p:spPr>
+        <p:txBody>
+          <a:bodyPr wrap="square" anchor="t" lIns="0" rIns="0" tIns="0" bIns="0">
+            <a:spAutoFit/>
+          </a:bodyPr>
+          <a:lstStyle/>
+          <a:p>
+            <a:pPr algn="l">
+              <a:lnSpc>
+                <a:spcPct val="114000"/>
+              </a:lnSpc>
+            </a:pPr>
+            <a:r>
+              <a:rPr sz="1100" b="1">
+                <a:solidFill>
+                  <a:srgbClr val="0B5E54"/>
+                </a:solidFill>
+              </a:rPr>
+              <a:t>工单实战 · 本次实跑结果</a:t>
+            </a:r>
+          </a:p>
+        </p:txBody>
+      </p:sp>
+      <p:sp>
+        <p:nvSpPr>
+          <p:cNvPr id="4" name="Rounded Rectangle 3"/>
+          <p:cNvSpPr/>
+          <p:nvPr/>
+        </p:nvSpPr>
+        <p:spPr>
+          <a:xfrm>
+            <a:off x="475488" y="475488"/>
+            <a:ext cx="1881187" cy="310896"/>
+          </a:xfrm>
+          <a:prstGeom prst="roundRect">
+            <a:avLst>
+              <a:gd name="adj" fmla="val 50000"/>
+            </a:avLst>
+          </a:prstGeom>
+          <a:solidFill>
+            <a:srgbClr val="C9A227"/>
+          </a:solidFill>
+          <a:ln>
+            <a:noFill/>
+          </a:ln>
+          <a:effectLst/>
+        </p:spPr>
+        <p:style>
+          <a:lnRef idx="1">
+            <a:schemeClr val="accent1"/>
+          </a:lnRef>
+          <a:fillRef idx="3">
+            <a:schemeClr val="accent1"/>
+          </a:fillRef>
+          <a:effectRef idx="2">
+            <a:schemeClr val="accent1"/>
+          </a:effectRef>
+          <a:fontRef idx="minor">
+            <a:schemeClr val="lt1"/>
+          </a:fontRef>
+        </p:style>
+        <p:txBody>
+          <a:bodyPr rtlCol="0" anchor="ctr"/>
+          <a:lstStyle/>
+          <a:p>
+            <a:pPr algn="ctr"/>
+          </a:p>
+        </p:txBody>
+      </p:sp>
+      <p:sp>
+        <p:nvSpPr>
+          <p:cNvPr id="5" name="TextBox 4"/>
+          <p:cNvSpPr txBox="1"/>
+          <p:nvPr/>
+        </p:nvSpPr>
+        <p:spPr>
+          <a:xfrm>
+            <a:off x="475488" y="475488"/>
+            <a:ext cx="1881187" cy="310896"/>
+          </a:xfrm>
+          <a:prstGeom prst="rect">
+            <a:avLst/>
+          </a:prstGeom>
+          <a:noFill/>
+        </p:spPr>
+        <p:txBody>
+          <a:bodyPr wrap="square" anchor="ctr" lIns="0" rIns="0" tIns="0" bIns="0">
+            <a:spAutoFit/>
+          </a:bodyPr>
+          <a:lstStyle/>
+          <a:p>
+            <a:pPr algn="ctr">
+              <a:lnSpc>
+                <a:spcPct val="114000"/>
+              </a:lnSpc>
+            </a:pPr>
+            <a:r>
+              <a:rPr sz="1050" b="1">
+                <a:solidFill>
+                  <a:srgbClr val="FFFFFF"/>
+                </a:solidFill>
+              </a:rPr>
+              <a:t>REAL RUN · 四档逐字实测</a:t>
+            </a:r>
+          </a:p>
+        </p:txBody>
+      </p:sp>
+      <p:sp>
+        <p:nvSpPr>
+          <p:cNvPr id="6" name="TextBox 5"/>
+          <p:cNvSpPr txBox="1"/>
+          <p:nvPr/>
+        </p:nvSpPr>
+        <p:spPr>
+          <a:xfrm>
+            <a:off x="475488" y="859536"/>
+            <a:ext cx="11237976" cy="502920"/>
+          </a:xfrm>
+          <a:prstGeom prst="rect">
+            <a:avLst/>
+          </a:prstGeom>
+          <a:noFill/>
+        </p:spPr>
+        <p:txBody>
+          <a:bodyPr wrap="square" anchor="t" lIns="0" rIns="0" tIns="0" bIns="0">
+            <a:spAutoFit/>
+          </a:bodyPr>
+          <a:lstStyle/>
+          <a:p>
+            <a:pPr algn="l">
+              <a:lnSpc>
+                <a:spcPct val="114000"/>
+              </a:lnSpc>
+            </a:pPr>
+            <a:r>
+              <a:rPr sz="2200" b="1">
+                <a:solidFill>
+                  <a:srgbClr val="1B2B28"/>
+                </a:solidFill>
+              </a:rPr>
+              <a:t>P3.1/P3.2 p33_kpi_cockpit：本次 D/C/B/A 四档实测</a:t>
+            </a:r>
+          </a:p>
+        </p:txBody>
+      </p:sp>
+      <p:sp>
+        <p:nvSpPr>
+          <p:cNvPr id="7" name="Rounded Rectangle 6"/>
+          <p:cNvSpPr/>
+          <p:nvPr/>
+        </p:nvSpPr>
+        <p:spPr>
+          <a:xfrm>
+            <a:off x="475488" y="1389888"/>
+            <a:ext cx="1234440" cy="27432"/>
+          </a:xfrm>
+          <a:prstGeom prst="roundRect">
+            <a:avLst>
+              <a:gd name="adj" fmla="val 50000"/>
+            </a:avLst>
+          </a:prstGeom>
+          <a:solidFill>
+            <a:srgbClr val="C9A227"/>
+          </a:solidFill>
+          <a:ln>
+            <a:noFill/>
+          </a:ln>
+          <a:effectLst/>
+        </p:spPr>
+        <p:style>
+          <a:lnRef idx="1">
+            <a:schemeClr val="accent1"/>
+          </a:lnRef>
+          <a:fillRef idx="3">
+            <a:schemeClr val="accent1"/>
+          </a:fillRef>
+          <a:effectRef idx="2">
+            <a:schemeClr val="accent1"/>
+          </a:effectRef>
+          <a:fontRef idx="minor">
+            <a:schemeClr val="lt1"/>
+          </a:fontRef>
+        </p:style>
+        <p:txBody>
+          <a:bodyPr rtlCol="0" anchor="ctr"/>
+          <a:lstStyle/>
+          <a:p>
+            <a:pPr algn="ctr"/>
+          </a:p>
+        </p:txBody>
+      </p:sp>
+      <p:sp>
+        <p:nvSpPr>
+          <p:cNvPr id="8" name="Rounded Rectangle 7"/>
+          <p:cNvSpPr/>
+          <p:nvPr/>
+        </p:nvSpPr>
+        <p:spPr>
+          <a:xfrm>
+            <a:off x="475488" y="6419088"/>
+            <a:ext cx="11237976" cy="10972"/>
+          </a:xfrm>
+          <a:prstGeom prst="roundRect">
+            <a:avLst>
+              <a:gd name="adj" fmla="val 50000"/>
+            </a:avLst>
+          </a:prstGeom>
+          <a:solidFill>
+            <a:srgbClr val="E4F1EE"/>
+          </a:solidFill>
+          <a:ln>
+            <a:noFill/>
+          </a:ln>
+          <a:effectLst/>
+        </p:spPr>
+        <p:style>
+          <a:lnRef idx="1">
+            <a:schemeClr val="accent1"/>
+          </a:lnRef>
+          <a:fillRef idx="3">
+            <a:schemeClr val="accent1"/>
+          </a:fillRef>
+          <a:effectRef idx="2">
+            <a:schemeClr val="accent1"/>
+          </a:effectRef>
+          <a:fontRef idx="minor">
+            <a:schemeClr val="lt1"/>
+          </a:fontRef>
+        </p:style>
+        <p:txBody>
+          <a:bodyPr rtlCol="0" anchor="ctr"/>
+          <a:lstStyle/>
+          <a:p>
+            <a:pPr algn="ctr"/>
+          </a:p>
+        </p:txBody>
+      </p:sp>
+      <p:sp>
+        <p:nvSpPr>
+          <p:cNvPr id="9" name="TextBox 8"/>
+          <p:cNvSpPr txBox="1"/>
+          <p:nvPr/>
+        </p:nvSpPr>
+        <p:spPr>
+          <a:xfrm>
+            <a:off x="475488" y="6455664"/>
+            <a:ext cx="7315200" cy="292608"/>
+          </a:xfrm>
+          <a:prstGeom prst="rect">
+            <a:avLst/>
+          </a:prstGeom>
+          <a:noFill/>
+        </p:spPr>
+        <p:txBody>
+          <a:bodyPr wrap="square" anchor="t" lIns="0" rIns="0" tIns="0" bIns="0">
+            <a:spAutoFit/>
+          </a:bodyPr>
+          <a:lstStyle/>
+          <a:p>
+            <a:pPr algn="l">
+              <a:lnSpc>
+                <a:spcPct val="114000"/>
+              </a:lnSpc>
+            </a:pPr>
+            <a:r>
+              <a:rPr sz="900" b="0">
+                <a:solidFill>
+                  <a:srgbClr val="5C6E6A"/>
+                </a:solidFill>
+              </a:rPr>
+              <a:t>两江智造集团 · Python程序设计（项目实战）</a:t>
+            </a:r>
+          </a:p>
+        </p:txBody>
+      </p:sp>
+      <p:sp>
+        <p:nvSpPr>
+          <p:cNvPr id="10" name="TextBox 9"/>
+          <p:cNvSpPr txBox="1"/>
+          <p:nvPr/>
+        </p:nvSpPr>
+        <p:spPr>
+          <a:xfrm>
+            <a:off x="10597896" y="6537960"/>
+            <a:ext cx="996696" cy="301752"/>
+          </a:xfrm>
+          <a:prstGeom prst="rect">
+            <a:avLst/>
+          </a:prstGeom>
+          <a:noFill/>
+        </p:spPr>
+        <p:txBody>
+          <a:bodyPr wrap="square" anchor="t" lIns="0" rIns="0" tIns="0" bIns="0">
+            <a:spAutoFit/>
+          </a:bodyPr>
+          <a:lstStyle/>
+          <a:p>
+            <a:pPr algn="r">
+              <a:lnSpc>
+                <a:spcPct val="114000"/>
+              </a:lnSpc>
+            </a:pPr>
+            <a:r>
+              <a:rPr sz="1000" b="0">
+                <a:solidFill>
+                  <a:srgbClr val="8A97B5"/>
+                </a:solidFill>
+              </a:rPr>
+              <a:t>5 / 10</a:t>
+            </a:r>
+          </a:p>
+        </p:txBody>
+      </p:sp>
+      <p:sp>
+        <p:nvSpPr>
+          <p:cNvPr id="11" name="Rounded Rectangle 10"/>
+          <p:cNvSpPr/>
+          <p:nvPr/>
+        </p:nvSpPr>
+        <p:spPr>
+          <a:xfrm>
+            <a:off x="475488" y="1554480"/>
+            <a:ext cx="11237976" cy="825497"/>
+          </a:xfrm>
+          <a:prstGeom prst="roundRect">
+            <a:avLst>
+              <a:gd name="adj" fmla="val 6000"/>
+            </a:avLst>
+          </a:prstGeom>
+          <a:solidFill>
+            <a:srgbClr val="FFFFFF"/>
+          </a:solidFill>
+          <a:ln w="9525">
+            <a:solidFill>
+              <a:srgbClr val="E4F1EE"/>
+            </a:solidFill>
+          </a:ln>
+          <a:effectLst/>
+        </p:spPr>
+        <p:style>
+          <a:lnRef idx="1">
+            <a:schemeClr val="accent1"/>
+          </a:lnRef>
+          <a:fillRef idx="3">
+            <a:schemeClr val="accent1"/>
+          </a:fillRef>
+          <a:effectRef idx="2">
+            <a:schemeClr val="accent1"/>
+          </a:effectRef>
+          <a:fontRef idx="minor">
+            <a:schemeClr val="lt1"/>
+          </a:fontRef>
+        </p:style>
+        <p:txBody>
+          <a:bodyPr rtlCol="0" anchor="ctr"/>
+          <a:lstStyle/>
+          <a:p>
+            <a:pPr algn="ctr"/>
+          </a:p>
+        </p:txBody>
+      </p:sp>
+      <p:sp>
+        <p:nvSpPr>
+          <p:cNvPr id="12" name="Rounded Rectangle 11"/>
+          <p:cNvSpPr/>
+          <p:nvPr/>
+        </p:nvSpPr>
+        <p:spPr>
+          <a:xfrm>
+            <a:off x="475488" y="1554480"/>
+            <a:ext cx="54864" cy="825497"/>
+          </a:xfrm>
+          <a:prstGeom prst="roundRect">
+            <a:avLst>
+              <a:gd name="adj" fmla="val 50000"/>
+            </a:avLst>
+          </a:prstGeom>
+          <a:solidFill>
+            <a:srgbClr val="5C6E6A"/>
+          </a:solidFill>
+          <a:ln>
+            <a:noFill/>
+          </a:ln>
+          <a:effectLst/>
+        </p:spPr>
+        <p:style>
+          <a:lnRef idx="1">
+            <a:schemeClr val="accent1"/>
+          </a:lnRef>
+          <a:fillRef idx="3">
+            <a:schemeClr val="accent1"/>
+          </a:fillRef>
+          <a:effectRef idx="2">
+            <a:schemeClr val="accent1"/>
+          </a:effectRef>
+          <a:fontRef idx="minor">
+            <a:schemeClr val="lt1"/>
+          </a:fontRef>
+        </p:style>
+        <p:txBody>
+          <a:bodyPr rtlCol="0" anchor="ctr"/>
+          <a:lstStyle/>
+          <a:p>
+            <a:pPr algn="ctr"/>
+          </a:p>
+        </p:txBody>
+      </p:sp>
+      <p:sp>
+        <p:nvSpPr>
+          <p:cNvPr id="13" name="Rounded Rectangle 12"/>
+          <p:cNvSpPr/>
+          <p:nvPr/>
+        </p:nvSpPr>
+        <p:spPr>
+          <a:xfrm>
+            <a:off x="621792" y="1636776"/>
+            <a:ext cx="237744" cy="237744"/>
+          </a:xfrm>
+          <a:prstGeom prst="roundRect">
+            <a:avLst>
+              <a:gd name="adj" fmla="val 28000"/>
+            </a:avLst>
+          </a:prstGeom>
+          <a:solidFill>
+            <a:srgbClr val="5C6E6A"/>
+          </a:solidFill>
+          <a:ln>
+            <a:noFill/>
+          </a:ln>
+          <a:effectLst/>
+        </p:spPr>
+        <p:style>
+          <a:lnRef idx="1">
+            <a:schemeClr val="accent1"/>
+          </a:lnRef>
+          <a:fillRef idx="3">
+            <a:schemeClr val="accent1"/>
+          </a:fillRef>
+          <a:effectRef idx="2">
+            <a:schemeClr val="accent1"/>
+          </a:effectRef>
+          <a:fontRef idx="minor">
+            <a:schemeClr val="lt1"/>
+          </a:fontRef>
+        </p:style>
+        <p:txBody>
+          <a:bodyPr rtlCol="0" anchor="ctr"/>
+          <a:lstStyle/>
+          <a:p>
+            <a:pPr algn="ctr"/>
+          </a:p>
+        </p:txBody>
+      </p:sp>
+      <p:sp>
+        <p:nvSpPr>
+          <p:cNvPr id="14" name="TextBox 13"/>
+          <p:cNvSpPr txBox="1"/>
+          <p:nvPr/>
+        </p:nvSpPr>
+        <p:spPr>
+          <a:xfrm>
+            <a:off x="621792" y="1636776"/>
+            <a:ext cx="237744" cy="237744"/>
+          </a:xfrm>
+          <a:prstGeom prst="rect">
+            <a:avLst/>
+          </a:prstGeom>
+          <a:noFill/>
+        </p:spPr>
+        <p:txBody>
+          <a:bodyPr wrap="square" anchor="ctr" lIns="0" rIns="0" tIns="0" bIns="0">
+            <a:spAutoFit/>
+          </a:bodyPr>
+          <a:lstStyle/>
+          <a:p>
+            <a:pPr algn="ctr">
+              <a:lnSpc>
+                <a:spcPct val="114000"/>
+              </a:lnSpc>
+            </a:pPr>
+            <a:r>
+              <a:rPr sz="1000" b="1">
+                <a:solidFill>
+                  <a:srgbClr val="FFFFFF"/>
+                </a:solidFill>
+              </a:rPr>
+              <a:t>D</a:t>
+            </a:r>
+          </a:p>
+        </p:txBody>
+      </p:sp>
+      <p:sp>
+        <p:nvSpPr>
+          <p:cNvPr id="15" name="TextBox 14"/>
+          <p:cNvSpPr txBox="1"/>
+          <p:nvPr/>
+        </p:nvSpPr>
+        <p:spPr>
+          <a:xfrm>
+            <a:off x="932688" y="1618488"/>
+            <a:ext cx="8778240" cy="274320"/>
+          </a:xfrm>
+          <a:prstGeom prst="rect">
+            <a:avLst/>
+          </a:prstGeom>
+          <a:noFill/>
+        </p:spPr>
+        <p:txBody>
+          <a:bodyPr wrap="square" anchor="ctr" lIns="0" rIns="0" tIns="0" bIns="0">
+            <a:spAutoFit/>
+          </a:bodyPr>
+          <a:lstStyle/>
+          <a:p>
+            <a:pPr algn="l">
+              <a:lnSpc>
+                <a:spcPct val="114000"/>
+              </a:lnSpc>
+            </a:pPr>
+            <a:r>
+              <a:rPr sz="1050" b="1">
+                <a:solidFill>
+                  <a:srgbClr val="1B2B28"/>
+                </a:solidFill>
+              </a:rPr>
+              <a:t>及格</a:t>
+            </a:r>
+            <a:r>
+              <a:rPr sz="850" b="0">
+                <a:solidFill>
+                  <a:srgbClr val="5C6E6A"/>
+                </a:solidFill>
+              </a:rPr>
+              <a:t>   验收口径：</a:t>
+            </a:r>
+            <a:r>
+              <a:rPr sz="850" b="0">
+                <a:solidFill>
+                  <a:srgbClr val="5C6E6A"/>
+                </a:solidFill>
+              </a:rPr>
+              <a:t>KPI可用+时间筛选；日报四部分完整+PDF正确</a:t>
+            </a:r>
+          </a:p>
+        </p:txBody>
+      </p:sp>
+      <p:sp>
+        <p:nvSpPr>
+          <p:cNvPr id="16" name="Rounded Rectangle 15"/>
+          <p:cNvSpPr/>
+          <p:nvPr/>
+        </p:nvSpPr>
+        <p:spPr>
+          <a:xfrm>
+            <a:off x="11131803" y="1645920"/>
+            <a:ext cx="453644" cy="237744"/>
+          </a:xfrm>
+          <a:prstGeom prst="roundRect">
+            <a:avLst>
+              <a:gd name="adj" fmla="val 50000"/>
+            </a:avLst>
+          </a:prstGeom>
+          <a:solidFill>
+            <a:srgbClr val="0B5E54"/>
+          </a:solidFill>
+          <a:ln>
+            <a:noFill/>
+          </a:ln>
+          <a:effectLst/>
+        </p:spPr>
+        <p:style>
+          <a:lnRef idx="1">
+            <a:schemeClr val="accent1"/>
+          </a:lnRef>
+          <a:fillRef idx="3">
+            <a:schemeClr val="accent1"/>
+          </a:fillRef>
+          <a:effectRef idx="2">
+            <a:schemeClr val="accent1"/>
+          </a:effectRef>
+          <a:fontRef idx="minor">
+            <a:schemeClr val="lt1"/>
+          </a:fontRef>
+        </p:style>
+        <p:txBody>
+          <a:bodyPr rtlCol="0" anchor="ctr"/>
+          <a:lstStyle/>
+          <a:p>
+            <a:pPr algn="ctr"/>
+          </a:p>
+        </p:txBody>
+      </p:sp>
+      <p:sp>
+        <p:nvSpPr>
+          <p:cNvPr id="17" name="TextBox 16"/>
+          <p:cNvSpPr txBox="1"/>
+          <p:nvPr/>
+        </p:nvSpPr>
+        <p:spPr>
+          <a:xfrm>
+            <a:off x="11131803" y="1645920"/>
+            <a:ext cx="453644" cy="237744"/>
+          </a:xfrm>
+          <a:prstGeom prst="rect">
+            <a:avLst/>
+          </a:prstGeom>
+          <a:noFill/>
+        </p:spPr>
+        <p:txBody>
+          <a:bodyPr wrap="square" anchor="ctr" lIns="0" rIns="0" tIns="0" bIns="0">
+            <a:spAutoFit/>
+          </a:bodyPr>
+          <a:lstStyle/>
+          <a:p>
+            <a:pPr algn="ctr">
+              <a:lnSpc>
+                <a:spcPct val="114000"/>
+              </a:lnSpc>
+            </a:pPr>
+            <a:r>
+              <a:rPr sz="850" b="1">
+                <a:solidFill>
+                  <a:srgbClr val="FFFFFF"/>
+                </a:solidFill>
+              </a:rPr>
+              <a:t>达标</a:t>
+            </a:r>
+          </a:p>
+        </p:txBody>
+      </p:sp>
+      <p:sp>
+        <p:nvSpPr>
+          <p:cNvPr id="18" name="TextBox 17"/>
+          <p:cNvSpPr txBox="1"/>
+          <p:nvPr/>
+        </p:nvSpPr>
+        <p:spPr>
+          <a:xfrm>
+            <a:off x="932688" y="1901952"/>
+            <a:ext cx="10671047" cy="423161"/>
+          </a:xfrm>
+          <a:prstGeom prst="rect">
+            <a:avLst/>
+          </a:prstGeom>
+          <a:noFill/>
+        </p:spPr>
+        <p:txBody>
+          <a:bodyPr wrap="square" anchor="t" lIns="0" rIns="0" tIns="0" bIns="0">
+            <a:spAutoFit/>
+          </a:bodyPr>
+          <a:lstStyle/>
+          <a:p>
+            <a:pPr algn="l">
+              <a:lnSpc>
+                <a:spcPct val="114000"/>
+              </a:lnSpc>
+            </a:pPr>
+            <a:r>
+              <a:rPr sz="950" b="0">
+                <a:solidFill>
+                  <a:srgbClr val="1B2B28"/>
+                </a:solidFill>
+              </a:rPr>
+              <a:t>必做 KPI 5/5 全有值；时间筛选：同一 core.filter_records 缩到单日 2026-03-01 命中 47 行（全量 1186）；四段 生产概览 / 详细分析 / 异常识别 / 数据附表 全部见于 daily_report.html；PDF daily_report.pdf 校验通过：42190 B / 4 页，%PDF- 头与 %%EOF 尾齐</a:t>
+            </a:r>
+          </a:p>
+        </p:txBody>
+      </p:sp>
+      <p:sp>
+        <p:nvSpPr>
+          <p:cNvPr id="19" name="Rounded Rectangle 18"/>
+          <p:cNvSpPr/>
+          <p:nvPr/>
+        </p:nvSpPr>
+        <p:spPr>
+          <a:xfrm>
+            <a:off x="475488" y="2443985"/>
+            <a:ext cx="11237976" cy="1007874"/>
+          </a:xfrm>
+          <a:prstGeom prst="roundRect">
+            <a:avLst>
+              <a:gd name="adj" fmla="val 6000"/>
+            </a:avLst>
+          </a:prstGeom>
+          <a:solidFill>
+            <a:srgbClr val="FFFFFF"/>
+          </a:solidFill>
+          <a:ln w="9525">
+            <a:solidFill>
+              <a:srgbClr val="E4F1EE"/>
+            </a:solidFill>
+          </a:ln>
+          <a:effectLst/>
+        </p:spPr>
+        <p:style>
+          <a:lnRef idx="1">
+            <a:schemeClr val="accent1"/>
+          </a:lnRef>
+          <a:fillRef idx="3">
+            <a:schemeClr val="accent1"/>
+          </a:fillRef>
+          <a:effectRef idx="2">
+            <a:schemeClr val="accent1"/>
+          </a:effectRef>
+          <a:fontRef idx="minor">
+            <a:schemeClr val="lt1"/>
+          </a:fontRef>
+        </p:style>
+        <p:txBody>
+          <a:bodyPr rtlCol="0" anchor="ctr"/>
+          <a:lstStyle/>
+          <a:p>
+            <a:pPr algn="ctr"/>
+          </a:p>
+        </p:txBody>
+      </p:sp>
+      <p:sp>
+        <p:nvSpPr>
+          <p:cNvPr id="20" name="Rounded Rectangle 19"/>
+          <p:cNvSpPr/>
+          <p:nvPr/>
+        </p:nvSpPr>
+        <p:spPr>
+          <a:xfrm>
+            <a:off x="475488" y="2443985"/>
+            <a:ext cx="54864" cy="1007874"/>
+          </a:xfrm>
+          <a:prstGeom prst="roundRect">
+            <a:avLst>
+              <a:gd name="adj" fmla="val 50000"/>
+            </a:avLst>
+          </a:prstGeom>
+          <a:solidFill>
+            <a:srgbClr val="157A6D"/>
+          </a:solidFill>
+          <a:ln>
+            <a:noFill/>
+          </a:ln>
+          <a:effectLst/>
+        </p:spPr>
+        <p:style>
+          <a:lnRef idx="1">
+            <a:schemeClr val="accent1"/>
+          </a:lnRef>
+          <a:fillRef idx="3">
+            <a:schemeClr val="accent1"/>
+          </a:fillRef>
+          <a:effectRef idx="2">
+            <a:schemeClr val="accent1"/>
+          </a:effectRef>
+          <a:fontRef idx="minor">
+            <a:schemeClr val="lt1"/>
+          </a:fontRef>
+        </p:style>
+        <p:txBody>
+          <a:bodyPr rtlCol="0" anchor="ctr"/>
+          <a:lstStyle/>
+          <a:p>
+            <a:pPr algn="ctr"/>
+          </a:p>
+        </p:txBody>
+      </p:sp>
+      <p:sp>
+        <p:nvSpPr>
+          <p:cNvPr id="21" name="Rounded Rectangle 20"/>
+          <p:cNvSpPr/>
+          <p:nvPr/>
+        </p:nvSpPr>
+        <p:spPr>
+          <a:xfrm>
+            <a:off x="621792" y="2526281"/>
+            <a:ext cx="237744" cy="237744"/>
+          </a:xfrm>
+          <a:prstGeom prst="roundRect">
+            <a:avLst>
+              <a:gd name="adj" fmla="val 28000"/>
+            </a:avLst>
+          </a:prstGeom>
+          <a:solidFill>
+            <a:srgbClr val="157A6D"/>
+          </a:solidFill>
+          <a:ln>
+            <a:noFill/>
+          </a:ln>
+          <a:effectLst/>
+        </p:spPr>
+        <p:style>
+          <a:lnRef idx="1">
+            <a:schemeClr val="accent1"/>
+          </a:lnRef>
+          <a:fillRef idx="3">
+            <a:schemeClr val="accent1"/>
+          </a:fillRef>
+          <a:effectRef idx="2">
+            <a:schemeClr val="accent1"/>
+          </a:effectRef>
+          <a:fontRef idx="minor">
+            <a:schemeClr val="lt1"/>
+          </a:fontRef>
+        </p:style>
+        <p:txBody>
+          <a:bodyPr rtlCol="0" anchor="ctr"/>
+          <a:lstStyle/>
+          <a:p>
+            <a:pPr algn="ctr"/>
+          </a:p>
+        </p:txBody>
+      </p:sp>
+      <p:sp>
+        <p:nvSpPr>
+          <p:cNvPr id="22" name="TextBox 21"/>
+          <p:cNvSpPr txBox="1"/>
+          <p:nvPr/>
+        </p:nvSpPr>
+        <p:spPr>
+          <a:xfrm>
+            <a:off x="621792" y="2526281"/>
+            <a:ext cx="237744" cy="237744"/>
+          </a:xfrm>
+          <a:prstGeom prst="rect">
+            <a:avLst/>
+          </a:prstGeom>
+          <a:noFill/>
+        </p:spPr>
+        <p:txBody>
+          <a:bodyPr wrap="square" anchor="ctr" lIns="0" rIns="0" tIns="0" bIns="0">
+            <a:spAutoFit/>
+          </a:bodyPr>
+          <a:lstStyle/>
+          <a:p>
+            <a:pPr algn="ctr">
+              <a:lnSpc>
+                <a:spcPct val="114000"/>
+              </a:lnSpc>
+            </a:pPr>
+            <a:r>
+              <a:rPr sz="1000" b="1">
+                <a:solidFill>
+                  <a:srgbClr val="FFFFFF"/>
+                </a:solidFill>
+              </a:rPr>
+              <a:t>C</a:t>
+            </a:r>
+          </a:p>
+        </p:txBody>
+      </p:sp>
+      <p:sp>
+        <p:nvSpPr>
+          <p:cNvPr id="23" name="TextBox 22"/>
+          <p:cNvSpPr txBox="1"/>
+          <p:nvPr/>
+        </p:nvSpPr>
+        <p:spPr>
+          <a:xfrm>
+            <a:off x="932688" y="2507993"/>
+            <a:ext cx="8778240" cy="274320"/>
+          </a:xfrm>
+          <a:prstGeom prst="rect">
+            <a:avLst/>
+          </a:prstGeom>
+          <a:noFill/>
+        </p:spPr>
+        <p:txBody>
+          <a:bodyPr wrap="square" anchor="ctr" lIns="0" rIns="0" tIns="0" bIns="0">
+            <a:spAutoFit/>
+          </a:bodyPr>
+          <a:lstStyle/>
+          <a:p>
+            <a:pPr algn="l">
+              <a:lnSpc>
+                <a:spcPct val="114000"/>
+              </a:lnSpc>
+            </a:pPr>
+            <a:r>
+              <a:rPr sz="1050" b="1">
+                <a:solidFill>
+                  <a:srgbClr val="1B2B28"/>
+                </a:solidFill>
+              </a:rPr>
+              <a:t>良好</a:t>
+            </a:r>
+            <a:r>
+              <a:rPr sz="850" b="0">
+                <a:solidFill>
+                  <a:srgbClr val="5C6E6A"/>
+                </a:solidFill>
+              </a:rPr>
+              <a:t>   验收口径：</a:t>
+            </a:r>
+            <a:r>
+              <a:rPr sz="850" b="0">
+                <a:solidFill>
+                  <a:srgbClr val="5C6E6A"/>
+                </a:solidFill>
+              </a:rPr>
+              <a:t>联动筛选流畅；日报生成&lt;2分钟</a:t>
+            </a:r>
+          </a:p>
+        </p:txBody>
+      </p:sp>
+      <p:sp>
+        <p:nvSpPr>
+          <p:cNvPr id="24" name="Rounded Rectangle 23"/>
+          <p:cNvSpPr/>
+          <p:nvPr/>
+        </p:nvSpPr>
+        <p:spPr>
+          <a:xfrm>
+            <a:off x="11131803" y="2535425"/>
+            <a:ext cx="453644" cy="237744"/>
+          </a:xfrm>
+          <a:prstGeom prst="roundRect">
+            <a:avLst>
+              <a:gd name="adj" fmla="val 50000"/>
+            </a:avLst>
+          </a:prstGeom>
+          <a:solidFill>
+            <a:srgbClr val="0B5E54"/>
+          </a:solidFill>
+          <a:ln>
+            <a:noFill/>
+          </a:ln>
+          <a:effectLst/>
+        </p:spPr>
+        <p:style>
+          <a:lnRef idx="1">
+            <a:schemeClr val="accent1"/>
+          </a:lnRef>
+          <a:fillRef idx="3">
+            <a:schemeClr val="accent1"/>
+          </a:fillRef>
+          <a:effectRef idx="2">
+            <a:schemeClr val="accent1"/>
+          </a:effectRef>
+          <a:fontRef idx="minor">
+            <a:schemeClr val="lt1"/>
+          </a:fontRef>
+        </p:style>
+        <p:txBody>
+          <a:bodyPr rtlCol="0" anchor="ctr"/>
+          <a:lstStyle/>
+          <a:p>
+            <a:pPr algn="ctr"/>
+          </a:p>
+        </p:txBody>
+      </p:sp>
+      <p:sp>
+        <p:nvSpPr>
+          <p:cNvPr id="25" name="TextBox 24"/>
+          <p:cNvSpPr txBox="1"/>
+          <p:nvPr/>
+        </p:nvSpPr>
+        <p:spPr>
+          <a:xfrm>
+            <a:off x="11131803" y="2535425"/>
+            <a:ext cx="453644" cy="237744"/>
+          </a:xfrm>
+          <a:prstGeom prst="rect">
+            <a:avLst/>
+          </a:prstGeom>
+          <a:noFill/>
+        </p:spPr>
+        <p:txBody>
+          <a:bodyPr wrap="square" anchor="ctr" lIns="0" rIns="0" tIns="0" bIns="0">
+            <a:spAutoFit/>
+          </a:bodyPr>
+          <a:lstStyle/>
+          <a:p>
+            <a:pPr algn="ctr">
+              <a:lnSpc>
+                <a:spcPct val="114000"/>
+              </a:lnSpc>
+            </a:pPr>
+            <a:r>
+              <a:rPr sz="850" b="1">
+                <a:solidFill>
+                  <a:srgbClr val="FFFFFF"/>
+                </a:solidFill>
+              </a:rPr>
+              <a:t>达标</a:t>
+            </a:r>
+          </a:p>
+        </p:txBody>
+      </p:sp>
+      <p:sp>
+        <p:nvSpPr>
+          <p:cNvPr id="26" name="TextBox 25"/>
+          <p:cNvSpPr txBox="1"/>
+          <p:nvPr/>
+        </p:nvSpPr>
+        <p:spPr>
+          <a:xfrm>
+            <a:off x="932688" y="2791457"/>
+            <a:ext cx="10671047" cy="605538"/>
+          </a:xfrm>
+          <a:prstGeom prst="rect">
+            <a:avLst/>
+          </a:prstGeom>
+          <a:noFill/>
+        </p:spPr>
+        <p:txBody>
+          <a:bodyPr wrap="square" anchor="t" lIns="0" rIns="0" tIns="0" bIns="0">
+            <a:spAutoFit/>
+          </a:bodyPr>
+          <a:lstStyle/>
+          <a:p>
+            <a:pPr algn="l">
+              <a:lnSpc>
+                <a:spcPct val="114000"/>
+              </a:lnSpc>
+            </a:pPr>
+            <a:r>
+              <a:rPr sz="950" b="0">
+                <a:solidFill>
+                  <a:srgbClr val="1B2B28"/>
+                </a:solidFill>
+              </a:rPr>
+              <a:t>联动程序化验证（同一 core.filter_records）：单日命中 47/1186 行；仅选 DEV-01 命中 296 行、总产量 14939＜全量 60273（筛选真的驱动重算）；app.py on_select="rerun" 接线 2 处 → core.drill_rows 联动明细 30 行（回路非空）；AppTest 无头真执行 app.py 并断言切换单日后命中变小（tests/test_dashboard.py，非肉眼验收）；日报耗时档位 &lt;1s（预算 120s，判定行不含毫秒，精确秒数在 timing.txt/runtime/）</a:t>
+            </a:r>
+          </a:p>
+        </p:txBody>
+      </p:sp>
+      <p:sp>
+        <p:nvSpPr>
+          <p:cNvPr id="27" name="Rounded Rectangle 26"/>
+          <p:cNvSpPr/>
+          <p:nvPr/>
+        </p:nvSpPr>
+        <p:spPr>
+          <a:xfrm>
+            <a:off x="475488" y="3515868"/>
+            <a:ext cx="11237976" cy="825497"/>
+          </a:xfrm>
+          <a:prstGeom prst="roundRect">
+            <a:avLst>
+              <a:gd name="adj" fmla="val 6000"/>
+            </a:avLst>
+          </a:prstGeom>
+          <a:solidFill>
+            <a:srgbClr val="FFFFFF"/>
+          </a:solidFill>
+          <a:ln w="9525">
+            <a:solidFill>
+              <a:srgbClr val="E4F1EE"/>
+            </a:solidFill>
+          </a:ln>
+          <a:effectLst/>
+        </p:spPr>
+        <p:style>
+          <a:lnRef idx="1">
+            <a:schemeClr val="accent1"/>
+          </a:lnRef>
+          <a:fillRef idx="3">
+            <a:schemeClr val="accent1"/>
+          </a:fillRef>
+          <a:effectRef idx="2">
+            <a:schemeClr val="accent1"/>
+          </a:effectRef>
+          <a:fontRef idx="minor">
+            <a:schemeClr val="lt1"/>
+          </a:fontRef>
+        </p:style>
+        <p:txBody>
+          <a:bodyPr rtlCol="0" anchor="ctr"/>
+          <a:lstStyle/>
+          <a:p>
+            <a:pPr algn="ctr"/>
+          </a:p>
+        </p:txBody>
+      </p:sp>
+      <p:sp>
+        <p:nvSpPr>
+          <p:cNvPr id="28" name="Rounded Rectangle 27"/>
+          <p:cNvSpPr/>
+          <p:nvPr/>
+        </p:nvSpPr>
+        <p:spPr>
+          <a:xfrm>
+            <a:off x="475488" y="3515868"/>
+            <a:ext cx="54864" cy="825497"/>
+          </a:xfrm>
+          <a:prstGeom prst="roundRect">
+            <a:avLst>
+              <a:gd name="adj" fmla="val 50000"/>
+            </a:avLst>
+          </a:prstGeom>
+          <a:solidFill>
+            <a:srgbClr val="0B5E54"/>
+          </a:solidFill>
+          <a:ln>
+            <a:noFill/>
+          </a:ln>
+          <a:effectLst/>
+        </p:spPr>
+        <p:style>
+          <a:lnRef idx="1">
+            <a:schemeClr val="accent1"/>
+          </a:lnRef>
+          <a:fillRef idx="3">
+            <a:schemeClr val="accent1"/>
+          </a:fillRef>
+          <a:effectRef idx="2">
+            <a:schemeClr val="accent1"/>
+          </a:effectRef>
+          <a:fontRef idx="minor">
+            <a:schemeClr val="lt1"/>
+          </a:fontRef>
+        </p:style>
+        <p:txBody>
+          <a:bodyPr rtlCol="0" anchor="ctr"/>
+          <a:lstStyle/>
+          <a:p>
+            <a:pPr algn="ctr"/>
+          </a:p>
+        </p:txBody>
+      </p:sp>
+      <p:sp>
+        <p:nvSpPr>
+          <p:cNvPr id="29" name="Rounded Rectangle 28"/>
+          <p:cNvSpPr/>
+          <p:nvPr/>
+        </p:nvSpPr>
+        <p:spPr>
+          <a:xfrm>
+            <a:off x="621792" y="3598163"/>
+            <a:ext cx="237744" cy="237744"/>
+          </a:xfrm>
+          <a:prstGeom prst="roundRect">
+            <a:avLst>
+              <a:gd name="adj" fmla="val 28000"/>
+            </a:avLst>
+          </a:prstGeom>
+          <a:solidFill>
+            <a:srgbClr val="0B5E54"/>
+          </a:solidFill>
+          <a:ln>
+            <a:noFill/>
+          </a:ln>
+          <a:effectLst/>
+        </p:spPr>
+        <p:style>
+          <a:lnRef idx="1">
+            <a:schemeClr val="accent1"/>
+          </a:lnRef>
+          <a:fillRef idx="3">
+            <a:schemeClr val="accent1"/>
+          </a:fillRef>
+          <a:effectRef idx="2">
+            <a:schemeClr val="accent1"/>
+          </a:effectRef>
+          <a:fontRef idx="minor">
+            <a:schemeClr val="lt1"/>
+          </a:fontRef>
+        </p:style>
+        <p:txBody>
+          <a:bodyPr rtlCol="0" anchor="ctr"/>
+          <a:lstStyle/>
+          <a:p>
+            <a:pPr algn="ctr"/>
+          </a:p>
+        </p:txBody>
+      </p:sp>
+      <p:sp>
+        <p:nvSpPr>
+          <p:cNvPr id="30" name="TextBox 29"/>
+          <p:cNvSpPr txBox="1"/>
+          <p:nvPr/>
+        </p:nvSpPr>
+        <p:spPr>
+          <a:xfrm>
+            <a:off x="621792" y="3598163"/>
+            <a:ext cx="237744" cy="237744"/>
+          </a:xfrm>
+          <a:prstGeom prst="rect">
+            <a:avLst/>
+          </a:prstGeom>
+          <a:noFill/>
+        </p:spPr>
+        <p:txBody>
+          <a:bodyPr wrap="square" anchor="ctr" lIns="0" rIns="0" tIns="0" bIns="0">
+            <a:spAutoFit/>
+          </a:bodyPr>
+          <a:lstStyle/>
+          <a:p>
+            <a:pPr algn="ctr">
+              <a:lnSpc>
+                <a:spcPct val="114000"/>
+              </a:lnSpc>
+            </a:pPr>
+            <a:r>
+              <a:rPr sz="1000" b="1">
+                <a:solidFill>
+                  <a:srgbClr val="FFFFFF"/>
+                </a:solidFill>
+              </a:rPr>
+              <a:t>B</a:t>
+            </a:r>
+          </a:p>
+        </p:txBody>
+      </p:sp>
+      <p:sp>
+        <p:nvSpPr>
+          <p:cNvPr id="31" name="TextBox 30"/>
+          <p:cNvSpPr txBox="1"/>
+          <p:nvPr/>
+        </p:nvSpPr>
+        <p:spPr>
+          <a:xfrm>
+            <a:off x="932688" y="3579875"/>
+            <a:ext cx="8778240" cy="274320"/>
+          </a:xfrm>
+          <a:prstGeom prst="rect">
+            <a:avLst/>
+          </a:prstGeom>
+          <a:noFill/>
+        </p:spPr>
+        <p:txBody>
+          <a:bodyPr wrap="square" anchor="ctr" lIns="0" rIns="0" tIns="0" bIns="0">
+            <a:spAutoFit/>
+          </a:bodyPr>
+          <a:lstStyle/>
+          <a:p>
+            <a:pPr algn="l">
+              <a:lnSpc>
+                <a:spcPct val="114000"/>
+              </a:lnSpc>
+            </a:pPr>
+            <a:r>
+              <a:rPr sz="1050" b="1">
+                <a:solidFill>
+                  <a:srgbClr val="1B2B28"/>
+                </a:solidFill>
+              </a:rPr>
+              <a:t>优秀</a:t>
+            </a:r>
+            <a:r>
+              <a:rPr sz="850" b="0">
+                <a:solidFill>
+                  <a:srgbClr val="5C6E6A"/>
+                </a:solidFill>
+              </a:rPr>
+              <a:t>   验收口径：</a:t>
+            </a:r>
+            <a:r>
+              <a:rPr sz="850" b="0">
+                <a:solidFill>
+                  <a:srgbClr val="5C6E6A"/>
+                </a:solidFill>
+              </a:rPr>
+              <a:t>≥7指标+钻取交互；异常自动识别；美观度≥4/5</a:t>
+            </a:r>
+          </a:p>
+        </p:txBody>
+      </p:sp>
+      <p:sp>
+        <p:nvSpPr>
+          <p:cNvPr id="32" name="Rounded Rectangle 31"/>
+          <p:cNvSpPr/>
+          <p:nvPr/>
+        </p:nvSpPr>
+        <p:spPr>
+          <a:xfrm>
+            <a:off x="11131803" y="3607308"/>
+            <a:ext cx="453644" cy="237744"/>
+          </a:xfrm>
+          <a:prstGeom prst="roundRect">
+            <a:avLst>
+              <a:gd name="adj" fmla="val 50000"/>
+            </a:avLst>
+          </a:prstGeom>
+          <a:solidFill>
+            <a:srgbClr val="0B5E54"/>
+          </a:solidFill>
+          <a:ln>
+            <a:noFill/>
+          </a:ln>
+          <a:effectLst/>
+        </p:spPr>
+        <p:style>
+          <a:lnRef idx="1">
+            <a:schemeClr val="accent1"/>
+          </a:lnRef>
+          <a:fillRef idx="3">
+            <a:schemeClr val="accent1"/>
+          </a:fillRef>
+          <a:effectRef idx="2">
+            <a:schemeClr val="accent1"/>
+          </a:effectRef>
+          <a:fontRef idx="minor">
+            <a:schemeClr val="lt1"/>
+          </a:fontRef>
+        </p:style>
+        <p:txBody>
+          <a:bodyPr rtlCol="0" anchor="ctr"/>
+          <a:lstStyle/>
+          <a:p>
+            <a:pPr algn="ctr"/>
+          </a:p>
+        </p:txBody>
+      </p:sp>
+      <p:sp>
+        <p:nvSpPr>
+          <p:cNvPr id="33" name="TextBox 32"/>
+          <p:cNvSpPr txBox="1"/>
+          <p:nvPr/>
+        </p:nvSpPr>
+        <p:spPr>
+          <a:xfrm>
+            <a:off x="11131803" y="3607308"/>
+            <a:ext cx="453644" cy="237744"/>
+          </a:xfrm>
+          <a:prstGeom prst="rect">
+            <a:avLst/>
+          </a:prstGeom>
+          <a:noFill/>
+        </p:spPr>
+        <p:txBody>
+          <a:bodyPr wrap="square" anchor="ctr" lIns="0" rIns="0" tIns="0" bIns="0">
+            <a:spAutoFit/>
+          </a:bodyPr>
+          <a:lstStyle/>
+          <a:p>
+            <a:pPr algn="ctr">
+              <a:lnSpc>
+                <a:spcPct val="114000"/>
+              </a:lnSpc>
+            </a:pPr>
+            <a:r>
+              <a:rPr sz="850" b="1">
+                <a:solidFill>
+                  <a:srgbClr val="FFFFFF"/>
+                </a:solidFill>
+              </a:rPr>
+              <a:t>达标</a:t>
+            </a:r>
+          </a:p>
+        </p:txBody>
+      </p:sp>
+      <p:sp>
+        <p:nvSpPr>
+          <p:cNvPr id="34" name="TextBox 33"/>
+          <p:cNvSpPr txBox="1"/>
+          <p:nvPr/>
+        </p:nvSpPr>
+        <p:spPr>
+          <a:xfrm>
+            <a:off x="932688" y="3863339"/>
+            <a:ext cx="10671047" cy="423161"/>
+          </a:xfrm>
+          <a:prstGeom prst="rect">
+            <a:avLst/>
+          </a:prstGeom>
+          <a:noFill/>
+        </p:spPr>
+        <p:txBody>
+          <a:bodyPr wrap="square" anchor="t" lIns="0" rIns="0" tIns="0" bIns="0">
+            <a:spAutoFit/>
+          </a:bodyPr>
+          <a:lstStyle/>
+          <a:p>
+            <a:pPr algn="l">
+              <a:lnSpc>
+                <a:spcPct val="114000"/>
+              </a:lnSpc>
+            </a:pPr>
+            <a:r>
+              <a:rPr sz="950" b="0">
+                <a:solidFill>
+                  <a:srgbClr val="1B2B28"/>
+                </a:solidFill>
+              </a:rPr>
+              <a:t>指标实得 9 个；钻取：复放选择事件 x=['2026-03-03', '2026-03-05', '2026-03-07'] → 联动明细 30 行（上限 30）指纹 crc32=e89f637a（跨 PYTHONHASHSEED 稳定）；异常自动识别命中 357 条（temp&gt;90.0 或 vib&gt;4.5，逐条附处置建议）；美观度 5/5（≥4 达标；标题层级 1/1、单位标注 1/1、配色 1/1、图例 1/1、响应式 1/1；扣分项：无）</a:t>
+            </a:r>
+          </a:p>
+        </p:txBody>
+      </p:sp>
+      <p:sp>
+        <p:nvSpPr>
+          <p:cNvPr id="35" name="Rounded Rectangle 34"/>
+          <p:cNvSpPr/>
+          <p:nvPr/>
+        </p:nvSpPr>
+        <p:spPr>
+          <a:xfrm>
+            <a:off x="475488" y="4405373"/>
+            <a:ext cx="11237976" cy="1007874"/>
+          </a:xfrm>
+          <a:prstGeom prst="roundRect">
+            <a:avLst>
+              <a:gd name="adj" fmla="val 6000"/>
+            </a:avLst>
+          </a:prstGeom>
+          <a:solidFill>
+            <a:srgbClr val="FFFFFF"/>
+          </a:solidFill>
+          <a:ln w="9525">
+            <a:solidFill>
+              <a:srgbClr val="E4F1EE"/>
+            </a:solidFill>
+          </a:ln>
+          <a:effectLst/>
+        </p:spPr>
+        <p:style>
+          <a:lnRef idx="1">
+            <a:schemeClr val="accent1"/>
+          </a:lnRef>
+          <a:fillRef idx="3">
+            <a:schemeClr val="accent1"/>
+          </a:fillRef>
+          <a:effectRef idx="2">
+            <a:schemeClr val="accent1"/>
+          </a:effectRef>
+          <a:fontRef idx="minor">
+            <a:schemeClr val="lt1"/>
+          </a:fontRef>
+        </p:style>
+        <p:txBody>
+          <a:bodyPr rtlCol="0" anchor="ctr"/>
+          <a:lstStyle/>
+          <a:p>
+            <a:pPr algn="ctr"/>
+          </a:p>
+        </p:txBody>
+      </p:sp>
+      <p:sp>
+        <p:nvSpPr>
+          <p:cNvPr id="36" name="Rounded Rectangle 35"/>
+          <p:cNvSpPr/>
+          <p:nvPr/>
+        </p:nvSpPr>
+        <p:spPr>
+          <a:xfrm>
+            <a:off x="475488" y="4405373"/>
+            <a:ext cx="54864" cy="1007874"/>
+          </a:xfrm>
+          <a:prstGeom prst="roundRect">
+            <a:avLst>
+              <a:gd name="adj" fmla="val 50000"/>
+            </a:avLst>
+          </a:prstGeom>
+          <a:solidFill>
+            <a:srgbClr val="C9A227"/>
+          </a:solidFill>
+          <a:ln>
+            <a:noFill/>
+          </a:ln>
+          <a:effectLst/>
+        </p:spPr>
+        <p:style>
+          <a:lnRef idx="1">
+            <a:schemeClr val="accent1"/>
+          </a:lnRef>
+          <a:fillRef idx="3">
+            <a:schemeClr val="accent1"/>
+          </a:fillRef>
+          <a:effectRef idx="2">
+            <a:schemeClr val="accent1"/>
+          </a:effectRef>
+          <a:fontRef idx="minor">
+            <a:schemeClr val="lt1"/>
+          </a:fontRef>
+        </p:style>
+        <p:txBody>
+          <a:bodyPr rtlCol="0" anchor="ctr"/>
+          <a:lstStyle/>
+          <a:p>
+            <a:pPr algn="ctr"/>
+          </a:p>
+        </p:txBody>
+      </p:sp>
+      <p:sp>
+        <p:nvSpPr>
+          <p:cNvPr id="37" name="Rounded Rectangle 36"/>
+          <p:cNvSpPr/>
+          <p:nvPr/>
+        </p:nvSpPr>
+        <p:spPr>
+          <a:xfrm>
+            <a:off x="621792" y="4487669"/>
+            <a:ext cx="237744" cy="237744"/>
+          </a:xfrm>
+          <a:prstGeom prst="roundRect">
+            <a:avLst>
+              <a:gd name="adj" fmla="val 28000"/>
+            </a:avLst>
+          </a:prstGeom>
+          <a:solidFill>
+            <a:srgbClr val="C9A227"/>
+          </a:solidFill>
+          <a:ln>
+            <a:noFill/>
+          </a:ln>
+          <a:effectLst/>
+        </p:spPr>
+        <p:style>
+          <a:lnRef idx="1">
+            <a:schemeClr val="accent1"/>
+          </a:lnRef>
+          <a:fillRef idx="3">
+            <a:schemeClr val="accent1"/>
+          </a:fillRef>
+          <a:effectRef idx="2">
+            <a:schemeClr val="accent1"/>
+          </a:effectRef>
+          <a:fontRef idx="minor">
+            <a:schemeClr val="lt1"/>
+          </a:fontRef>
+        </p:style>
+        <p:txBody>
+          <a:bodyPr rtlCol="0" anchor="ctr"/>
+          <a:lstStyle/>
+          <a:p>
+            <a:pPr algn="ctr"/>
+          </a:p>
+        </p:txBody>
+      </p:sp>
+      <p:sp>
+        <p:nvSpPr>
+          <p:cNvPr id="38" name="TextBox 37"/>
+          <p:cNvSpPr txBox="1"/>
+          <p:nvPr/>
+        </p:nvSpPr>
+        <p:spPr>
+          <a:xfrm>
+            <a:off x="621792" y="4487669"/>
+            <a:ext cx="237744" cy="237744"/>
+          </a:xfrm>
+          <a:prstGeom prst="rect">
+            <a:avLst/>
+          </a:prstGeom>
+          <a:noFill/>
+        </p:spPr>
+        <p:txBody>
+          <a:bodyPr wrap="square" anchor="ctr" lIns="0" rIns="0" tIns="0" bIns="0">
+            <a:spAutoFit/>
+          </a:bodyPr>
+          <a:lstStyle/>
+          <a:p>
+            <a:pPr algn="ctr">
+              <a:lnSpc>
+                <a:spcPct val="114000"/>
+              </a:lnSpc>
+            </a:pPr>
+            <a:r>
+              <a:rPr sz="1000" b="1">
+                <a:solidFill>
+                  <a:srgbClr val="FFFFFF"/>
+                </a:solidFill>
+              </a:rPr>
+              <a:t>A</a:t>
+            </a:r>
+          </a:p>
+        </p:txBody>
+      </p:sp>
+      <p:sp>
+        <p:nvSpPr>
+          <p:cNvPr id="39" name="TextBox 38"/>
+          <p:cNvSpPr txBox="1"/>
+          <p:nvPr/>
+        </p:nvSpPr>
+        <p:spPr>
+          <a:xfrm>
+            <a:off x="932688" y="4469381"/>
+            <a:ext cx="8778240" cy="274320"/>
+          </a:xfrm>
+          <a:prstGeom prst="rect">
+            <a:avLst/>
+          </a:prstGeom>
+          <a:noFill/>
+        </p:spPr>
+        <p:txBody>
+          <a:bodyPr wrap="square" anchor="ctr" lIns="0" rIns="0" tIns="0" bIns="0">
+            <a:spAutoFit/>
+          </a:bodyPr>
+          <a:lstStyle/>
+          <a:p>
+            <a:pPr algn="l">
+              <a:lnSpc>
+                <a:spcPct val="114000"/>
+              </a:lnSpc>
+            </a:pPr>
+            <a:r>
+              <a:rPr sz="1050" b="1">
+                <a:solidFill>
+                  <a:srgbClr val="1B2B28"/>
+                </a:solidFill>
+              </a:rPr>
+              <a:t>超优</a:t>
+            </a:r>
+            <a:r>
+              <a:rPr sz="850" b="0">
+                <a:solidFill>
+                  <a:srgbClr val="5C6E6A"/>
+                </a:solidFill>
+              </a:rPr>
+              <a:t>   验收口径：</a:t>
+            </a:r>
+            <a:r>
+              <a:rPr sz="850" b="0">
+                <a:solidFill>
+                  <a:srgbClr val="5C6E6A"/>
+                </a:solidFill>
+              </a:rPr>
+              <a:t>优秀+定时自动生成(mailto/计划任务)+移动端适配</a:t>
+            </a:r>
+          </a:p>
+        </p:txBody>
+      </p:sp>
+      <p:sp>
+        <p:nvSpPr>
+          <p:cNvPr id="40" name="Rounded Rectangle 39"/>
+          <p:cNvSpPr/>
+          <p:nvPr/>
+        </p:nvSpPr>
+        <p:spPr>
+          <a:xfrm>
+            <a:off x="11131803" y="4496813"/>
+            <a:ext cx="453644" cy="237744"/>
+          </a:xfrm>
+          <a:prstGeom prst="roundRect">
+            <a:avLst>
+              <a:gd name="adj" fmla="val 50000"/>
+            </a:avLst>
+          </a:prstGeom>
+          <a:solidFill>
+            <a:srgbClr val="0B5E54"/>
+          </a:solidFill>
+          <a:ln>
+            <a:noFill/>
+          </a:ln>
+          <a:effectLst/>
+        </p:spPr>
+        <p:style>
+          <a:lnRef idx="1">
+            <a:schemeClr val="accent1"/>
+          </a:lnRef>
+          <a:fillRef idx="3">
+            <a:schemeClr val="accent1"/>
+          </a:fillRef>
+          <a:effectRef idx="2">
+            <a:schemeClr val="accent1"/>
+          </a:effectRef>
+          <a:fontRef idx="minor">
+            <a:schemeClr val="lt1"/>
+          </a:fontRef>
+        </p:style>
+        <p:txBody>
+          <a:bodyPr rtlCol="0" anchor="ctr"/>
+          <a:lstStyle/>
+          <a:p>
+            <a:pPr algn="ctr"/>
+          </a:p>
+        </p:txBody>
+      </p:sp>
+      <p:sp>
+        <p:nvSpPr>
+          <p:cNvPr id="41" name="TextBox 40"/>
+          <p:cNvSpPr txBox="1"/>
+          <p:nvPr/>
+        </p:nvSpPr>
+        <p:spPr>
+          <a:xfrm>
+            <a:off x="11131803" y="4496813"/>
+            <a:ext cx="453644" cy="237744"/>
+          </a:xfrm>
+          <a:prstGeom prst="rect">
+            <a:avLst/>
+          </a:prstGeom>
+          <a:noFill/>
+        </p:spPr>
+        <p:txBody>
+          <a:bodyPr wrap="square" anchor="ctr" lIns="0" rIns="0" tIns="0" bIns="0">
+            <a:spAutoFit/>
+          </a:bodyPr>
+          <a:lstStyle/>
+          <a:p>
+            <a:pPr algn="ctr">
+              <a:lnSpc>
+                <a:spcPct val="114000"/>
+              </a:lnSpc>
+            </a:pPr>
+            <a:r>
+              <a:rPr sz="850" b="1">
+                <a:solidFill>
+                  <a:srgbClr val="FFFFFF"/>
+                </a:solidFill>
+              </a:rPr>
+              <a:t>达标</a:t>
+            </a:r>
+          </a:p>
+        </p:txBody>
+      </p:sp>
+      <p:sp>
+        <p:nvSpPr>
+          <p:cNvPr id="42" name="TextBox 41"/>
+          <p:cNvSpPr txBox="1"/>
+          <p:nvPr/>
+        </p:nvSpPr>
+        <p:spPr>
+          <a:xfrm>
+            <a:off x="932688" y="4752845"/>
+            <a:ext cx="10671047" cy="605538"/>
+          </a:xfrm>
+          <a:prstGeom prst="rect">
+            <a:avLst/>
+          </a:prstGeom>
+          <a:noFill/>
+        </p:spPr>
+        <p:txBody>
+          <a:bodyPr wrap="square" anchor="t" lIns="0" rIns="0" tIns="0" bIns="0">
+            <a:spAutoFit/>
+          </a:bodyPr>
+          <a:lstStyle/>
+          <a:p>
+            <a:pPr algn="l">
+              <a:lnSpc>
+                <a:spcPct val="114000"/>
+              </a:lnSpc>
+            </a:pPr>
+            <a:r>
+              <a:rPr sz="950" b="0">
+                <a:solidFill>
+                  <a:srgbClr val="1B2B28"/>
+                </a:solidFill>
+              </a:rPr>
+              <a:t>继承优秀(B)：达标；定时：schedule.at=07:30 解析为每日 07:30，下次触发为真实 datetime 且晚于此刻（墙钟值写 runtime/schedule_state.txt 与 output/timing.txt，不进判定行）；计划任务 4 件产物已渲染（crontab/systemd/launchd/mailto，写 runtime/schedule/）；mailto 收件人 line-lead@example.com 且 subject/body 齐；移动端：viewport=True flex=True media=True 窄屏断点 600px（config 上限 768px）</a:t>
+            </a:r>
+          </a:p>
+        </p:txBody>
+      </p:sp>
+      <p:sp>
+        <p:nvSpPr>
+          <p:cNvPr id="43" name="Rounded Rectangle 42"/>
+          <p:cNvSpPr/>
+          <p:nvPr/>
+        </p:nvSpPr>
+        <p:spPr>
+          <a:xfrm>
+            <a:off x="475488" y="5477256"/>
+            <a:ext cx="11237976" cy="941831"/>
+          </a:xfrm>
+          <a:prstGeom prst="roundRect">
+            <a:avLst>
+              <a:gd name="adj" fmla="val 5000"/>
+            </a:avLst>
+          </a:prstGeom>
+          <a:solidFill>
+            <a:srgbClr val="E4F1EE"/>
+          </a:solidFill>
+          <a:ln>
+            <a:noFill/>
+          </a:ln>
+          <a:effectLst/>
+        </p:spPr>
+        <p:style>
+          <a:lnRef idx="1">
+            <a:schemeClr val="accent1"/>
+          </a:lnRef>
+          <a:fillRef idx="3">
+            <a:schemeClr val="accent1"/>
+          </a:fillRef>
+          <a:effectRef idx="2">
+            <a:schemeClr val="accent1"/>
+          </a:effectRef>
+          <a:fontRef idx="minor">
+            <a:schemeClr val="lt1"/>
+          </a:fontRef>
+        </p:style>
+        <p:txBody>
+          <a:bodyPr rtlCol="0" anchor="ctr"/>
+          <a:lstStyle/>
+          <a:p>
+            <a:pPr algn="ctr"/>
+          </a:p>
+        </p:txBody>
+      </p:sp>
+      <p:sp>
+        <p:nvSpPr>
+          <p:cNvPr id="44" name="Rounded Rectangle 43"/>
+          <p:cNvSpPr/>
+          <p:nvPr/>
+        </p:nvSpPr>
+        <p:spPr>
+          <a:xfrm>
+            <a:off x="475488" y="5477256"/>
+            <a:ext cx="54864" cy="941831"/>
+          </a:xfrm>
+          <a:prstGeom prst="roundRect">
+            <a:avLst>
+              <a:gd name="adj" fmla="val 50000"/>
+            </a:avLst>
+          </a:prstGeom>
+          <a:solidFill>
+            <a:srgbClr val="C9A227"/>
+          </a:solidFill>
+          <a:ln>
+            <a:noFill/>
+          </a:ln>
+          <a:effectLst/>
+        </p:spPr>
+        <p:style>
+          <a:lnRef idx="1">
+            <a:schemeClr val="accent1"/>
+          </a:lnRef>
+          <a:fillRef idx="3">
+            <a:schemeClr val="accent1"/>
+          </a:fillRef>
+          <a:effectRef idx="2">
+            <a:schemeClr val="accent1"/>
+          </a:effectRef>
+          <a:fontRef idx="minor">
+            <a:schemeClr val="lt1"/>
+          </a:fontRef>
+        </p:style>
+        <p:txBody>
+          <a:bodyPr rtlCol="0" anchor="ctr"/>
+          <a:lstStyle/>
+          <a:p>
+            <a:pPr algn="ctr"/>
+          </a:p>
+        </p:txBody>
+      </p:sp>
+      <p:sp>
+        <p:nvSpPr>
+          <p:cNvPr id="45" name="TextBox 44"/>
+          <p:cNvSpPr txBox="1"/>
+          <p:nvPr/>
+        </p:nvSpPr>
+        <p:spPr>
+          <a:xfrm>
+            <a:off x="676656" y="5550408"/>
+            <a:ext cx="10908792" cy="795527"/>
+          </a:xfrm>
+          <a:prstGeom prst="rect">
+            <a:avLst/>
+          </a:prstGeom>
+          <a:noFill/>
+        </p:spPr>
+        <p:txBody>
+          <a:bodyPr wrap="square" anchor="t" lIns="0" rIns="0" tIns="0" bIns="0">
+            <a:spAutoFit/>
+          </a:bodyPr>
+          <a:lstStyle/>
+          <a:p>
+            <a:pPr algn="l">
+              <a:lnSpc>
+                <a:spcPct val="124000"/>
+              </a:lnSpc>
+            </a:pPr>
+            <a:r>
+              <a:rPr sz="850" b="0">
+                <a:solidFill>
+                  <a:srgbClr val="1B2B28"/>
+                </a:solidFill>
+              </a:rPr>
+              <a:t>出处：工程化项目/p33_kpi_cockpit/output/report.txt 第 15 节「分层达标」——本机 2026-10-28 05:08 实跑落盘，上表数字逐字摘录、未改写。</a:t>
+            </a:r>
+          </a:p>
+          <a:p>
+            <a:pPr algn="l">
+              <a:lnSpc>
+                <a:spcPct val="124000"/>
+              </a:lnSpc>
+            </a:pPr>
+            <a:r>
+              <a:rPr sz="850" b="0">
+                <a:solidFill>
+                  <a:srgbClr val="1B2B28"/>
+                </a:solidFill>
+              </a:rPr>
+              <a:t>复现：cd 工程化项目/p33_kpi_cockpit &amp;&amp; python run.py &amp;&amp; python -m pytest -q -o addopts=''</a:t>
+            </a:r>
+          </a:p>
+          <a:p>
+            <a:pPr algn="l">
+              <a:lnSpc>
+                <a:spcPct val="124000"/>
+              </a:lnSpc>
+            </a:pPr>
+            <a:r>
+              <a:rPr sz="850" b="0">
+                <a:solidFill>
+                  <a:srgbClr val="1B2B28"/>
+                </a:solidFill>
+              </a:rPr>
+              <a:t>口径：表中「判定」沿用报告原词——绿=达标/通过，黄=仅本节取证项通过（未取证子项在报告里逐条点名），红=未达标。</a:t>
+            </a:r>
+          </a:p>
+        </p:txBody>
+      </p:sp>
+    </p:spTree>
+  </p:cSld>
+  <p:clrMapOvr>
+    <a:masterClrMapping/>
+  </p:clrMapOvr>
+</p:sld>
+</file>
+
+<file path=ppt/slides/slide9.xml><?xml version="1.0" encoding="utf-8"?>
+<p:sld xmlns:a="http://schemas.openxmlformats.org/drawingml/2006/main" xmlns:p="http://schemas.openxmlformats.org/presentationml/2006/main" xmlns:r="http://schemas.openxmlformats.org/officeDocument/2006/relationships">
+  <p:cSld>
+    <p:spTree>
+      <p:nvGrpSpPr>
+        <p:cNvPr id="1" name=""/>
+        <p:cNvGrpSpPr/>
+        <p:nvPr/>
+      </p:nvGrpSpPr>
+      <p:grpSpPr/>
+      <p:sp>
+        <p:nvSpPr>
+          <p:cNvPr id="2" name="Rounded Rectangle 1"/>
+          <p:cNvSpPr/>
+          <p:nvPr/>
+        </p:nvSpPr>
+        <p:spPr>
+          <a:xfrm>
+            <a:off x="0" y="0"/>
+            <a:ext cx="12191695" cy="64008"/>
+          </a:xfrm>
+          <a:prstGeom prst="roundRect">
+            <a:avLst>
+              <a:gd name="adj" fmla="val 50000"/>
+            </a:avLst>
+          </a:prstGeom>
+          <a:solidFill>
+            <a:srgbClr val="0B5E54"/>
+          </a:solidFill>
+          <a:ln>
+            <a:noFill/>
+          </a:ln>
+          <a:effectLst/>
+        </p:spPr>
+        <p:style>
+          <a:lnRef idx="1">
+            <a:schemeClr val="accent1"/>
+          </a:lnRef>
+          <a:fillRef idx="3">
+            <a:schemeClr val="accent1"/>
+          </a:fillRef>
+          <a:effectRef idx="2">
+            <a:schemeClr val="accent1"/>
+          </a:effectRef>
+          <a:fontRef idx="minor">
+            <a:schemeClr val="lt1"/>
+          </a:fontRef>
+        </p:style>
+        <p:txBody>
+          <a:bodyPr rtlCol="0" anchor="ctr"/>
+          <a:lstStyle/>
+          <a:p>
+            <a:pPr algn="ctr"/>
+          </a:p>
+        </p:txBody>
+      </p:sp>
+      <p:sp>
+        <p:nvSpPr>
+          <p:cNvPr id="3" name="TextBox 2"/>
+          <p:cNvSpPr txBox="1"/>
+          <p:nvPr/>
+        </p:nvSpPr>
+        <p:spPr>
+          <a:xfrm>
+            <a:off x="475488" y="146304"/>
+            <a:ext cx="8229600" cy="292608"/>
+          </a:xfrm>
+          <a:prstGeom prst="rect">
+            <a:avLst/>
+          </a:prstGeom>
+          <a:noFill/>
+        </p:spPr>
+        <p:txBody>
+          <a:bodyPr wrap="square" anchor="t" lIns="0" rIns="0" tIns="0" bIns="0">
+            <a:spAutoFit/>
+          </a:bodyPr>
+          <a:lstStyle/>
+          <a:p>
+            <a:pPr algn="l">
+              <a:lnSpc>
+                <a:spcPct val="114000"/>
+              </a:lnSpc>
+            </a:pPr>
+            <a:r>
+              <a:rPr sz="1100" b="1">
+                <a:solidFill>
+                  <a:srgbClr val="0B5E54"/>
+                </a:solidFill>
+              </a:rPr>
+              <a:t>工单实战 · 运行留证</a:t>
+            </a:r>
+          </a:p>
+        </p:txBody>
+      </p:sp>
+      <p:sp>
+        <p:nvSpPr>
+          <p:cNvPr id="4" name="Rounded Rectangle 3"/>
+          <p:cNvSpPr/>
+          <p:nvPr/>
+        </p:nvSpPr>
+        <p:spPr>
+          <a:xfrm>
+            <a:off x="475488" y="475488"/>
+            <a:ext cx="2027872" cy="310896"/>
+          </a:xfrm>
+          <a:prstGeom prst="roundRect">
+            <a:avLst>
+              <a:gd name="adj" fmla="val 50000"/>
+            </a:avLst>
+          </a:prstGeom>
+          <a:solidFill>
+            <a:srgbClr val="C9A227"/>
+          </a:solidFill>
+          <a:ln>
+            <a:noFill/>
+          </a:ln>
+          <a:effectLst/>
+        </p:spPr>
+        <p:style>
+          <a:lnRef idx="1">
+            <a:schemeClr val="accent1"/>
+          </a:lnRef>
+          <a:fillRef idx="3">
+            <a:schemeClr val="accent1"/>
+          </a:fillRef>
+          <a:effectRef idx="2">
+            <a:schemeClr val="accent1"/>
+          </a:effectRef>
+          <a:fontRef idx="minor">
+            <a:schemeClr val="lt1"/>
+          </a:fontRef>
+        </p:style>
+        <p:txBody>
+          <a:bodyPr rtlCol="0" anchor="ctr"/>
+          <a:lstStyle/>
+          <a:p>
+            <a:pPr algn="ctr"/>
+          </a:p>
+        </p:txBody>
+      </p:sp>
+      <p:sp>
+        <p:nvSpPr>
+          <p:cNvPr id="5" name="TextBox 4"/>
+          <p:cNvSpPr txBox="1"/>
+          <p:nvPr/>
+        </p:nvSpPr>
+        <p:spPr>
+          <a:xfrm>
+            <a:off x="475488" y="475488"/>
+            <a:ext cx="2027872" cy="310896"/>
+          </a:xfrm>
+          <a:prstGeom prst="rect">
+            <a:avLst/>
+          </a:prstGeom>
+          <a:noFill/>
+        </p:spPr>
+        <p:txBody>
+          <a:bodyPr wrap="square" anchor="ctr" lIns="0" rIns="0" tIns="0" bIns="0">
+            <a:spAutoFit/>
+          </a:bodyPr>
+          <a:lstStyle/>
+          <a:p>
+            <a:pPr algn="ctr">
+              <a:lnSpc>
+                <a:spcPct val="114000"/>
+              </a:lnSpc>
+            </a:pPr>
+            <a:r>
+              <a:rPr sz="1050" b="1">
+                <a:solidFill>
+                  <a:srgbClr val="FFFFFF"/>
+                </a:solidFill>
+              </a:rPr>
+              <a:t>SCREENSHOT · 终端逐字截图</a:t>
+            </a:r>
+          </a:p>
+        </p:txBody>
+      </p:sp>
+      <p:sp>
+        <p:nvSpPr>
+          <p:cNvPr id="6" name="TextBox 5"/>
+          <p:cNvSpPr txBox="1"/>
+          <p:nvPr/>
+        </p:nvSpPr>
+        <p:spPr>
+          <a:xfrm>
+            <a:off x="475488" y="859536"/>
+            <a:ext cx="11237976" cy="502920"/>
+          </a:xfrm>
+          <a:prstGeom prst="rect">
+            <a:avLst/>
+          </a:prstGeom>
+          <a:noFill/>
+        </p:spPr>
+        <p:txBody>
+          <a:bodyPr wrap="square" anchor="t" lIns="0" rIns="0" tIns="0" bIns="0">
+            <a:spAutoFit/>
+          </a:bodyPr>
+          <a:lstStyle/>
+          <a:p>
+            <a:pPr algn="l">
+              <a:lnSpc>
+                <a:spcPct val="114000"/>
+              </a:lnSpc>
+            </a:pPr>
+            <a:r>
+              <a:rPr sz="2200" b="1">
+                <a:solidFill>
+                  <a:srgbClr val="1B2B28"/>
+                </a:solidFill>
+              </a:rPr>
+              <a:t>P3.1/P3.2 分层达标 · 四档逐字输出截图</a:t>
+            </a:r>
+          </a:p>
+        </p:txBody>
+      </p:sp>
+      <p:sp>
+        <p:nvSpPr>
+          <p:cNvPr id="7" name="Rounded Rectangle 6"/>
+          <p:cNvSpPr/>
+          <p:nvPr/>
+        </p:nvSpPr>
+        <p:spPr>
+          <a:xfrm>
+            <a:off x="475488" y="1389888"/>
+            <a:ext cx="1234440" cy="27432"/>
+          </a:xfrm>
+          <a:prstGeom prst="roundRect">
+            <a:avLst>
+              <a:gd name="adj" fmla="val 50000"/>
+            </a:avLst>
+          </a:prstGeom>
+          <a:solidFill>
+            <a:srgbClr val="C9A227"/>
+          </a:solidFill>
+          <a:ln>
+            <a:noFill/>
+          </a:ln>
+          <a:effectLst/>
+        </p:spPr>
+        <p:style>
+          <a:lnRef idx="1">
+            <a:schemeClr val="accent1"/>
+          </a:lnRef>
+          <a:fillRef idx="3">
+            <a:schemeClr val="accent1"/>
+          </a:fillRef>
+          <a:effectRef idx="2">
+            <a:schemeClr val="accent1"/>
+          </a:effectRef>
+          <a:fontRef idx="minor">
+            <a:schemeClr val="lt1"/>
+          </a:fontRef>
+        </p:style>
+        <p:txBody>
+          <a:bodyPr rtlCol="0" anchor="ctr"/>
+          <a:lstStyle/>
+          <a:p>
+            <a:pPr algn="ctr"/>
+          </a:p>
+        </p:txBody>
+      </p:sp>
+      <p:sp>
+        <p:nvSpPr>
+          <p:cNvPr id="8" name="Rounded Rectangle 7"/>
+          <p:cNvSpPr/>
+          <p:nvPr/>
+        </p:nvSpPr>
+        <p:spPr>
+          <a:xfrm>
+            <a:off x="475488" y="6419088"/>
+            <a:ext cx="11237976" cy="10972"/>
+          </a:xfrm>
+          <a:prstGeom prst="roundRect">
+            <a:avLst>
+              <a:gd name="adj" fmla="val 50000"/>
+            </a:avLst>
+          </a:prstGeom>
+          <a:solidFill>
+            <a:srgbClr val="E4F1EE"/>
+          </a:solidFill>
+          <a:ln>
+            <a:noFill/>
+          </a:ln>
+          <a:effectLst/>
+        </p:spPr>
+        <p:style>
+          <a:lnRef idx="1">
+            <a:schemeClr val="accent1"/>
+          </a:lnRef>
+          <a:fillRef idx="3">
+            <a:schemeClr val="accent1"/>
+          </a:fillRef>
+          <a:effectRef idx="2">
+            <a:schemeClr val="accent1"/>
+          </a:effectRef>
+          <a:fontRef idx="minor">
+            <a:schemeClr val="lt1"/>
+          </a:fontRef>
+        </p:style>
+        <p:txBody>
+          <a:bodyPr rtlCol="0" anchor="ctr"/>
+          <a:lstStyle/>
+          <a:p>
+            <a:pPr algn="ctr"/>
+          </a:p>
+        </p:txBody>
+      </p:sp>
+      <p:sp>
+        <p:nvSpPr>
+          <p:cNvPr id="9" name="TextBox 8"/>
+          <p:cNvSpPr txBox="1"/>
+          <p:nvPr/>
+        </p:nvSpPr>
+        <p:spPr>
+          <a:xfrm>
+            <a:off x="475488" y="6455664"/>
+            <a:ext cx="7315200" cy="292608"/>
+          </a:xfrm>
+          <a:prstGeom prst="rect">
+            <a:avLst/>
+          </a:prstGeom>
+          <a:noFill/>
+        </p:spPr>
+        <p:txBody>
+          <a:bodyPr wrap="square" anchor="t" lIns="0" rIns="0" tIns="0" bIns="0">
+            <a:spAutoFit/>
+          </a:bodyPr>
+          <a:lstStyle/>
+          <a:p>
+            <a:pPr algn="l">
+              <a:lnSpc>
+                <a:spcPct val="114000"/>
+              </a:lnSpc>
+            </a:pPr>
+            <a:r>
+              <a:rPr sz="900" b="0">
+                <a:solidFill>
+                  <a:srgbClr val="5C6E6A"/>
+                </a:solidFill>
+              </a:rPr>
+              <a:t>两江智造集团 · Python程序设计（项目实战）</a:t>
+            </a:r>
+          </a:p>
+        </p:txBody>
+      </p:sp>
+      <p:sp>
+        <p:nvSpPr>
+          <p:cNvPr id="10" name="TextBox 9"/>
+          <p:cNvSpPr txBox="1"/>
+          <p:nvPr/>
+        </p:nvSpPr>
+        <p:spPr>
+          <a:xfrm>
+            <a:off x="10597896" y="6537960"/>
+            <a:ext cx="996696" cy="301752"/>
+          </a:xfrm>
+          <a:prstGeom prst="rect">
+            <a:avLst/>
+          </a:prstGeom>
+          <a:noFill/>
+        </p:spPr>
+        <p:txBody>
+          <a:bodyPr wrap="square" anchor="t" lIns="0" rIns="0" tIns="0" bIns="0">
+            <a:spAutoFit/>
+          </a:bodyPr>
+          <a:lstStyle/>
+          <a:p>
+            <a:pPr algn="r">
+              <a:lnSpc>
+                <a:spcPct val="114000"/>
+              </a:lnSpc>
+            </a:pPr>
+            <a:r>
+              <a:rPr sz="1000" b="0">
+                <a:solidFill>
+                  <a:srgbClr val="8A97B5"/>
+                </a:solidFill>
+              </a:rPr>
+              <a:t>6 / 10</a:t>
+            </a:r>
+          </a:p>
+        </p:txBody>
+      </p:sp>
+      <p:sp>
+        <p:nvSpPr>
+          <p:cNvPr id="11" name="TextBox 10"/>
+          <p:cNvSpPr txBox="1"/>
+          <p:nvPr/>
+        </p:nvSpPr>
+        <p:spPr>
+          <a:xfrm>
+            <a:off x="475488" y="1517904"/>
+            <a:ext cx="11237976" cy="237744"/>
+          </a:xfrm>
+          <a:prstGeom prst="rect">
+            <a:avLst/>
+          </a:prstGeom>
+          <a:noFill/>
+        </p:spPr>
+        <p:txBody>
+          <a:bodyPr wrap="square" anchor="t" lIns="0" rIns="0" tIns="0" bIns="0">
+            <a:spAutoFit/>
+          </a:bodyPr>
+          <a:lstStyle/>
+          <a:p>
+            <a:pPr algn="l">
+              <a:lnSpc>
+                <a:spcPct val="114000"/>
+              </a:lnSpc>
+            </a:pPr>
+            <a:r>
+              <a:rPr sz="1000" b="0">
+                <a:solidFill>
+                  <a:srgbClr val="5C6E6A"/>
+                </a:solidFill>
+              </a:rPr>
+              <a:t>终端窗口截图：由 report.txt 本节逐字渲染，未手工改写</a:t>
+            </a:r>
+          </a:p>
+        </p:txBody>
+      </p:sp>
+      <p:pic>
+        <p:nvPicPr>
+          <p:cNvPr id="12" name="Picture 11" descr="p33_kpi_cockpit_classroom.png"/>
+          <p:cNvPicPr>
+            <a:picLocks noChangeAspect="1"/>
+          </p:cNvPicPr>
+          <p:nvPr/>
+        </p:nvPicPr>
+        <p:blipFill>
+          <a:blip r:embed="rId2"/>
+          <a:stretch>
+            <a:fillRect/>
+          </a:stretch>
+        </p:blipFill>
+        <p:spPr>
+          <a:xfrm>
+            <a:off x="1478619" y="1792224"/>
+            <a:ext cx="9231712" cy="3849624"/>
+          </a:xfrm>
+          <a:prstGeom prst="rect">
+            <a:avLst/>
+          </a:prstGeom>
+        </p:spPr>
+      </p:pic>
+      <p:sp>
+        <p:nvSpPr>
+          <p:cNvPr id="13" name="TextBox 12"/>
+          <p:cNvSpPr txBox="1"/>
+          <p:nvPr/>
+        </p:nvSpPr>
+        <p:spPr>
+          <a:xfrm>
+            <a:off x="475488" y="5678424"/>
+            <a:ext cx="11237976" cy="256032"/>
+          </a:xfrm>
+          <a:prstGeom prst="rect">
+            <a:avLst/>
+          </a:prstGeom>
+          <a:noFill/>
+        </p:spPr>
+        <p:txBody>
+          <a:bodyPr wrap="square" anchor="t" lIns="0" rIns="0" tIns="0" bIns="0">
+            <a:spAutoFit/>
+          </a:bodyPr>
+          <a:lstStyle/>
+          <a:p>
+            <a:pPr algn="l">
+              <a:lnSpc>
+                <a:spcPct val="114000"/>
+              </a:lnSpc>
+            </a:pPr>
+            <a:r>
+              <a:rPr sz="850" b="0">
+                <a:solidFill>
+                  <a:srgbClr val="5C6E6A"/>
+                </a:solidFill>
+              </a:rPr>
+              <a:t>▲ p33_kpi_cockpit：分层达标 第 15 行起的四档逐字原文（绿=达标/通过，黄=仅本节取证项，橙=未实测项）</a:t>
             </a:r>
           </a:p>
         </p:txBody>

--- a/03-Python程序设计-项目实战/V2授课PPT/W05-第10次课-每天早上8点的生产日报.pptx
+++ b/03-Python程序设计-项目实战/V2授课PPT/W05-第10次课-每天早上8点的生产日报.pptx
@@ -6,6 +6,7 @@
   </p:sldMasterIdLst>
   <p:sldIdLst>
     <p:sldId id="256" r:id="rId7"/>
+    <p:sldId id="373" r:id="rId18"/>
     <p:sldId id="311" r:id="rId63"/>
     <p:sldId id="321" r:id="rId73"/>
     <p:sldId id="369" r:id="rId121"/>
@@ -15,6 +16,8 @@
     <p:sldId id="340" r:id="rId92"/>
     <p:sldId id="367" r:id="rId119"/>
     <p:sldId id="368" r:id="rId120"/>
+    <p:sldId id="374" r:id="rId19"/>
+    <p:sldId id="375" r:id="rId20"/>
   </p:sldIdLst>
   <p:sldSz cx="12192000" cy="6858000" type="screen4x3"/>
   <p:notesSz cx="6858000" cy="9144000"/>
@@ -4225,22 +4228,20 @@
       <p:grpSpPr/>
       <p:sp>
         <p:nvSpPr>
-          <p:cNvPr id="2" name="Rounded Rectangle 1"/>
+          <p:cNvPr id="2" name="Rectangle 1"/>
           <p:cNvSpPr/>
           <p:nvPr/>
         </p:nvSpPr>
         <p:spPr>
           <a:xfrm>
             <a:off x="0" y="0"/>
-            <a:ext cx="12191695" cy="64008"/>
-          </a:xfrm>
-          <a:prstGeom prst="roundRect">
-            <a:avLst>
-              <a:gd name="adj" fmla="val 50000"/>
-            </a:avLst>
+            <a:ext cx="12192000" cy="1150000"/>
+          </a:xfrm>
+          <a:prstGeom prst="rect">
+            <a:avLst/>
           </a:prstGeom>
           <a:solidFill>
-            <a:srgbClr val="0B5E54"/>
+            <a:srgbClr val="010328"/>
           </a:solidFill>
           <a:ln>
             <a:noFill/>
@@ -4271,60 +4272,20 @@
       </p:sp>
       <p:sp>
         <p:nvSpPr>
-          <p:cNvPr id="3" name="TextBox 2"/>
-          <p:cNvSpPr txBox="1"/>
-          <p:nvPr/>
-        </p:nvSpPr>
-        <p:spPr>
-          <a:xfrm>
-            <a:off x="475488" y="146304"/>
-            <a:ext cx="8229600" cy="292608"/>
-          </a:xfrm>
-          <a:prstGeom prst="rect">
-            <a:avLst/>
-          </a:prstGeom>
-          <a:noFill/>
-        </p:spPr>
-        <p:txBody>
-          <a:bodyPr wrap="square" anchor="t" lIns="0" rIns="0" tIns="0" bIns="0">
-            <a:spAutoFit/>
-          </a:bodyPr>
-          <a:lstStyle/>
-          <a:p>
-            <a:pPr algn="l">
-              <a:lnSpc>
-                <a:spcPct val="114000"/>
-              </a:lnSpc>
-            </a:pPr>
-            <a:r>
-              <a:rPr sz="1100" b="1">
-                <a:solidFill>
-                  <a:srgbClr val="0B5E54"/>
-                </a:solidFill>
-              </a:rPr>
-              <a:t>工单实战 · 运行留证</a:t>
-            </a:r>
-          </a:p>
-        </p:txBody>
-      </p:sp>
-      <p:sp>
-        <p:nvSpPr>
-          <p:cNvPr id="4" name="Rounded Rectangle 3"/>
+          <p:cNvPr id="3" name="Rectangle 2"/>
           <p:cNvSpPr/>
           <p:nvPr/>
         </p:nvSpPr>
         <p:spPr>
           <a:xfrm>
-            <a:off x="475488" y="475488"/>
-            <a:ext cx="2027872" cy="310896"/>
-          </a:xfrm>
-          <a:prstGeom prst="roundRect">
-            <a:avLst>
-              <a:gd name="adj" fmla="val 50000"/>
-            </a:avLst>
+            <a:off x="0" y="1150000"/>
+            <a:ext cx="2600000" cy="70000"/>
+          </a:xfrm>
+          <a:prstGeom prst="rect">
+            <a:avLst/>
           </a:prstGeom>
           <a:solidFill>
-            <a:srgbClr val="C9A227"/>
+            <a:srgbClr val="F5670F"/>
           </a:solidFill>
           <a:ln>
             <a:noFill/>
@@ -4355,14 +4316,14 @@
       </p:sp>
       <p:sp>
         <p:nvSpPr>
-          <p:cNvPr id="5" name="TextBox 4"/>
+          <p:cNvPr id="4" name="TextBox 3"/>
           <p:cNvSpPr txBox="1"/>
           <p:nvPr/>
         </p:nvSpPr>
         <p:spPr>
           <a:xfrm>
-            <a:off x="475488" y="475488"/>
-            <a:ext cx="2027872" cy="310896"/>
+            <a:off x="700000" y="300000"/>
+            <a:ext cx="10792000" cy="700000"/>
           </a:xfrm>
           <a:prstGeom prst="rect">
             <a:avLst/>
@@ -4370,83 +4331,47 @@
           <a:noFill/>
         </p:spPr>
         <p:txBody>
-          <a:bodyPr wrap="square" anchor="ctr" lIns="0" rIns="0" tIns="0" bIns="0">
+          <a:bodyPr wrap="square" anchor="t">
             <a:spAutoFit/>
           </a:bodyPr>
           <a:lstStyle/>
           <a:p>
-            <a:pPr algn="ctr">
-              <a:lnSpc>
-                <a:spcPct val="114000"/>
-              </a:lnSpc>
-            </a:pPr>
-            <a:r>
-              <a:rPr sz="1050" b="1">
-                <a:solidFill>
-                  <a:srgbClr val="FFFFFF"/>
-                </a:solidFill>
-              </a:rPr>
-              <a:t>SCREENSHOT · 终端逐字截图</a:t>
-            </a:r>
-          </a:p>
-        </p:txBody>
-      </p:sp>
-      <p:sp>
-        <p:nvSpPr>
-          <p:cNvPr id="6" name="TextBox 5"/>
-          <p:cNvSpPr txBox="1"/>
-          <p:nvPr/>
-        </p:nvSpPr>
-        <p:spPr>
-          <a:xfrm>
-            <a:off x="475488" y="859536"/>
-            <a:ext cx="11237976" cy="502920"/>
-          </a:xfrm>
-          <a:prstGeom prst="rect">
-            <a:avLst/>
-          </a:prstGeom>
-          <a:noFill/>
-        </p:spPr>
-        <p:txBody>
-          <a:bodyPr wrap="square" anchor="t" lIns="0" rIns="0" tIns="0" bIns="0">
-            <a:spAutoFit/>
-          </a:bodyPr>
-          <a:lstStyle/>
-          <a:p>
             <a:pPr algn="l">
               <a:lnSpc>
-                <a:spcPct val="114000"/>
+                <a:spcPct val="110000"/>
               </a:lnSpc>
+              <a:spcAft>
+                <a:spcPts val="600"/>
+              </a:spcAft>
             </a:pPr>
             <a:r>
-              <a:rPr sz="2200" b="1">
-                <a:solidFill>
-                  <a:srgbClr val="1B2B28"/>
-                </a:solidFill>
+              <a:rPr sz="2400" b="1">
+                <a:solidFill>
+                  <a:srgbClr val="FFFFFF"/>
+                </a:solidFill>
+                <a:latin typeface="微软雅黑"/>
               </a:rPr>
-              <a:t>P3.1/P3.2 · 测试全绿证据＋pytest 全量实跑</a:t>
-            </a:r>
-          </a:p>
-        </p:txBody>
-      </p:sp>
-      <p:sp>
-        <p:nvSpPr>
-          <p:cNvPr id="7" name="Rounded Rectangle 6"/>
+              <a:t>下次课预告（第6周）</a:t>
+            </a:r>
+          </a:p>
+        </p:txBody>
+      </p:sp>
+      <p:sp>
+        <p:nvSpPr>
+          <p:cNvPr id="5" name="Rectangle 4"/>
           <p:cNvSpPr/>
           <p:nvPr/>
         </p:nvSpPr>
         <p:spPr>
           <a:xfrm>
-            <a:off x="475488" y="1389888"/>
-            <a:ext cx="1234440" cy="27432"/>
-          </a:xfrm>
-          <a:prstGeom prst="roundRect">
-            <a:avLst>
-              <a:gd name="adj" fmla="val 50000"/>
-            </a:avLst>
+            <a:off x="760000" y="1900000"/>
+            <a:ext cx="10900000" cy="1600000"/>
+          </a:xfrm>
+          <a:prstGeom prst="rect">
+            <a:avLst/>
           </a:prstGeom>
           <a:solidFill>
-            <a:srgbClr val="C9A227"/>
+            <a:srgbClr val="F3F6FD"/>
           </a:solidFill>
           <a:ln>
             <a:noFill/>
@@ -4477,22 +4402,20 @@
       </p:sp>
       <p:sp>
         <p:nvSpPr>
-          <p:cNvPr id="8" name="Rounded Rectangle 7"/>
+          <p:cNvPr id="6" name="Rectangle 5"/>
           <p:cNvSpPr/>
           <p:nvPr/>
         </p:nvSpPr>
         <p:spPr>
           <a:xfrm>
-            <a:off x="475488" y="6419088"/>
-            <a:ext cx="11237976" cy="10972"/>
-          </a:xfrm>
-          <a:prstGeom prst="roundRect">
-            <a:avLst>
-              <a:gd name="adj" fmla="val 50000"/>
-            </a:avLst>
+            <a:off x="760000" y="1900000"/>
+            <a:ext cx="150000" cy="1600000"/>
+          </a:xfrm>
+          <a:prstGeom prst="rect">
+            <a:avLst/>
           </a:prstGeom>
           <a:solidFill>
-            <a:srgbClr val="E4F1EE"/>
+            <a:srgbClr val="F5670F"/>
           </a:solidFill>
           <a:ln>
             <a:noFill/>
@@ -4523,14 +4446,14 @@
       </p:sp>
       <p:sp>
         <p:nvSpPr>
-          <p:cNvPr id="9" name="TextBox 8"/>
+          <p:cNvPr id="7" name="TextBox 6"/>
           <p:cNvSpPr txBox="1"/>
           <p:nvPr/>
         </p:nvSpPr>
         <p:spPr>
           <a:xfrm>
-            <a:off x="475488" y="6455664"/>
-            <a:ext cx="7315200" cy="292608"/>
+            <a:off x="1020000" y="2050000"/>
+            <a:ext cx="10500000" cy="1400000"/>
           </a:xfrm>
           <a:prstGeom prst="rect">
             <a:avLst/>
@@ -4538,37 +4461,60 @@
           <a:noFill/>
         </p:spPr>
         <p:txBody>
-          <a:bodyPr wrap="square" anchor="t" lIns="0" rIns="0" tIns="0" bIns="0">
+          <a:bodyPr wrap="square" anchor="t">
             <a:spAutoFit/>
           </a:bodyPr>
           <a:lstStyle/>
           <a:p>
             <a:pPr algn="l">
               <a:lnSpc>
-                <a:spcPct val="114000"/>
+                <a:spcPct val="110000"/>
               </a:lnSpc>
+              <a:spcAft>
+                <a:spcPts val="600"/>
+              </a:spcAft>
             </a:pPr>
             <a:r>
-              <a:rPr sz="900" b="0">
-                <a:solidFill>
-                  <a:srgbClr val="5C6E6A"/>
-                </a:solidFill>
+              <a:rPr sz="1700" b="1">
+                <a:solidFill>
+                  <a:srgbClr val="010328"/>
+                </a:solidFill>
+                <a:latin typeface="微软雅黑"/>
               </a:rPr>
-              <a:t>两江智造集团 · Python程序设计（项目实战）</a:t>
-            </a:r>
-          </a:p>
-        </p:txBody>
-      </p:sp>
-      <p:sp>
-        <p:nvSpPr>
-          <p:cNvPr id="10" name="TextBox 9"/>
+              <a:t>主题: 三线程骨架贯通(采集/订阅/处理)——应用：见工</a:t>
+            </a:r>
+          </a:p>
+          <a:p>
+            <a:pPr algn="l">
+              <a:lnSpc>
+                <a:spcPct val="110000"/>
+              </a:lnSpc>
+              <a:spcAft>
+                <a:spcPts val="600"/>
+              </a:spcAft>
+            </a:pPr>
+            <a:r>
+              <a:rPr sz="1300" b="0">
+                <a:solidFill>
+                  <a:srgbClr val="44546A"/>
+                </a:solidFill>
+                <a:latin typeface="微软雅黑"/>
+              </a:rPr>
+              <a:t>预习快问: 为什么‘共享list.append’有隐患而Queue安全？</a:t>
+            </a:r>
+          </a:p>
+        </p:txBody>
+      </p:sp>
+      <p:sp>
+        <p:nvSpPr>
+          <p:cNvPr id="8" name="TextBox 7"/>
           <p:cNvSpPr txBox="1"/>
           <p:nvPr/>
         </p:nvSpPr>
         <p:spPr>
           <a:xfrm>
-            <a:off x="10597896" y="6537960"/>
-            <a:ext cx="996696" cy="301752"/>
+            <a:off x="760000" y="3900000"/>
+            <a:ext cx="10900000" cy="900000"/>
           </a:xfrm>
           <a:prstGeom prst="rect">
             <a:avLst/>
@@ -4576,37 +4522,78 @@
           <a:noFill/>
         </p:spPr>
         <p:txBody>
-          <a:bodyPr wrap="square" anchor="t" lIns="0" rIns="0" tIns="0" bIns="0">
+          <a:bodyPr wrap="square" anchor="t">
             <a:spAutoFit/>
           </a:bodyPr>
           <a:lstStyle/>
           <a:p>
-            <a:pPr algn="r">
+            <a:pPr algn="l">
               <a:lnSpc>
-                <a:spcPct val="114000"/>
+                <a:spcPct val="110000"/>
               </a:lnSpc>
+              <a:spcAft>
+                <a:spcPts val="600"/>
+              </a:spcAft>
             </a:pPr>
             <a:r>
-              <a:rPr sz="1000" b="0">
-                <a:solidFill>
-                  <a:srgbClr val="8A97B5"/>
-                </a:solidFill>
+              <a:rPr sz="1400" b="1">
+                <a:solidFill>
+                  <a:srgbClr val="0545E8"/>
+                </a:solidFill>
+                <a:latin typeface="微软雅黑"/>
               </a:rPr>
-              <a:t>7 / 10</a:t>
-            </a:r>
-          </a:p>
-        </p:txBody>
-      </p:sp>
-      <p:sp>
-        <p:nvSpPr>
-          <p:cNvPr id="11" name="TextBox 10"/>
+              <a:t>课前完成：导学单 + 预习自测 + starter环境自检</a:t>
+            </a:r>
+          </a:p>
+          <a:p>
+            <a:pPr algn="l">
+              <a:lnSpc>
+                <a:spcPct val="110000"/>
+              </a:lnSpc>
+              <a:spcAft>
+                <a:spcPts val="600"/>
+              </a:spcAft>
+            </a:pPr>
+            <a:r>
+              <a:rPr sz="1250" b="0">
+                <a:solidFill>
+                  <a:srgbClr val="44546A"/>
+                </a:solidFill>
+                <a:latin typeface="微软雅黑"/>
+              </a:rPr>
+              <a:t>带着问题来上课——Predict先于Run</a:t>
+            </a:r>
+          </a:p>
+        </p:txBody>
+      </p:sp>
+    </p:spTree>
+  </p:cSld>
+  <p:clrMapOvr>
+    <a:masterClrMapping/>
+  </p:clrMapOvr>
+</p:sld>
+</file>
+
+<file path=ppt/slides/slide11.xml><?xml version="1.0" encoding="utf-8"?>
+<p:sld xmlns:a="http://schemas.openxmlformats.org/drawingml/2006/main" xmlns:p="http://schemas.openxmlformats.org/presentationml/2006/main" xmlns:r="http://schemas.openxmlformats.org/officeDocument/2006/relationships">
+  <p:cSld>
+    <p:spTree>
+      <p:nvGrpSpPr>
+        <p:cNvPr id="1" name=""/>
+        <p:cNvGrpSpPr/>
+        <p:nvPr/>
+      </p:nvGrpSpPr>
+      <p:grpSpPr/>
+      <p:sp>
+        <p:nvSpPr>
+          <p:cNvPr id="2" name="TextBox 1"/>
           <p:cNvSpPr txBox="1"/>
           <p:nvPr/>
         </p:nvSpPr>
         <p:spPr>
           <a:xfrm>
-            <a:off x="475488" y="1517904"/>
-            <a:ext cx="11237976" cy="237744"/>
+            <a:off x="548640" y="320040"/>
+            <a:ext cx="11094720" cy="914400"/>
           </a:xfrm>
           <a:prstGeom prst="rect">
             <a:avLst/>
@@ -4614,61 +4601,28 @@
           <a:noFill/>
         </p:spPr>
         <p:txBody>
-          <a:bodyPr wrap="square" anchor="t" lIns="0" rIns="0" tIns="0" bIns="0">
+          <a:bodyPr wrap="none">
             <a:spAutoFit/>
           </a:bodyPr>
           <a:lstStyle/>
           <a:p>
-            <a:pPr algn="l">
-              <a:lnSpc>
-                <a:spcPct val="114000"/>
-              </a:lnSpc>
-            </a:pPr>
-            <a:r>
-              <a:rPr sz="1000" b="0">
-                <a:solidFill>
-                  <a:srgbClr val="5C6E6A"/>
-                </a:solidFill>
-              </a:rPr>
-              <a:t>pytest 全量实跑：本机真实运行输出，非示例、非节选</a:t>
-            </a:r>
-          </a:p>
-        </p:txBody>
-      </p:sp>
-      <p:pic>
-        <p:nvPicPr>
-          <p:cNvPr id="12" name="Picture 11" descr="p33_kpi_cockpit_pytest.png"/>
-          <p:cNvPicPr>
-            <a:picLocks noChangeAspect="1"/>
-          </p:cNvPicPr>
-          <p:nvPr/>
-        </p:nvPicPr>
-        <p:blipFill>
-          <a:blip r:embed="rId2"/>
-          <a:stretch>
-            <a:fillRect/>
-          </a:stretch>
-        </p:blipFill>
-        <p:spPr>
-          <a:xfrm>
-            <a:off x="475488" y="2265275"/>
-            <a:ext cx="11237976" cy="1989122"/>
-          </a:xfrm>
-          <a:prstGeom prst="rect">
-            <a:avLst/>
-          </a:prstGeom>
-        </p:spPr>
-      </p:pic>
-      <p:sp>
-        <p:nvSpPr>
-          <p:cNvPr id="13" name="TextBox 12"/>
+            <a:r>
+              <a:rPr sz="3000" b="1"/>
+              <a:t>安全与合规警示（操作前必读）</a:t>
+            </a:r>
+          </a:p>
+        </p:txBody>
+      </p:sp>
+      <p:sp>
+        <p:nvSpPr>
+          <p:cNvPr id="3" name="TextBox 2"/>
           <p:cNvSpPr txBox="1"/>
           <p:nvPr/>
         </p:nvSpPr>
         <p:spPr>
           <a:xfrm>
-            <a:off x="475488" y="4290972"/>
-            <a:ext cx="11237976" cy="256032"/>
+            <a:off x="731520" y="1371600"/>
+            <a:ext cx="10728960" cy="4663440"/>
           </a:xfrm>
           <a:prstGeom prst="rect">
             <a:avLst/>
@@ -4676,129 +4630,101 @@
           <a:noFill/>
         </p:spPr>
         <p:txBody>
-          <a:bodyPr wrap="square" anchor="t" lIns="0" rIns="0" tIns="0" bIns="0">
+          <a:bodyPr wrap="square">
             <a:spAutoFit/>
           </a:bodyPr>
           <a:lstStyle/>
           <a:p>
-            <a:pPr algn="l">
-              <a:lnSpc>
-                <a:spcPct val="114000"/>
-              </a:lnSpc>
+            <a:pPr>
+              <a:spcAft>
+                <a:spcPts val="1000"/>
+              </a:spcAft>
             </a:pPr>
             <a:r>
-              <a:rPr sz="850" b="0">
-                <a:solidFill>
-                  <a:srgbClr val="5C6E6A"/>
-                </a:solidFill>
-              </a:rPr>
-              <a:t>▲ pytest：270 passed in 18.75s（本机实跑，非示例）</a:t>
-            </a:r>
-          </a:p>
-        </p:txBody>
-      </p:sp>
-      <p:sp>
-        <p:nvSpPr>
-          <p:cNvPr id="14" name="Rounded Rectangle 13"/>
-          <p:cNvSpPr/>
-          <p:nvPr/>
-        </p:nvSpPr>
-        <p:spPr>
-          <a:xfrm>
-            <a:off x="475488" y="4656732"/>
-            <a:ext cx="11237976" cy="822960"/>
-          </a:xfrm>
-          <a:prstGeom prst="roundRect">
-            <a:avLst>
-              <a:gd name="adj" fmla="val 5000"/>
-            </a:avLst>
-          </a:prstGeom>
-          <a:solidFill>
-            <a:srgbClr val="E4F1EE"/>
-          </a:solidFill>
-          <a:ln>
-            <a:noFill/>
-          </a:ln>
-          <a:effectLst/>
-        </p:spPr>
-        <p:style>
-          <a:lnRef idx="1">
-            <a:schemeClr val="accent1"/>
-          </a:lnRef>
-          <a:fillRef idx="3">
-            <a:schemeClr val="accent1"/>
-          </a:fillRef>
-          <a:effectRef idx="2">
-            <a:schemeClr val="accent1"/>
-          </a:effectRef>
-          <a:fontRef idx="minor">
-            <a:schemeClr val="lt1"/>
-          </a:fontRef>
-        </p:style>
-        <p:txBody>
-          <a:bodyPr rtlCol="0" anchor="ctr"/>
-          <a:lstStyle/>
-          <a:p>
-            <a:pPr algn="ctr"/>
-          </a:p>
-        </p:txBody>
-      </p:sp>
-      <p:sp>
-        <p:nvSpPr>
-          <p:cNvPr id="15" name="Rounded Rectangle 14"/>
-          <p:cNvSpPr/>
-          <p:nvPr/>
-        </p:nvSpPr>
-        <p:spPr>
-          <a:xfrm>
-            <a:off x="475488" y="4656732"/>
-            <a:ext cx="54864" cy="822960"/>
-          </a:xfrm>
-          <a:prstGeom prst="roundRect">
-            <a:avLst>
-              <a:gd name="adj" fmla="val 50000"/>
-            </a:avLst>
-          </a:prstGeom>
-          <a:solidFill>
-            <a:srgbClr val="C9A227"/>
-          </a:solidFill>
-          <a:ln>
-            <a:noFill/>
-          </a:ln>
-          <a:effectLst/>
-        </p:spPr>
-        <p:style>
-          <a:lnRef idx="1">
-            <a:schemeClr val="accent1"/>
-          </a:lnRef>
-          <a:fillRef idx="3">
-            <a:schemeClr val="accent1"/>
-          </a:fillRef>
-          <a:effectRef idx="2">
-            <a:schemeClr val="accent1"/>
-          </a:effectRef>
-          <a:fontRef idx="minor">
-            <a:schemeClr val="lt1"/>
-          </a:fontRef>
-        </p:style>
-        <p:txBody>
-          <a:bodyPr rtlCol="0" anchor="ctr"/>
-          <a:lstStyle/>
-          <a:p>
-            <a:pPr algn="ctr"/>
-          </a:p>
-        </p:txBody>
-      </p:sp>
-      <p:sp>
-        <p:nvSpPr>
-          <p:cNvPr id="16" name="TextBox 15"/>
+              <a:rPr sz="1800"/>
+              <a:t>1. 上机前确认本工位电源开关与急停位置，确认设备处于安全状态。</a:t>
+            </a:r>
+          </a:p>
+          <a:p>
+            <a:pPr>
+              <a:spcAft>
+                <a:spcPts val="1000"/>
+              </a:spcAft>
+            </a:pPr>
+            <a:r>
+              <a:rPr sz="1800"/>
+              <a:t>2. 涉及接线的操作一律先断电、后验电、再作业，禁止带电插拔。</a:t>
+            </a:r>
+          </a:p>
+          <a:p>
+            <a:pPr>
+              <a:spcAft>
+                <a:spcPts val="1000"/>
+              </a:spcAft>
+            </a:pPr>
+            <a:r>
+              <a:rPr sz="1800"/>
+              <a:t>3. 身体任何部位不进入设备运动/散热区域，长发束起，不佩戴悬垂饰物。</a:t>
+            </a:r>
+          </a:p>
+          <a:p>
+            <a:pPr>
+              <a:spcAft>
+                <a:spcPts val="1000"/>
+              </a:spcAft>
+            </a:pPr>
+            <a:r>
+              <a:rPr sz="1800"/>
+              <a:t>4. 调试程序前先静态检查、再低速小样本试运行，确认无异常后放大规模。</a:t>
+            </a:r>
+          </a:p>
+          <a:p>
+            <a:pPr>
+              <a:spcAft>
+                <a:spcPts val="1000"/>
+              </a:spcAft>
+            </a:pPr>
+            <a:r>
+              <a:rPr sz="1800"/>
+              <a:t>5. 任何不确定或异常情况，立即停止操作并报告指导教师，不擅自处置。</a:t>
+            </a:r>
+          </a:p>
+          <a:p>
+            <a:r>
+              <a:rPr sz="1400" b="1"/>
+              <a:t>以上任一条违反，本次任务按课程标准「安全规范一票否决」条款记 0 分并中止实训。</a:t>
+            </a:r>
+          </a:p>
+        </p:txBody>
+      </p:sp>
+    </p:spTree>
+  </p:cSld>
+  <p:clrMapOvr>
+    <a:masterClrMapping/>
+  </p:clrMapOvr>
+</p:sld>
+</file>
+
+<file path=ppt/slides/slide12.xml><?xml version="1.0" encoding="utf-8"?>
+<p:sld xmlns:a="http://schemas.openxmlformats.org/drawingml/2006/main" xmlns:p="http://schemas.openxmlformats.org/presentationml/2006/main" xmlns:r="http://schemas.openxmlformats.org/officeDocument/2006/relationships">
+  <p:cSld>
+    <p:spTree>
+      <p:nvGrpSpPr>
+        <p:cNvPr id="1" name=""/>
+        <p:cNvGrpSpPr/>
+        <p:nvPr/>
+      </p:nvGrpSpPr>
+      <p:grpSpPr/>
+      <p:sp>
+        <p:nvSpPr>
+          <p:cNvPr id="2" name="TextBox 1"/>
           <p:cNvSpPr txBox="1"/>
           <p:nvPr/>
         </p:nvSpPr>
         <p:spPr>
           <a:xfrm>
-            <a:off x="676656" y="4739028"/>
-            <a:ext cx="10908792" cy="658368"/>
+            <a:off x="548640" y="320040"/>
+            <a:ext cx="11094720" cy="914400"/>
           </a:xfrm>
           <a:prstGeom prst="rect">
             <a:avLst/>
@@ -4806,53 +4732,195 @@
           <a:noFill/>
         </p:spPr>
         <p:txBody>
-          <a:bodyPr wrap="square" anchor="t" lIns="0" rIns="0" tIns="0" bIns="0">
+          <a:bodyPr wrap="none">
             <a:spAutoFit/>
           </a:bodyPr>
           <a:lstStyle/>
           <a:p>
-            <a:pPr algn="l">
-              <a:lnSpc>
-                <a:spcPct val="126000"/>
-              </a:lnSpc>
+            <a:r>
+              <a:rPr sz="3000" b="1"/>
+              <a:t>本任务六步法导航</a:t>
+            </a:r>
+          </a:p>
+        </p:txBody>
+      </p:sp>
+      <p:sp>
+        <p:nvSpPr>
+          <p:cNvPr id="3" name="TextBox 2"/>
+          <p:cNvSpPr txBox="1"/>
+          <p:nvPr/>
+        </p:nvSpPr>
+        <p:spPr>
+          <a:xfrm>
+            <a:off x="731520" y="1371600"/>
+            <a:ext cx="10728960" cy="4663440"/>
+          </a:xfrm>
+          <a:prstGeom prst="rect">
+            <a:avLst/>
+          </a:prstGeom>
+          <a:noFill/>
+        </p:spPr>
+        <p:txBody>
+          <a:bodyPr wrap="square">
+            <a:spAutoFit/>
+          </a:bodyPr>
+          <a:lstStyle/>
+          <a:p>
+            <a:pPr>
+              <a:spcAft>
+                <a:spcPts val="1000"/>
+              </a:spcAft>
             </a:pPr>
             <a:r>
-              <a:rPr sz="850" b="0">
-                <a:solidFill>
-                  <a:srgbClr val="1B2B28"/>
-                </a:solidFill>
-              </a:rPr>
-              <a:t>本项目四档只有一套阶梯口径（课堂 D/C/B/A 即工单及格/良好/优秀/超优），逐字实测见上一页截图；本页补的是测试全绿证据。</a:t>
-            </a:r>
-          </a:p>
-          <a:p>
-            <a:pPr algn="l">
-              <a:lnSpc>
-                <a:spcPct val="126000"/>
-              </a:lnSpc>
+              <a:rPr sz="1800"/>
+              <a:t>六步法：资讯 → 计划 → 决策 → 实施 → 检查 → 评估</a:t>
+            </a:r>
+          </a:p>
+          <a:p>
+            <a:pPr>
+              <a:spcAft>
+                <a:spcPts val="1000"/>
+              </a:spcAft>
             </a:pPr>
             <a:r>
-              <a:rPr sz="850" b="0">
-                <a:solidFill>
-                  <a:srgbClr val="1B2B28"/>
-                </a:solidFill>
-              </a:rPr>
-              <a:t>复现：cd 工程化项目/p33_kpi_cockpit &amp;&amp; python -m pytest -q -o addopts=''</a:t>
-            </a:r>
-          </a:p>
-          <a:p>
-            <a:pPr algn="l">
-              <a:lnSpc>
-                <a:spcPct val="126000"/>
-              </a:lnSpc>
+              <a:rPr sz="1800"/>
+              <a:t>本讲对应工单：《Python程序设计-项目实战》分层任务工单</a:t>
+            </a:r>
+          </a:p>
+          <a:p>
+            <a:pPr>
+              <a:spcAft>
+                <a:spcPts val="1000"/>
+              </a:spcAft>
             </a:pPr>
             <a:r>
-              <a:rPr sz="850" b="0">
-                <a:solidFill>
-                  <a:srgbClr val="1B2B28"/>
-                </a:solidFill>
-              </a:rPr>
-              <a:t>工单提交：截图需含终端标题栏的文件名与完整输出，退出码 0 才算全绿。</a:t>
+              <a:rPr sz="1800"/>
+              <a:t>课堂产出：工单第六节实施记录须当堂填写，含操作前安全打勾与学生本人签字。</a:t>
+            </a:r>
+          </a:p>
+          <a:p>
+            <a:pPr>
+              <a:spcAft>
+                <a:spcPts val="1000"/>
+              </a:spcAft>
+            </a:pPr>
+            <a:r>
+              <a:rPr sz="1800"/>
+              <a:t>课后交付：班组长／操作员／教师三方联签后交回，缺签视为未交付。</a:t>
+            </a:r>
+          </a:p>
+        </p:txBody>
+      </p:sp>
+    </p:spTree>
+  </p:cSld>
+  <p:clrMapOvr>
+    <a:masterClrMapping/>
+  </p:clrMapOvr>
+</p:sld>
+</file>
+
+<file path=ppt/slides/slide13.xml><?xml version="1.0" encoding="utf-8"?>
+<p:sld xmlns:a="http://schemas.openxmlformats.org/drawingml/2006/main" xmlns:p="http://schemas.openxmlformats.org/presentationml/2006/main" xmlns:r="http://schemas.openxmlformats.org/officeDocument/2006/relationships">
+  <p:cSld>
+    <p:spTree>
+      <p:nvGrpSpPr>
+        <p:cNvPr id="1" name=""/>
+        <p:cNvGrpSpPr/>
+        <p:nvPr/>
+      </p:nvGrpSpPr>
+      <p:grpSpPr/>
+      <p:sp>
+        <p:nvSpPr>
+          <p:cNvPr id="2" name="TextBox 1"/>
+          <p:cNvSpPr txBox="1"/>
+          <p:nvPr/>
+        </p:nvSpPr>
+        <p:spPr>
+          <a:xfrm>
+            <a:off x="548640" y="320040"/>
+            <a:ext cx="11094720" cy="914400"/>
+          </a:xfrm>
+          <a:prstGeom prst="rect">
+            <a:avLst/>
+          </a:prstGeom>
+          <a:noFill/>
+        </p:spPr>
+        <p:txBody>
+          <a:bodyPr wrap="none">
+            <a:spAutoFit/>
+          </a:bodyPr>
+          <a:lstStyle/>
+          <a:p>
+            <a:r>
+              <a:rPr sz="3000" b="1"/>
+              <a:t>本讲与岗位任务单的衔接</a:t>
+            </a:r>
+          </a:p>
+        </p:txBody>
+      </p:sp>
+      <p:sp>
+        <p:nvSpPr>
+          <p:cNvPr id="3" name="TextBox 2"/>
+          <p:cNvSpPr txBox="1"/>
+          <p:nvPr/>
+        </p:nvSpPr>
+        <p:spPr>
+          <a:xfrm>
+            <a:off x="731520" y="1371600"/>
+            <a:ext cx="10728960" cy="4663440"/>
+          </a:xfrm>
+          <a:prstGeom prst="rect">
+            <a:avLst/>
+          </a:prstGeom>
+          <a:noFill/>
+        </p:spPr>
+        <p:txBody>
+          <a:bodyPr wrap="square">
+            <a:spAutoFit/>
+          </a:bodyPr>
+          <a:lstStyle/>
+          <a:p>
+            <a:pPr>
+              <a:spcAft>
+                <a:spcPts val="1000"/>
+              </a:spcAft>
+            </a:pPr>
+            <a:r>
+              <a:rPr sz="1800"/>
+              <a:t>本讲在工作过程系统化课程中承担的任务环节：任务实施</a:t>
+            </a:r>
+          </a:p>
+          <a:p>
+            <a:pPr>
+              <a:spcAft>
+                <a:spcPts val="1000"/>
+              </a:spcAft>
+            </a:pPr>
+            <a:r>
+              <a:rPr sz="1800"/>
+              <a:t>考核对齐：过程性成绩取自本讲工单第六节各模块得分合计（满分 100）。</a:t>
+            </a:r>
+          </a:p>
+          <a:p>
+            <a:pPr>
+              <a:spcAft>
+                <a:spcPts val="1000"/>
+              </a:spcAft>
+            </a:pPr>
+            <a:r>
+              <a:rPr sz="1800"/>
+              <a:t>达标线：综合成绩≥60 分，且无安全红线一票否决记录</a:t>
+            </a:r>
+          </a:p>
+          <a:p>
+            <a:pPr>
+              <a:spcAft>
+                <a:spcPts val="1000"/>
+              </a:spcAft>
+            </a:pPr>
+            <a:r>
+              <a:rPr sz="1800"/>
+              <a:t>无效工单判定：未打安全勾、无本人签字、无三方联签。</a:t>
             </a:r>
           </a:p>
         </p:txBody>
@@ -7412,20 +7480,22 @@
       <p:grpSpPr/>
       <p:sp>
         <p:nvSpPr>
-          <p:cNvPr id="2" name="Rectangle 1"/>
+          <p:cNvPr id="2" name="Rounded Rectangle 1"/>
           <p:cNvSpPr/>
           <p:nvPr/>
         </p:nvSpPr>
         <p:spPr>
           <a:xfrm>
             <a:off x="0" y="0"/>
-            <a:ext cx="12192000" cy="1150000"/>
-          </a:xfrm>
-          <a:prstGeom prst="rect">
-            <a:avLst/>
+            <a:ext cx="12191695" cy="64008"/>
+          </a:xfrm>
+          <a:prstGeom prst="roundRect">
+            <a:avLst>
+              <a:gd name="adj" fmla="val 50000"/>
+            </a:avLst>
           </a:prstGeom>
           <a:solidFill>
-            <a:srgbClr val="010328"/>
+            <a:srgbClr val="0B5E54"/>
           </a:solidFill>
           <a:ln>
             <a:noFill/>
@@ -7456,20 +7526,60 @@
       </p:sp>
       <p:sp>
         <p:nvSpPr>
-          <p:cNvPr id="3" name="Rectangle 2"/>
+          <p:cNvPr id="3" name="TextBox 2"/>
+          <p:cNvSpPr txBox="1"/>
+          <p:nvPr/>
+        </p:nvSpPr>
+        <p:spPr>
+          <a:xfrm>
+            <a:off x="475488" y="146304"/>
+            <a:ext cx="8229600" cy="292608"/>
+          </a:xfrm>
+          <a:prstGeom prst="rect">
+            <a:avLst/>
+          </a:prstGeom>
+          <a:noFill/>
+        </p:spPr>
+        <p:txBody>
+          <a:bodyPr wrap="square" anchor="t" lIns="0" rIns="0" tIns="0" bIns="0">
+            <a:spAutoFit/>
+          </a:bodyPr>
+          <a:lstStyle/>
+          <a:p>
+            <a:pPr algn="l">
+              <a:lnSpc>
+                <a:spcPct val="114000"/>
+              </a:lnSpc>
+            </a:pPr>
+            <a:r>
+              <a:rPr sz="1100" b="1">
+                <a:solidFill>
+                  <a:srgbClr val="0B5E54"/>
+                </a:solidFill>
+              </a:rPr>
+              <a:t>工单实战 · 本次实跑结果</a:t>
+            </a:r>
+          </a:p>
+        </p:txBody>
+      </p:sp>
+      <p:sp>
+        <p:nvSpPr>
+          <p:cNvPr id="4" name="Rounded Rectangle 3"/>
           <p:cNvSpPr/>
           <p:nvPr/>
         </p:nvSpPr>
         <p:spPr>
           <a:xfrm>
-            <a:off x="0" y="1150000"/>
-            <a:ext cx="2600000" cy="70000"/>
-          </a:xfrm>
-          <a:prstGeom prst="rect">
-            <a:avLst/>
+            <a:off x="475488" y="475488"/>
+            <a:ext cx="1881187" cy="310896"/>
+          </a:xfrm>
+          <a:prstGeom prst="roundRect">
+            <a:avLst>
+              <a:gd name="adj" fmla="val 50000"/>
+            </a:avLst>
           </a:prstGeom>
           <a:solidFill>
-            <a:srgbClr val="F5670F"/>
+            <a:srgbClr val="C9A227"/>
           </a:solidFill>
           <a:ln>
             <a:noFill/>
@@ -7500,14 +7610,14 @@
       </p:sp>
       <p:sp>
         <p:nvSpPr>
-          <p:cNvPr id="4" name="TextBox 3"/>
+          <p:cNvPr id="5" name="TextBox 4"/>
           <p:cNvSpPr txBox="1"/>
           <p:nvPr/>
         </p:nvSpPr>
         <p:spPr>
           <a:xfrm>
-            <a:off x="700000" y="300000"/>
-            <a:ext cx="10792000" cy="700000"/>
+            <a:off x="475488" y="475488"/>
+            <a:ext cx="1881187" cy="310896"/>
           </a:xfrm>
           <a:prstGeom prst="rect">
             <a:avLst/>
@@ -7515,47 +7625,83 @@
           <a:noFill/>
         </p:spPr>
         <p:txBody>
-          <a:bodyPr wrap="square" anchor="t">
+          <a:bodyPr wrap="square" anchor="ctr" lIns="0" rIns="0" tIns="0" bIns="0">
             <a:spAutoFit/>
           </a:bodyPr>
           <a:lstStyle/>
           <a:p>
+            <a:pPr algn="ctr">
+              <a:lnSpc>
+                <a:spcPct val="114000"/>
+              </a:lnSpc>
+            </a:pPr>
+            <a:r>
+              <a:rPr sz="1050" b="1">
+                <a:solidFill>
+                  <a:srgbClr val="FFFFFF"/>
+                </a:solidFill>
+              </a:rPr>
+              <a:t>REAL RUN · 四档逐字实测</a:t>
+            </a:r>
+          </a:p>
+        </p:txBody>
+      </p:sp>
+      <p:sp>
+        <p:nvSpPr>
+          <p:cNvPr id="6" name="TextBox 5"/>
+          <p:cNvSpPr txBox="1"/>
+          <p:nvPr/>
+        </p:nvSpPr>
+        <p:spPr>
+          <a:xfrm>
+            <a:off x="475488" y="859536"/>
+            <a:ext cx="11237976" cy="502920"/>
+          </a:xfrm>
+          <a:prstGeom prst="rect">
+            <a:avLst/>
+          </a:prstGeom>
+          <a:noFill/>
+        </p:spPr>
+        <p:txBody>
+          <a:bodyPr wrap="square" anchor="t" lIns="0" rIns="0" tIns="0" bIns="0">
+            <a:spAutoFit/>
+          </a:bodyPr>
+          <a:lstStyle/>
+          <a:p>
             <a:pPr algn="l">
               <a:lnSpc>
-                <a:spcPct val="110000"/>
+                <a:spcPct val="114000"/>
               </a:lnSpc>
-              <a:spcAft>
-                <a:spcPts val="600"/>
-              </a:spcAft>
             </a:pPr>
             <a:r>
-              <a:rPr sz="2400" b="1">
-                <a:solidFill>
-                  <a:srgbClr val="FFFFFF"/>
-                </a:solidFill>
-                <a:latin typeface="微软雅黑"/>
+              <a:rPr sz="2200" b="1">
+                <a:solidFill>
+                  <a:srgbClr val="1B2B28"/>
+                </a:solidFill>
               </a:rPr>
-              <a:t>总结评价与课后任务</a:t>
-            </a:r>
-          </a:p>
-        </p:txBody>
-      </p:sp>
-      <p:sp>
-        <p:nvSpPr>
-          <p:cNvPr id="5" name="Rectangle 4"/>
+              <a:t>P3.1/P3.2 p33_kpi_cockpit：本次 D/C/B/A 四档实测</a:t>
+            </a:r>
+          </a:p>
+        </p:txBody>
+      </p:sp>
+      <p:sp>
+        <p:nvSpPr>
+          <p:cNvPr id="7" name="Rounded Rectangle 6"/>
           <p:cNvSpPr/>
           <p:nvPr/>
         </p:nvSpPr>
         <p:spPr>
           <a:xfrm>
-            <a:off x="800000" y="1950000"/>
-            <a:ext cx="10600000" cy="1500000"/>
-          </a:xfrm>
-          <a:prstGeom prst="rect">
-            <a:avLst/>
+            <a:off x="475488" y="1389888"/>
+            <a:ext cx="1234440" cy="27432"/>
+          </a:xfrm>
+          <a:prstGeom prst="roundRect">
+            <a:avLst>
+              <a:gd name="adj" fmla="val 50000"/>
+            </a:avLst>
           </a:prstGeom>
           <a:solidFill>
-            <a:srgbClr val="F3F6FD"/>
+            <a:srgbClr val="C9A227"/>
           </a:solidFill>
           <a:ln>
             <a:noFill/>
@@ -7586,285 +7732,22 @@
       </p:sp>
       <p:sp>
         <p:nvSpPr>
-          <p:cNvPr id="6" name="TextBox 5"/>
-          <p:cNvSpPr txBox="1"/>
-          <p:nvPr/>
-        </p:nvSpPr>
-        <p:spPr>
-          <a:xfrm>
-            <a:off x="1000000" y="2050000"/>
-            <a:ext cx="10300000" cy="1400000"/>
-          </a:xfrm>
-          <a:prstGeom prst="rect">
-            <a:avLst/>
-          </a:prstGeom>
-          <a:noFill/>
-        </p:spPr>
-        <p:txBody>
-          <a:bodyPr wrap="square" anchor="t">
-            <a:spAutoFit/>
-          </a:bodyPr>
-          <a:lstStyle/>
-          <a:p>
-            <a:pPr algn="l">
-              <a:lnSpc>
-                <a:spcPct val="110000"/>
-              </a:lnSpc>
-              <a:spcAft>
-                <a:spcPts val="600"/>
-              </a:spcAft>
-            </a:pPr>
-            <a:r>
-              <a:rPr sz="1500" b="1">
-                <a:solidFill>
-                  <a:srgbClr val="0545E8"/>
-                </a:solidFill>
-                <a:latin typeface="微软雅黑"/>
-              </a:rPr>
-              <a:t>评价（10分钟）：</a:t>
-            </a:r>
-          </a:p>
-          <a:p>
-            <a:pPr algn="l">
-              <a:lnSpc>
-                <a:spcPct val="110000"/>
-              </a:lnSpc>
-              <a:spcAft>
-                <a:spcPts val="600"/>
-              </a:spcAft>
-            </a:pPr>
-            <a:r>
-              <a:rPr sz="1400" b="0">
-                <a:solidFill>
-                  <a:srgbClr val="010328"/>
-                </a:solidFill>
-                <a:latin typeface="微软雅黑"/>
-              </a:rPr>
-              <a:t>按D/C/B/A量表当堂评分；工单24小时内反馈评语与改进建议。</a:t>
-            </a:r>
-          </a:p>
-        </p:txBody>
-      </p:sp>
-      <p:sp>
-        <p:nvSpPr>
-          <p:cNvPr id="7" name="TextBox 6"/>
-          <p:cNvSpPr txBox="1"/>
-          <p:nvPr/>
-        </p:nvSpPr>
-        <p:spPr>
-          <a:xfrm>
-            <a:off x="850000" y="3700000"/>
-            <a:ext cx="10600000" cy="700000"/>
-          </a:xfrm>
-          <a:prstGeom prst="rect">
-            <a:avLst/>
-          </a:prstGeom>
-          <a:noFill/>
-        </p:spPr>
-        <p:txBody>
-          <a:bodyPr wrap="square" anchor="t">
-            <a:spAutoFit/>
-          </a:bodyPr>
-          <a:lstStyle/>
-          <a:p>
-            <a:pPr algn="l">
-              <a:lnSpc>
-                <a:spcPct val="120000"/>
-              </a:lnSpc>
-              <a:spcAft>
-                <a:spcPts val="600"/>
-              </a:spcAft>
-            </a:pPr>
-            <a:r>
-              <a:rPr sz="1400" b="1">
-                <a:solidFill>
-                  <a:srgbClr val="F5670F"/>
-                </a:solidFill>
-                <a:latin typeface="微软雅黑"/>
-              </a:rPr>
-              <a:t>1. </a:t>
-            </a:r>
-            <a:r>
-              <a:rPr sz="1400" b="0">
-                <a:solidFill>
-                  <a:srgbClr val="010328"/>
-                </a:solidFill>
-                <a:latin typeface="微软雅黑"/>
-              </a:rPr>
-              <a:t>1. 完成工单P3.1《产线KPI实时仪表盘》：及格标准5个KPI+时间筛选可用；优秀标准≥7指标+钻取交互+加载&lt;2秒；</a:t>
-            </a:r>
-          </a:p>
-        </p:txBody>
-      </p:sp>
-      <p:sp>
-        <p:nvSpPr>
-          <p:cNvPr id="8" name="TextBox 7"/>
-          <p:cNvSpPr txBox="1"/>
-          <p:nvPr/>
-        </p:nvSpPr>
-        <p:spPr>
-          <a:xfrm>
-            <a:off x="850000" y="4420000"/>
-            <a:ext cx="10600000" cy="700000"/>
-          </a:xfrm>
-          <a:prstGeom prst="rect">
-            <a:avLst/>
-          </a:prstGeom>
-          <a:noFill/>
-        </p:spPr>
-        <p:txBody>
-          <a:bodyPr wrap="square" anchor="t">
-            <a:spAutoFit/>
-          </a:bodyPr>
-          <a:lstStyle/>
-          <a:p>
-            <a:pPr algn="l">
-              <a:lnSpc>
-                <a:spcPct val="120000"/>
-              </a:lnSpc>
-              <a:spcAft>
-                <a:spcPts val="600"/>
-              </a:spcAft>
-            </a:pPr>
-            <a:r>
-              <a:rPr sz="1400" b="1">
-                <a:solidFill>
-                  <a:srgbClr val="F5670F"/>
-                </a:solidFill>
-                <a:latin typeface="微软雅黑"/>
-              </a:rPr>
-              <a:t>2. </a:t>
-            </a:r>
-            <a:r>
-              <a:rPr sz="1400" b="0">
-                <a:solidFill>
-                  <a:srgbClr val="010328"/>
-                </a:solidFill>
-                <a:latin typeface="微软雅黑"/>
-              </a:rPr>
-              <a:t>2. 完成工单P3.2《每日生产分析报告系统》：及格标准四部分完整+PDF正确；优秀标准异常自动识别+&lt;1分钟+美观度≥4/5；</a:t>
-            </a:r>
-          </a:p>
-        </p:txBody>
-      </p:sp>
-      <p:sp>
-        <p:nvSpPr>
-          <p:cNvPr id="9" name="TextBox 8"/>
-          <p:cNvSpPr txBox="1"/>
-          <p:nvPr/>
-        </p:nvSpPr>
-        <p:spPr>
-          <a:xfrm>
-            <a:off x="850000" y="5140000"/>
-            <a:ext cx="10600000" cy="700000"/>
-          </a:xfrm>
-          <a:prstGeom prst="rect">
-            <a:avLst/>
-          </a:prstGeom>
-          <a:noFill/>
-        </p:spPr>
-        <p:txBody>
-          <a:bodyPr wrap="square" anchor="t">
-            <a:spAutoFit/>
-          </a:bodyPr>
-          <a:lstStyle/>
-          <a:p>
-            <a:pPr algn="l">
-              <a:lnSpc>
-                <a:spcPct val="120000"/>
-              </a:lnSpc>
-              <a:spcAft>
-                <a:spcPts val="600"/>
-              </a:spcAft>
-            </a:pPr>
-            <a:r>
-              <a:rPr sz="1400" b="1">
-                <a:solidFill>
-                  <a:srgbClr val="F5670F"/>
-                </a:solidFill>
-                <a:latin typeface="微软雅黑"/>
-              </a:rPr>
-              <a:t>3. </a:t>
-            </a:r>
-            <a:r>
-              <a:rPr sz="1400" b="0">
-                <a:solidFill>
-                  <a:srgbClr val="010328"/>
-                </a:solidFill>
-                <a:latin typeface="微软雅黑"/>
-              </a:rPr>
-              <a:t>3. 预习TCP/IP与MQTT协议基础。</a:t>
-            </a:r>
-          </a:p>
-        </p:txBody>
-      </p:sp>
-      <p:sp>
-        <p:nvSpPr>
-          <p:cNvPr id="10" name="TextBox 9"/>
-          <p:cNvSpPr txBox="1"/>
-          <p:nvPr/>
-        </p:nvSpPr>
-        <p:spPr>
-          <a:xfrm>
-            <a:off x="850000" y="5960000"/>
-            <a:ext cx="10600000" cy="500000"/>
-          </a:xfrm>
-          <a:prstGeom prst="rect">
-            <a:avLst/>
-          </a:prstGeom>
-          <a:noFill/>
-        </p:spPr>
-        <p:txBody>
-          <a:bodyPr wrap="square" anchor="t">
-            <a:spAutoFit/>
-          </a:bodyPr>
-          <a:lstStyle/>
-          <a:p>
-            <a:pPr algn="l">
-              <a:lnSpc>
-                <a:spcPct val="110000"/>
-              </a:lnSpc>
-              <a:spcAft>
-                <a:spcPts val="600"/>
-              </a:spcAft>
-            </a:pPr>
-            <a:r>
-              <a:rPr sz="1300" b="1">
-                <a:solidFill>
-                  <a:srgbClr val="0475B6"/>
-                </a:solidFill>
-                <a:latin typeface="微软雅黑"/>
-              </a:rPr>
-              <a:t>下次课预告：</a:t>
-            </a:r>
-            <a:r>
-              <a:rPr sz="1300" b="0">
-                <a:solidFill>
-                  <a:srgbClr val="44546A"/>
-                </a:solidFill>
-                <a:latin typeface="微软雅黑"/>
-              </a:rPr>
-              <a:t>见下次课工单任务书</a:t>
-            </a:r>
-          </a:p>
-        </p:txBody>
-      </p:sp>
-      <p:sp>
-        <p:nvSpPr>
-          <p:cNvPr id="11" name="Rectangle 10"/>
+          <p:cNvPr id="8" name="Rounded Rectangle 7"/>
           <p:cNvSpPr/>
           <p:nvPr/>
         </p:nvSpPr>
         <p:spPr>
           <a:xfrm>
-            <a:off x="500000" y="6500000"/>
-            <a:ext cx="11100000" cy="20000"/>
-          </a:xfrm>
-          <a:prstGeom prst="rect">
-            <a:avLst/>
+            <a:off x="475488" y="6419088"/>
+            <a:ext cx="11237976" cy="10972"/>
+          </a:xfrm>
+          <a:prstGeom prst="roundRect">
+            <a:avLst>
+              <a:gd name="adj" fmla="val 50000"/>
+            </a:avLst>
           </a:prstGeom>
           <a:solidFill>
-            <a:srgbClr val="C9D4EE"/>
+            <a:srgbClr val="E4F1EE"/>
           </a:solidFill>
           <a:ln>
             <a:noFill/>
@@ -7895,14 +7778,14 @@
       </p:sp>
       <p:sp>
         <p:nvSpPr>
-          <p:cNvPr id="12" name="TextBox 11"/>
+          <p:cNvPr id="9" name="TextBox 8"/>
           <p:cNvSpPr txBox="1"/>
           <p:nvPr/>
         </p:nvSpPr>
         <p:spPr>
           <a:xfrm>
-            <a:off x="500000" y="6540000"/>
-            <a:ext cx="7000000" cy="300000"/>
+            <a:off x="475488" y="6455664"/>
+            <a:ext cx="7315200" cy="292608"/>
           </a:xfrm>
           <a:prstGeom prst="rect">
             <a:avLst/>
@@ -7910,25 +7793,21 @@
           <a:noFill/>
         </p:spPr>
         <p:txBody>
-          <a:bodyPr wrap="square" anchor="t">
+          <a:bodyPr wrap="square" anchor="t" lIns="0" rIns="0" tIns="0" bIns="0">
             <a:spAutoFit/>
           </a:bodyPr>
           <a:lstStyle/>
           <a:p>
             <a:pPr algn="l">
               <a:lnSpc>
-                <a:spcPct val="110000"/>
+                <a:spcPct val="114000"/>
               </a:lnSpc>
-              <a:spcAft>
-                <a:spcPts val="600"/>
-              </a:spcAft>
             </a:pPr>
             <a:r>
-              <a:rPr sz="1000" b="0">
-                <a:solidFill>
-                  <a:srgbClr val="8A97B5"/>
-                </a:solidFill>
-                <a:latin typeface="微软雅黑"/>
+              <a:rPr sz="900" b="0">
+                <a:solidFill>
+                  <a:srgbClr val="5C6E6A"/>
+                </a:solidFill>
               </a:rPr>
               <a:t>两江智造集团 · Python程序设计（项目实战）</a:t>
             </a:r>
@@ -7937,14 +7816,14 @@
       </p:sp>
       <p:sp>
         <p:nvSpPr>
-          <p:cNvPr id="13" name="TextBox 12"/>
+          <p:cNvPr id="10" name="TextBox 9"/>
           <p:cNvSpPr txBox="1"/>
           <p:nvPr/>
         </p:nvSpPr>
         <p:spPr>
           <a:xfrm>
-            <a:off x="10600000" y="6540000"/>
-            <a:ext cx="1000000" cy="300000"/>
+            <a:off x="10597896" y="6537960"/>
+            <a:ext cx="996696" cy="301752"/>
           </a:xfrm>
           <a:prstGeom prst="rect">
             <a:avLst/>
@@ -7952,27 +7831,1599 @@
           <a:noFill/>
         </p:spPr>
         <p:txBody>
-          <a:bodyPr wrap="square" anchor="t">
+          <a:bodyPr wrap="square" anchor="t" lIns="0" rIns="0" tIns="0" bIns="0">
             <a:spAutoFit/>
           </a:bodyPr>
           <a:lstStyle/>
           <a:p>
             <a:pPr algn="r">
               <a:lnSpc>
-                <a:spcPct val="110000"/>
+                <a:spcPct val="114000"/>
               </a:lnSpc>
-              <a:spcAft>
-                <a:spcPts val="600"/>
-              </a:spcAft>
             </a:pPr>
             <a:r>
               <a:rPr sz="1000" b="0">
                 <a:solidFill>
                   <a:srgbClr val="8A97B5"/>
                 </a:solidFill>
-                <a:latin typeface="微软雅黑"/>
               </a:rPr>
-              <a:t>8 / 10</a:t>
+              <a:t>5 / 10</a:t>
+            </a:r>
+          </a:p>
+        </p:txBody>
+      </p:sp>
+      <p:sp>
+        <p:nvSpPr>
+          <p:cNvPr id="11" name="Rounded Rectangle 10"/>
+          <p:cNvSpPr/>
+          <p:nvPr/>
+        </p:nvSpPr>
+        <p:spPr>
+          <a:xfrm>
+            <a:off x="475488" y="1554480"/>
+            <a:ext cx="11237976" cy="825497"/>
+          </a:xfrm>
+          <a:prstGeom prst="roundRect">
+            <a:avLst>
+              <a:gd name="adj" fmla="val 6000"/>
+            </a:avLst>
+          </a:prstGeom>
+          <a:solidFill>
+            <a:srgbClr val="FFFFFF"/>
+          </a:solidFill>
+          <a:ln w="9525">
+            <a:solidFill>
+              <a:srgbClr val="E4F1EE"/>
+            </a:solidFill>
+          </a:ln>
+          <a:effectLst/>
+        </p:spPr>
+        <p:style>
+          <a:lnRef idx="1">
+            <a:schemeClr val="accent1"/>
+          </a:lnRef>
+          <a:fillRef idx="3">
+            <a:schemeClr val="accent1"/>
+          </a:fillRef>
+          <a:effectRef idx="2">
+            <a:schemeClr val="accent1"/>
+          </a:effectRef>
+          <a:fontRef idx="minor">
+            <a:schemeClr val="lt1"/>
+          </a:fontRef>
+        </p:style>
+        <p:txBody>
+          <a:bodyPr rtlCol="0" anchor="ctr"/>
+          <a:lstStyle/>
+          <a:p>
+            <a:pPr algn="ctr"/>
+          </a:p>
+        </p:txBody>
+      </p:sp>
+      <p:sp>
+        <p:nvSpPr>
+          <p:cNvPr id="12" name="Rounded Rectangle 11"/>
+          <p:cNvSpPr/>
+          <p:nvPr/>
+        </p:nvSpPr>
+        <p:spPr>
+          <a:xfrm>
+            <a:off x="475488" y="1554480"/>
+            <a:ext cx="54864" cy="825497"/>
+          </a:xfrm>
+          <a:prstGeom prst="roundRect">
+            <a:avLst>
+              <a:gd name="adj" fmla="val 50000"/>
+            </a:avLst>
+          </a:prstGeom>
+          <a:solidFill>
+            <a:srgbClr val="5C6E6A"/>
+          </a:solidFill>
+          <a:ln>
+            <a:noFill/>
+          </a:ln>
+          <a:effectLst/>
+        </p:spPr>
+        <p:style>
+          <a:lnRef idx="1">
+            <a:schemeClr val="accent1"/>
+          </a:lnRef>
+          <a:fillRef idx="3">
+            <a:schemeClr val="accent1"/>
+          </a:fillRef>
+          <a:effectRef idx="2">
+            <a:schemeClr val="accent1"/>
+          </a:effectRef>
+          <a:fontRef idx="minor">
+            <a:schemeClr val="lt1"/>
+          </a:fontRef>
+        </p:style>
+        <p:txBody>
+          <a:bodyPr rtlCol="0" anchor="ctr"/>
+          <a:lstStyle/>
+          <a:p>
+            <a:pPr algn="ctr"/>
+          </a:p>
+        </p:txBody>
+      </p:sp>
+      <p:sp>
+        <p:nvSpPr>
+          <p:cNvPr id="13" name="Rounded Rectangle 12"/>
+          <p:cNvSpPr/>
+          <p:nvPr/>
+        </p:nvSpPr>
+        <p:spPr>
+          <a:xfrm>
+            <a:off x="621792" y="1636776"/>
+            <a:ext cx="237744" cy="237744"/>
+          </a:xfrm>
+          <a:prstGeom prst="roundRect">
+            <a:avLst>
+              <a:gd name="adj" fmla="val 28000"/>
+            </a:avLst>
+          </a:prstGeom>
+          <a:solidFill>
+            <a:srgbClr val="5C6E6A"/>
+          </a:solidFill>
+          <a:ln>
+            <a:noFill/>
+          </a:ln>
+          <a:effectLst/>
+        </p:spPr>
+        <p:style>
+          <a:lnRef idx="1">
+            <a:schemeClr val="accent1"/>
+          </a:lnRef>
+          <a:fillRef idx="3">
+            <a:schemeClr val="accent1"/>
+          </a:fillRef>
+          <a:effectRef idx="2">
+            <a:schemeClr val="accent1"/>
+          </a:effectRef>
+          <a:fontRef idx="minor">
+            <a:schemeClr val="lt1"/>
+          </a:fontRef>
+        </p:style>
+        <p:txBody>
+          <a:bodyPr rtlCol="0" anchor="ctr"/>
+          <a:lstStyle/>
+          <a:p>
+            <a:pPr algn="ctr"/>
+          </a:p>
+        </p:txBody>
+      </p:sp>
+      <p:sp>
+        <p:nvSpPr>
+          <p:cNvPr id="14" name="TextBox 13"/>
+          <p:cNvSpPr txBox="1"/>
+          <p:nvPr/>
+        </p:nvSpPr>
+        <p:spPr>
+          <a:xfrm>
+            <a:off x="621792" y="1636776"/>
+            <a:ext cx="237744" cy="237744"/>
+          </a:xfrm>
+          <a:prstGeom prst="rect">
+            <a:avLst/>
+          </a:prstGeom>
+          <a:noFill/>
+        </p:spPr>
+        <p:txBody>
+          <a:bodyPr wrap="square" anchor="ctr" lIns="0" rIns="0" tIns="0" bIns="0">
+            <a:spAutoFit/>
+          </a:bodyPr>
+          <a:lstStyle/>
+          <a:p>
+            <a:pPr algn="ctr">
+              <a:lnSpc>
+                <a:spcPct val="114000"/>
+              </a:lnSpc>
+            </a:pPr>
+            <a:r>
+              <a:rPr sz="1000" b="1">
+                <a:solidFill>
+                  <a:srgbClr val="FFFFFF"/>
+                </a:solidFill>
+              </a:rPr>
+              <a:t>D</a:t>
+            </a:r>
+          </a:p>
+        </p:txBody>
+      </p:sp>
+      <p:sp>
+        <p:nvSpPr>
+          <p:cNvPr id="15" name="TextBox 14"/>
+          <p:cNvSpPr txBox="1"/>
+          <p:nvPr/>
+        </p:nvSpPr>
+        <p:spPr>
+          <a:xfrm>
+            <a:off x="932688" y="1618488"/>
+            <a:ext cx="8778240" cy="274320"/>
+          </a:xfrm>
+          <a:prstGeom prst="rect">
+            <a:avLst/>
+          </a:prstGeom>
+          <a:noFill/>
+        </p:spPr>
+        <p:txBody>
+          <a:bodyPr wrap="square" anchor="ctr" lIns="0" rIns="0" tIns="0" bIns="0">
+            <a:spAutoFit/>
+          </a:bodyPr>
+          <a:lstStyle/>
+          <a:p>
+            <a:pPr algn="l">
+              <a:lnSpc>
+                <a:spcPct val="114000"/>
+              </a:lnSpc>
+            </a:pPr>
+            <a:r>
+              <a:rPr sz="1050" b="1">
+                <a:solidFill>
+                  <a:srgbClr val="1B2B28"/>
+                </a:solidFill>
+              </a:rPr>
+              <a:t>及格</a:t>
+            </a:r>
+            <a:r>
+              <a:rPr sz="850" b="0">
+                <a:solidFill>
+                  <a:srgbClr val="5C6E6A"/>
+                </a:solidFill>
+              </a:rPr>
+              <a:t>   验收口径：</a:t>
+            </a:r>
+            <a:r>
+              <a:rPr sz="850" b="0">
+                <a:solidFill>
+                  <a:srgbClr val="5C6E6A"/>
+                </a:solidFill>
+              </a:rPr>
+              <a:t>KPI可用+时间筛选；日报四部分完整+PDF正确</a:t>
+            </a:r>
+          </a:p>
+        </p:txBody>
+      </p:sp>
+      <p:sp>
+        <p:nvSpPr>
+          <p:cNvPr id="16" name="Rounded Rectangle 15"/>
+          <p:cNvSpPr/>
+          <p:nvPr/>
+        </p:nvSpPr>
+        <p:spPr>
+          <a:xfrm>
+            <a:off x="11131803" y="1645920"/>
+            <a:ext cx="453644" cy="237744"/>
+          </a:xfrm>
+          <a:prstGeom prst="roundRect">
+            <a:avLst>
+              <a:gd name="adj" fmla="val 50000"/>
+            </a:avLst>
+          </a:prstGeom>
+          <a:solidFill>
+            <a:srgbClr val="0B5E54"/>
+          </a:solidFill>
+          <a:ln>
+            <a:noFill/>
+          </a:ln>
+          <a:effectLst/>
+        </p:spPr>
+        <p:style>
+          <a:lnRef idx="1">
+            <a:schemeClr val="accent1"/>
+          </a:lnRef>
+          <a:fillRef idx="3">
+            <a:schemeClr val="accent1"/>
+          </a:fillRef>
+          <a:effectRef idx="2">
+            <a:schemeClr val="accent1"/>
+          </a:effectRef>
+          <a:fontRef idx="minor">
+            <a:schemeClr val="lt1"/>
+          </a:fontRef>
+        </p:style>
+        <p:txBody>
+          <a:bodyPr rtlCol="0" anchor="ctr"/>
+          <a:lstStyle/>
+          <a:p>
+            <a:pPr algn="ctr"/>
+          </a:p>
+        </p:txBody>
+      </p:sp>
+      <p:sp>
+        <p:nvSpPr>
+          <p:cNvPr id="17" name="TextBox 16"/>
+          <p:cNvSpPr txBox="1"/>
+          <p:nvPr/>
+        </p:nvSpPr>
+        <p:spPr>
+          <a:xfrm>
+            <a:off x="11131803" y="1645920"/>
+            <a:ext cx="453644" cy="237744"/>
+          </a:xfrm>
+          <a:prstGeom prst="rect">
+            <a:avLst/>
+          </a:prstGeom>
+          <a:noFill/>
+        </p:spPr>
+        <p:txBody>
+          <a:bodyPr wrap="square" anchor="ctr" lIns="0" rIns="0" tIns="0" bIns="0">
+            <a:spAutoFit/>
+          </a:bodyPr>
+          <a:lstStyle/>
+          <a:p>
+            <a:pPr algn="ctr">
+              <a:lnSpc>
+                <a:spcPct val="114000"/>
+              </a:lnSpc>
+            </a:pPr>
+            <a:r>
+              <a:rPr sz="850" b="1">
+                <a:solidFill>
+                  <a:srgbClr val="FFFFFF"/>
+                </a:solidFill>
+              </a:rPr>
+              <a:t>达标</a:t>
+            </a:r>
+          </a:p>
+        </p:txBody>
+      </p:sp>
+      <p:sp>
+        <p:nvSpPr>
+          <p:cNvPr id="18" name="TextBox 17"/>
+          <p:cNvSpPr txBox="1"/>
+          <p:nvPr/>
+        </p:nvSpPr>
+        <p:spPr>
+          <a:xfrm>
+            <a:off x="932688" y="1901952"/>
+            <a:ext cx="10671047" cy="423161"/>
+          </a:xfrm>
+          <a:prstGeom prst="rect">
+            <a:avLst/>
+          </a:prstGeom>
+          <a:noFill/>
+        </p:spPr>
+        <p:txBody>
+          <a:bodyPr wrap="square" anchor="t" lIns="0" rIns="0" tIns="0" bIns="0">
+            <a:spAutoFit/>
+          </a:bodyPr>
+          <a:lstStyle/>
+          <a:p>
+            <a:pPr algn="l">
+              <a:lnSpc>
+                <a:spcPct val="114000"/>
+              </a:lnSpc>
+            </a:pPr>
+            <a:r>
+              <a:rPr sz="950" b="0">
+                <a:solidFill>
+                  <a:srgbClr val="1B2B28"/>
+                </a:solidFill>
+              </a:rPr>
+              <a:t>必做 KPI 5/5 全有值；时间筛选：同一 core.filter_records 缩到单日 2026-03-01 命中 47 行（全量 1186）；四段 生产概览 / 详细分析 / 异常识别 / 数据附表 全部见于 daily_report.html；PDF daily_report.pdf 校验通过：42190 B / 4 页，%PDF- 头与 %%EOF 尾齐</a:t>
+            </a:r>
+          </a:p>
+        </p:txBody>
+      </p:sp>
+      <p:sp>
+        <p:nvSpPr>
+          <p:cNvPr id="19" name="Rounded Rectangle 18"/>
+          <p:cNvSpPr/>
+          <p:nvPr/>
+        </p:nvSpPr>
+        <p:spPr>
+          <a:xfrm>
+            <a:off x="475488" y="2443985"/>
+            <a:ext cx="11237976" cy="1007874"/>
+          </a:xfrm>
+          <a:prstGeom prst="roundRect">
+            <a:avLst>
+              <a:gd name="adj" fmla="val 6000"/>
+            </a:avLst>
+          </a:prstGeom>
+          <a:solidFill>
+            <a:srgbClr val="FFFFFF"/>
+          </a:solidFill>
+          <a:ln w="9525">
+            <a:solidFill>
+              <a:srgbClr val="E4F1EE"/>
+            </a:solidFill>
+          </a:ln>
+          <a:effectLst/>
+        </p:spPr>
+        <p:style>
+          <a:lnRef idx="1">
+            <a:schemeClr val="accent1"/>
+          </a:lnRef>
+          <a:fillRef idx="3">
+            <a:schemeClr val="accent1"/>
+          </a:fillRef>
+          <a:effectRef idx="2">
+            <a:schemeClr val="accent1"/>
+          </a:effectRef>
+          <a:fontRef idx="minor">
+            <a:schemeClr val="lt1"/>
+          </a:fontRef>
+        </p:style>
+        <p:txBody>
+          <a:bodyPr rtlCol="0" anchor="ctr"/>
+          <a:lstStyle/>
+          <a:p>
+            <a:pPr algn="ctr"/>
+          </a:p>
+        </p:txBody>
+      </p:sp>
+      <p:sp>
+        <p:nvSpPr>
+          <p:cNvPr id="20" name="Rounded Rectangle 19"/>
+          <p:cNvSpPr/>
+          <p:nvPr/>
+        </p:nvSpPr>
+        <p:spPr>
+          <a:xfrm>
+            <a:off x="475488" y="2443985"/>
+            <a:ext cx="54864" cy="1007874"/>
+          </a:xfrm>
+          <a:prstGeom prst="roundRect">
+            <a:avLst>
+              <a:gd name="adj" fmla="val 50000"/>
+            </a:avLst>
+          </a:prstGeom>
+          <a:solidFill>
+            <a:srgbClr val="157A6D"/>
+          </a:solidFill>
+          <a:ln>
+            <a:noFill/>
+          </a:ln>
+          <a:effectLst/>
+        </p:spPr>
+        <p:style>
+          <a:lnRef idx="1">
+            <a:schemeClr val="accent1"/>
+          </a:lnRef>
+          <a:fillRef idx="3">
+            <a:schemeClr val="accent1"/>
+          </a:fillRef>
+          <a:effectRef idx="2">
+            <a:schemeClr val="accent1"/>
+          </a:effectRef>
+          <a:fontRef idx="minor">
+            <a:schemeClr val="lt1"/>
+          </a:fontRef>
+        </p:style>
+        <p:txBody>
+          <a:bodyPr rtlCol="0" anchor="ctr"/>
+          <a:lstStyle/>
+          <a:p>
+            <a:pPr algn="ctr"/>
+          </a:p>
+        </p:txBody>
+      </p:sp>
+      <p:sp>
+        <p:nvSpPr>
+          <p:cNvPr id="21" name="Rounded Rectangle 20"/>
+          <p:cNvSpPr/>
+          <p:nvPr/>
+        </p:nvSpPr>
+        <p:spPr>
+          <a:xfrm>
+            <a:off x="621792" y="2526281"/>
+            <a:ext cx="237744" cy="237744"/>
+          </a:xfrm>
+          <a:prstGeom prst="roundRect">
+            <a:avLst>
+              <a:gd name="adj" fmla="val 28000"/>
+            </a:avLst>
+          </a:prstGeom>
+          <a:solidFill>
+            <a:srgbClr val="157A6D"/>
+          </a:solidFill>
+          <a:ln>
+            <a:noFill/>
+          </a:ln>
+          <a:effectLst/>
+        </p:spPr>
+        <p:style>
+          <a:lnRef idx="1">
+            <a:schemeClr val="accent1"/>
+          </a:lnRef>
+          <a:fillRef idx="3">
+            <a:schemeClr val="accent1"/>
+          </a:fillRef>
+          <a:effectRef idx="2">
+            <a:schemeClr val="accent1"/>
+          </a:effectRef>
+          <a:fontRef idx="minor">
+            <a:schemeClr val="lt1"/>
+          </a:fontRef>
+        </p:style>
+        <p:txBody>
+          <a:bodyPr rtlCol="0" anchor="ctr"/>
+          <a:lstStyle/>
+          <a:p>
+            <a:pPr algn="ctr"/>
+          </a:p>
+        </p:txBody>
+      </p:sp>
+      <p:sp>
+        <p:nvSpPr>
+          <p:cNvPr id="22" name="TextBox 21"/>
+          <p:cNvSpPr txBox="1"/>
+          <p:nvPr/>
+        </p:nvSpPr>
+        <p:spPr>
+          <a:xfrm>
+            <a:off x="621792" y="2526281"/>
+            <a:ext cx="237744" cy="237744"/>
+          </a:xfrm>
+          <a:prstGeom prst="rect">
+            <a:avLst/>
+          </a:prstGeom>
+          <a:noFill/>
+        </p:spPr>
+        <p:txBody>
+          <a:bodyPr wrap="square" anchor="ctr" lIns="0" rIns="0" tIns="0" bIns="0">
+            <a:spAutoFit/>
+          </a:bodyPr>
+          <a:lstStyle/>
+          <a:p>
+            <a:pPr algn="ctr">
+              <a:lnSpc>
+                <a:spcPct val="114000"/>
+              </a:lnSpc>
+            </a:pPr>
+            <a:r>
+              <a:rPr sz="1000" b="1">
+                <a:solidFill>
+                  <a:srgbClr val="FFFFFF"/>
+                </a:solidFill>
+              </a:rPr>
+              <a:t>C</a:t>
+            </a:r>
+          </a:p>
+        </p:txBody>
+      </p:sp>
+      <p:sp>
+        <p:nvSpPr>
+          <p:cNvPr id="23" name="TextBox 22"/>
+          <p:cNvSpPr txBox="1"/>
+          <p:nvPr/>
+        </p:nvSpPr>
+        <p:spPr>
+          <a:xfrm>
+            <a:off x="932688" y="2507993"/>
+            <a:ext cx="8778240" cy="274320"/>
+          </a:xfrm>
+          <a:prstGeom prst="rect">
+            <a:avLst/>
+          </a:prstGeom>
+          <a:noFill/>
+        </p:spPr>
+        <p:txBody>
+          <a:bodyPr wrap="square" anchor="ctr" lIns="0" rIns="0" tIns="0" bIns="0">
+            <a:spAutoFit/>
+          </a:bodyPr>
+          <a:lstStyle/>
+          <a:p>
+            <a:pPr algn="l">
+              <a:lnSpc>
+                <a:spcPct val="114000"/>
+              </a:lnSpc>
+            </a:pPr>
+            <a:r>
+              <a:rPr sz="1050" b="1">
+                <a:solidFill>
+                  <a:srgbClr val="1B2B28"/>
+                </a:solidFill>
+              </a:rPr>
+              <a:t>良好</a:t>
+            </a:r>
+            <a:r>
+              <a:rPr sz="850" b="0">
+                <a:solidFill>
+                  <a:srgbClr val="5C6E6A"/>
+                </a:solidFill>
+              </a:rPr>
+              <a:t>   验收口径：</a:t>
+            </a:r>
+            <a:r>
+              <a:rPr sz="850" b="0">
+                <a:solidFill>
+                  <a:srgbClr val="5C6E6A"/>
+                </a:solidFill>
+              </a:rPr>
+              <a:t>联动筛选流畅；日报生成&lt;2分钟</a:t>
+            </a:r>
+          </a:p>
+        </p:txBody>
+      </p:sp>
+      <p:sp>
+        <p:nvSpPr>
+          <p:cNvPr id="24" name="Rounded Rectangle 23"/>
+          <p:cNvSpPr/>
+          <p:nvPr/>
+        </p:nvSpPr>
+        <p:spPr>
+          <a:xfrm>
+            <a:off x="11131803" y="2535425"/>
+            <a:ext cx="453644" cy="237744"/>
+          </a:xfrm>
+          <a:prstGeom prst="roundRect">
+            <a:avLst>
+              <a:gd name="adj" fmla="val 50000"/>
+            </a:avLst>
+          </a:prstGeom>
+          <a:solidFill>
+            <a:srgbClr val="0B5E54"/>
+          </a:solidFill>
+          <a:ln>
+            <a:noFill/>
+          </a:ln>
+          <a:effectLst/>
+        </p:spPr>
+        <p:style>
+          <a:lnRef idx="1">
+            <a:schemeClr val="accent1"/>
+          </a:lnRef>
+          <a:fillRef idx="3">
+            <a:schemeClr val="accent1"/>
+          </a:fillRef>
+          <a:effectRef idx="2">
+            <a:schemeClr val="accent1"/>
+          </a:effectRef>
+          <a:fontRef idx="minor">
+            <a:schemeClr val="lt1"/>
+          </a:fontRef>
+        </p:style>
+        <p:txBody>
+          <a:bodyPr rtlCol="0" anchor="ctr"/>
+          <a:lstStyle/>
+          <a:p>
+            <a:pPr algn="ctr"/>
+          </a:p>
+        </p:txBody>
+      </p:sp>
+      <p:sp>
+        <p:nvSpPr>
+          <p:cNvPr id="25" name="TextBox 24"/>
+          <p:cNvSpPr txBox="1"/>
+          <p:nvPr/>
+        </p:nvSpPr>
+        <p:spPr>
+          <a:xfrm>
+            <a:off x="11131803" y="2535425"/>
+            <a:ext cx="453644" cy="237744"/>
+          </a:xfrm>
+          <a:prstGeom prst="rect">
+            <a:avLst/>
+          </a:prstGeom>
+          <a:noFill/>
+        </p:spPr>
+        <p:txBody>
+          <a:bodyPr wrap="square" anchor="ctr" lIns="0" rIns="0" tIns="0" bIns="0">
+            <a:spAutoFit/>
+          </a:bodyPr>
+          <a:lstStyle/>
+          <a:p>
+            <a:pPr algn="ctr">
+              <a:lnSpc>
+                <a:spcPct val="114000"/>
+              </a:lnSpc>
+            </a:pPr>
+            <a:r>
+              <a:rPr sz="850" b="1">
+                <a:solidFill>
+                  <a:srgbClr val="FFFFFF"/>
+                </a:solidFill>
+              </a:rPr>
+              <a:t>达标</a:t>
+            </a:r>
+          </a:p>
+        </p:txBody>
+      </p:sp>
+      <p:sp>
+        <p:nvSpPr>
+          <p:cNvPr id="26" name="TextBox 25"/>
+          <p:cNvSpPr txBox="1"/>
+          <p:nvPr/>
+        </p:nvSpPr>
+        <p:spPr>
+          <a:xfrm>
+            <a:off x="932688" y="2791457"/>
+            <a:ext cx="10671047" cy="605538"/>
+          </a:xfrm>
+          <a:prstGeom prst="rect">
+            <a:avLst/>
+          </a:prstGeom>
+          <a:noFill/>
+        </p:spPr>
+        <p:txBody>
+          <a:bodyPr wrap="square" anchor="t" lIns="0" rIns="0" tIns="0" bIns="0">
+            <a:spAutoFit/>
+          </a:bodyPr>
+          <a:lstStyle/>
+          <a:p>
+            <a:pPr algn="l">
+              <a:lnSpc>
+                <a:spcPct val="114000"/>
+              </a:lnSpc>
+            </a:pPr>
+            <a:r>
+              <a:rPr sz="950" b="0">
+                <a:solidFill>
+                  <a:srgbClr val="1B2B28"/>
+                </a:solidFill>
+              </a:rPr>
+              <a:t>联动程序化验证（同一 core.filter_records）：单日命中 47/1186 行；仅选 DEV-01 命中 296 行、总产量 14939＜全量 60273（筛选真的驱动重算）；app.py on_select="rerun" 接线 2 处 → core.drill_rows 联动明细 30 行（回路非空）；AppTest 无头真执行 app.py 并断言切换单日后命中变小（tests/test_dashboard.py，非肉眼验收）；日报耗时档位 &lt;1s（预算 120s，判定行不含毫秒，精确秒数在 timing.txt/runtime/）</a:t>
+            </a:r>
+          </a:p>
+        </p:txBody>
+      </p:sp>
+      <p:sp>
+        <p:nvSpPr>
+          <p:cNvPr id="27" name="Rounded Rectangle 26"/>
+          <p:cNvSpPr/>
+          <p:nvPr/>
+        </p:nvSpPr>
+        <p:spPr>
+          <a:xfrm>
+            <a:off x="475488" y="3515868"/>
+            <a:ext cx="11237976" cy="825497"/>
+          </a:xfrm>
+          <a:prstGeom prst="roundRect">
+            <a:avLst>
+              <a:gd name="adj" fmla="val 6000"/>
+            </a:avLst>
+          </a:prstGeom>
+          <a:solidFill>
+            <a:srgbClr val="FFFFFF"/>
+          </a:solidFill>
+          <a:ln w="9525">
+            <a:solidFill>
+              <a:srgbClr val="E4F1EE"/>
+            </a:solidFill>
+          </a:ln>
+          <a:effectLst/>
+        </p:spPr>
+        <p:style>
+          <a:lnRef idx="1">
+            <a:schemeClr val="accent1"/>
+          </a:lnRef>
+          <a:fillRef idx="3">
+            <a:schemeClr val="accent1"/>
+          </a:fillRef>
+          <a:effectRef idx="2">
+            <a:schemeClr val="accent1"/>
+          </a:effectRef>
+          <a:fontRef idx="minor">
+            <a:schemeClr val="lt1"/>
+          </a:fontRef>
+        </p:style>
+        <p:txBody>
+          <a:bodyPr rtlCol="0" anchor="ctr"/>
+          <a:lstStyle/>
+          <a:p>
+            <a:pPr algn="ctr"/>
+          </a:p>
+        </p:txBody>
+      </p:sp>
+      <p:sp>
+        <p:nvSpPr>
+          <p:cNvPr id="28" name="Rounded Rectangle 27"/>
+          <p:cNvSpPr/>
+          <p:nvPr/>
+        </p:nvSpPr>
+        <p:spPr>
+          <a:xfrm>
+            <a:off x="475488" y="3515868"/>
+            <a:ext cx="54864" cy="825497"/>
+          </a:xfrm>
+          <a:prstGeom prst="roundRect">
+            <a:avLst>
+              <a:gd name="adj" fmla="val 50000"/>
+            </a:avLst>
+          </a:prstGeom>
+          <a:solidFill>
+            <a:srgbClr val="0B5E54"/>
+          </a:solidFill>
+          <a:ln>
+            <a:noFill/>
+          </a:ln>
+          <a:effectLst/>
+        </p:spPr>
+        <p:style>
+          <a:lnRef idx="1">
+            <a:schemeClr val="accent1"/>
+          </a:lnRef>
+          <a:fillRef idx="3">
+            <a:schemeClr val="accent1"/>
+          </a:fillRef>
+          <a:effectRef idx="2">
+            <a:schemeClr val="accent1"/>
+          </a:effectRef>
+          <a:fontRef idx="minor">
+            <a:schemeClr val="lt1"/>
+          </a:fontRef>
+        </p:style>
+        <p:txBody>
+          <a:bodyPr rtlCol="0" anchor="ctr"/>
+          <a:lstStyle/>
+          <a:p>
+            <a:pPr algn="ctr"/>
+          </a:p>
+        </p:txBody>
+      </p:sp>
+      <p:sp>
+        <p:nvSpPr>
+          <p:cNvPr id="29" name="Rounded Rectangle 28"/>
+          <p:cNvSpPr/>
+          <p:nvPr/>
+        </p:nvSpPr>
+        <p:spPr>
+          <a:xfrm>
+            <a:off x="621792" y="3598163"/>
+            <a:ext cx="237744" cy="237744"/>
+          </a:xfrm>
+          <a:prstGeom prst="roundRect">
+            <a:avLst>
+              <a:gd name="adj" fmla="val 28000"/>
+            </a:avLst>
+          </a:prstGeom>
+          <a:solidFill>
+            <a:srgbClr val="0B5E54"/>
+          </a:solidFill>
+          <a:ln>
+            <a:noFill/>
+          </a:ln>
+          <a:effectLst/>
+        </p:spPr>
+        <p:style>
+          <a:lnRef idx="1">
+            <a:schemeClr val="accent1"/>
+          </a:lnRef>
+          <a:fillRef idx="3">
+            <a:schemeClr val="accent1"/>
+          </a:fillRef>
+          <a:effectRef idx="2">
+            <a:schemeClr val="accent1"/>
+          </a:effectRef>
+          <a:fontRef idx="minor">
+            <a:schemeClr val="lt1"/>
+          </a:fontRef>
+        </p:style>
+        <p:txBody>
+          <a:bodyPr rtlCol="0" anchor="ctr"/>
+          <a:lstStyle/>
+          <a:p>
+            <a:pPr algn="ctr"/>
+          </a:p>
+        </p:txBody>
+      </p:sp>
+      <p:sp>
+        <p:nvSpPr>
+          <p:cNvPr id="30" name="TextBox 29"/>
+          <p:cNvSpPr txBox="1"/>
+          <p:nvPr/>
+        </p:nvSpPr>
+        <p:spPr>
+          <a:xfrm>
+            <a:off x="621792" y="3598163"/>
+            <a:ext cx="237744" cy="237744"/>
+          </a:xfrm>
+          <a:prstGeom prst="rect">
+            <a:avLst/>
+          </a:prstGeom>
+          <a:noFill/>
+        </p:spPr>
+        <p:txBody>
+          <a:bodyPr wrap="square" anchor="ctr" lIns="0" rIns="0" tIns="0" bIns="0">
+            <a:spAutoFit/>
+          </a:bodyPr>
+          <a:lstStyle/>
+          <a:p>
+            <a:pPr algn="ctr">
+              <a:lnSpc>
+                <a:spcPct val="114000"/>
+              </a:lnSpc>
+            </a:pPr>
+            <a:r>
+              <a:rPr sz="1000" b="1">
+                <a:solidFill>
+                  <a:srgbClr val="FFFFFF"/>
+                </a:solidFill>
+              </a:rPr>
+              <a:t>B</a:t>
+            </a:r>
+          </a:p>
+        </p:txBody>
+      </p:sp>
+      <p:sp>
+        <p:nvSpPr>
+          <p:cNvPr id="31" name="TextBox 30"/>
+          <p:cNvSpPr txBox="1"/>
+          <p:nvPr/>
+        </p:nvSpPr>
+        <p:spPr>
+          <a:xfrm>
+            <a:off x="932688" y="3579875"/>
+            <a:ext cx="8778240" cy="274320"/>
+          </a:xfrm>
+          <a:prstGeom prst="rect">
+            <a:avLst/>
+          </a:prstGeom>
+          <a:noFill/>
+        </p:spPr>
+        <p:txBody>
+          <a:bodyPr wrap="square" anchor="ctr" lIns="0" rIns="0" tIns="0" bIns="0">
+            <a:spAutoFit/>
+          </a:bodyPr>
+          <a:lstStyle/>
+          <a:p>
+            <a:pPr algn="l">
+              <a:lnSpc>
+                <a:spcPct val="114000"/>
+              </a:lnSpc>
+            </a:pPr>
+            <a:r>
+              <a:rPr sz="1050" b="1">
+                <a:solidFill>
+                  <a:srgbClr val="1B2B28"/>
+                </a:solidFill>
+              </a:rPr>
+              <a:t>优秀</a:t>
+            </a:r>
+            <a:r>
+              <a:rPr sz="850" b="0">
+                <a:solidFill>
+                  <a:srgbClr val="5C6E6A"/>
+                </a:solidFill>
+              </a:rPr>
+              <a:t>   验收口径：</a:t>
+            </a:r>
+            <a:r>
+              <a:rPr sz="850" b="0">
+                <a:solidFill>
+                  <a:srgbClr val="5C6E6A"/>
+                </a:solidFill>
+              </a:rPr>
+              <a:t>≥7指标+钻取交互；异常自动识别；美观度≥4/5</a:t>
+            </a:r>
+          </a:p>
+        </p:txBody>
+      </p:sp>
+      <p:sp>
+        <p:nvSpPr>
+          <p:cNvPr id="32" name="Rounded Rectangle 31"/>
+          <p:cNvSpPr/>
+          <p:nvPr/>
+        </p:nvSpPr>
+        <p:spPr>
+          <a:xfrm>
+            <a:off x="11131803" y="3607308"/>
+            <a:ext cx="453644" cy="237744"/>
+          </a:xfrm>
+          <a:prstGeom prst="roundRect">
+            <a:avLst>
+              <a:gd name="adj" fmla="val 50000"/>
+            </a:avLst>
+          </a:prstGeom>
+          <a:solidFill>
+            <a:srgbClr val="0B5E54"/>
+          </a:solidFill>
+          <a:ln>
+            <a:noFill/>
+          </a:ln>
+          <a:effectLst/>
+        </p:spPr>
+        <p:style>
+          <a:lnRef idx="1">
+            <a:schemeClr val="accent1"/>
+          </a:lnRef>
+          <a:fillRef idx="3">
+            <a:schemeClr val="accent1"/>
+          </a:fillRef>
+          <a:effectRef idx="2">
+            <a:schemeClr val="accent1"/>
+          </a:effectRef>
+          <a:fontRef idx="minor">
+            <a:schemeClr val="lt1"/>
+          </a:fontRef>
+        </p:style>
+        <p:txBody>
+          <a:bodyPr rtlCol="0" anchor="ctr"/>
+          <a:lstStyle/>
+          <a:p>
+            <a:pPr algn="ctr"/>
+          </a:p>
+        </p:txBody>
+      </p:sp>
+      <p:sp>
+        <p:nvSpPr>
+          <p:cNvPr id="33" name="TextBox 32"/>
+          <p:cNvSpPr txBox="1"/>
+          <p:nvPr/>
+        </p:nvSpPr>
+        <p:spPr>
+          <a:xfrm>
+            <a:off x="11131803" y="3607308"/>
+            <a:ext cx="453644" cy="237744"/>
+          </a:xfrm>
+          <a:prstGeom prst="rect">
+            <a:avLst/>
+          </a:prstGeom>
+          <a:noFill/>
+        </p:spPr>
+        <p:txBody>
+          <a:bodyPr wrap="square" anchor="ctr" lIns="0" rIns="0" tIns="0" bIns="0">
+            <a:spAutoFit/>
+          </a:bodyPr>
+          <a:lstStyle/>
+          <a:p>
+            <a:pPr algn="ctr">
+              <a:lnSpc>
+                <a:spcPct val="114000"/>
+              </a:lnSpc>
+            </a:pPr>
+            <a:r>
+              <a:rPr sz="850" b="1">
+                <a:solidFill>
+                  <a:srgbClr val="FFFFFF"/>
+                </a:solidFill>
+              </a:rPr>
+              <a:t>达标</a:t>
+            </a:r>
+          </a:p>
+        </p:txBody>
+      </p:sp>
+      <p:sp>
+        <p:nvSpPr>
+          <p:cNvPr id="34" name="TextBox 33"/>
+          <p:cNvSpPr txBox="1"/>
+          <p:nvPr/>
+        </p:nvSpPr>
+        <p:spPr>
+          <a:xfrm>
+            <a:off x="932688" y="3863339"/>
+            <a:ext cx="10671047" cy="423161"/>
+          </a:xfrm>
+          <a:prstGeom prst="rect">
+            <a:avLst/>
+          </a:prstGeom>
+          <a:noFill/>
+        </p:spPr>
+        <p:txBody>
+          <a:bodyPr wrap="square" anchor="t" lIns="0" rIns="0" tIns="0" bIns="0">
+            <a:spAutoFit/>
+          </a:bodyPr>
+          <a:lstStyle/>
+          <a:p>
+            <a:pPr algn="l">
+              <a:lnSpc>
+                <a:spcPct val="114000"/>
+              </a:lnSpc>
+            </a:pPr>
+            <a:r>
+              <a:rPr sz="950" b="0">
+                <a:solidFill>
+                  <a:srgbClr val="1B2B28"/>
+                </a:solidFill>
+              </a:rPr>
+              <a:t>指标实得 9 个；钻取：复放选择事件 x=['2026-03-03', '2026-03-05', '2026-03-07'] → 联动明细 30 行（上限 30）指纹 crc32=e89f637a（跨 PYTHONHASHSEED 稳定）；异常自动识别命中 357 条（temp&gt;90.0 或 vib&gt;4.5，逐条附处置建议）；美观度 5/5（≥4 达标；标题层级 1/1、单位标注 1/1、配色 1/1、图例 1/1、响应式 1/1；扣分项：无）</a:t>
+            </a:r>
+          </a:p>
+        </p:txBody>
+      </p:sp>
+      <p:sp>
+        <p:nvSpPr>
+          <p:cNvPr id="35" name="Rounded Rectangle 34"/>
+          <p:cNvSpPr/>
+          <p:nvPr/>
+        </p:nvSpPr>
+        <p:spPr>
+          <a:xfrm>
+            <a:off x="475488" y="4405373"/>
+            <a:ext cx="11237976" cy="1007874"/>
+          </a:xfrm>
+          <a:prstGeom prst="roundRect">
+            <a:avLst>
+              <a:gd name="adj" fmla="val 6000"/>
+            </a:avLst>
+          </a:prstGeom>
+          <a:solidFill>
+            <a:srgbClr val="FFFFFF"/>
+          </a:solidFill>
+          <a:ln w="9525">
+            <a:solidFill>
+              <a:srgbClr val="E4F1EE"/>
+            </a:solidFill>
+          </a:ln>
+          <a:effectLst/>
+        </p:spPr>
+        <p:style>
+          <a:lnRef idx="1">
+            <a:schemeClr val="accent1"/>
+          </a:lnRef>
+          <a:fillRef idx="3">
+            <a:schemeClr val="accent1"/>
+          </a:fillRef>
+          <a:effectRef idx="2">
+            <a:schemeClr val="accent1"/>
+          </a:effectRef>
+          <a:fontRef idx="minor">
+            <a:schemeClr val="lt1"/>
+          </a:fontRef>
+        </p:style>
+        <p:txBody>
+          <a:bodyPr rtlCol="0" anchor="ctr"/>
+          <a:lstStyle/>
+          <a:p>
+            <a:pPr algn="ctr"/>
+          </a:p>
+        </p:txBody>
+      </p:sp>
+      <p:sp>
+        <p:nvSpPr>
+          <p:cNvPr id="36" name="Rounded Rectangle 35"/>
+          <p:cNvSpPr/>
+          <p:nvPr/>
+        </p:nvSpPr>
+        <p:spPr>
+          <a:xfrm>
+            <a:off x="475488" y="4405373"/>
+            <a:ext cx="54864" cy="1007874"/>
+          </a:xfrm>
+          <a:prstGeom prst="roundRect">
+            <a:avLst>
+              <a:gd name="adj" fmla="val 50000"/>
+            </a:avLst>
+          </a:prstGeom>
+          <a:solidFill>
+            <a:srgbClr val="C9A227"/>
+          </a:solidFill>
+          <a:ln>
+            <a:noFill/>
+          </a:ln>
+          <a:effectLst/>
+        </p:spPr>
+        <p:style>
+          <a:lnRef idx="1">
+            <a:schemeClr val="accent1"/>
+          </a:lnRef>
+          <a:fillRef idx="3">
+            <a:schemeClr val="accent1"/>
+          </a:fillRef>
+          <a:effectRef idx="2">
+            <a:schemeClr val="accent1"/>
+          </a:effectRef>
+          <a:fontRef idx="minor">
+            <a:schemeClr val="lt1"/>
+          </a:fontRef>
+        </p:style>
+        <p:txBody>
+          <a:bodyPr rtlCol="0" anchor="ctr"/>
+          <a:lstStyle/>
+          <a:p>
+            <a:pPr algn="ctr"/>
+          </a:p>
+        </p:txBody>
+      </p:sp>
+      <p:sp>
+        <p:nvSpPr>
+          <p:cNvPr id="37" name="Rounded Rectangle 36"/>
+          <p:cNvSpPr/>
+          <p:nvPr/>
+        </p:nvSpPr>
+        <p:spPr>
+          <a:xfrm>
+            <a:off x="621792" y="4487669"/>
+            <a:ext cx="237744" cy="237744"/>
+          </a:xfrm>
+          <a:prstGeom prst="roundRect">
+            <a:avLst>
+              <a:gd name="adj" fmla="val 28000"/>
+            </a:avLst>
+          </a:prstGeom>
+          <a:solidFill>
+            <a:srgbClr val="C9A227"/>
+          </a:solidFill>
+          <a:ln>
+            <a:noFill/>
+          </a:ln>
+          <a:effectLst/>
+        </p:spPr>
+        <p:style>
+          <a:lnRef idx="1">
+            <a:schemeClr val="accent1"/>
+          </a:lnRef>
+          <a:fillRef idx="3">
+            <a:schemeClr val="accent1"/>
+          </a:fillRef>
+          <a:effectRef idx="2">
+            <a:schemeClr val="accent1"/>
+          </a:effectRef>
+          <a:fontRef idx="minor">
+            <a:schemeClr val="lt1"/>
+          </a:fontRef>
+        </p:style>
+        <p:txBody>
+          <a:bodyPr rtlCol="0" anchor="ctr"/>
+          <a:lstStyle/>
+          <a:p>
+            <a:pPr algn="ctr"/>
+          </a:p>
+        </p:txBody>
+      </p:sp>
+      <p:sp>
+        <p:nvSpPr>
+          <p:cNvPr id="38" name="TextBox 37"/>
+          <p:cNvSpPr txBox="1"/>
+          <p:nvPr/>
+        </p:nvSpPr>
+        <p:spPr>
+          <a:xfrm>
+            <a:off x="621792" y="4487669"/>
+            <a:ext cx="237744" cy="237744"/>
+          </a:xfrm>
+          <a:prstGeom prst="rect">
+            <a:avLst/>
+          </a:prstGeom>
+          <a:noFill/>
+        </p:spPr>
+        <p:txBody>
+          <a:bodyPr wrap="square" anchor="ctr" lIns="0" rIns="0" tIns="0" bIns="0">
+            <a:spAutoFit/>
+          </a:bodyPr>
+          <a:lstStyle/>
+          <a:p>
+            <a:pPr algn="ctr">
+              <a:lnSpc>
+                <a:spcPct val="114000"/>
+              </a:lnSpc>
+            </a:pPr>
+            <a:r>
+              <a:rPr sz="1000" b="1">
+                <a:solidFill>
+                  <a:srgbClr val="FFFFFF"/>
+                </a:solidFill>
+              </a:rPr>
+              <a:t>A</a:t>
+            </a:r>
+          </a:p>
+        </p:txBody>
+      </p:sp>
+      <p:sp>
+        <p:nvSpPr>
+          <p:cNvPr id="39" name="TextBox 38"/>
+          <p:cNvSpPr txBox="1"/>
+          <p:nvPr/>
+        </p:nvSpPr>
+        <p:spPr>
+          <a:xfrm>
+            <a:off x="932688" y="4469381"/>
+            <a:ext cx="8778240" cy="274320"/>
+          </a:xfrm>
+          <a:prstGeom prst="rect">
+            <a:avLst/>
+          </a:prstGeom>
+          <a:noFill/>
+        </p:spPr>
+        <p:txBody>
+          <a:bodyPr wrap="square" anchor="ctr" lIns="0" rIns="0" tIns="0" bIns="0">
+            <a:spAutoFit/>
+          </a:bodyPr>
+          <a:lstStyle/>
+          <a:p>
+            <a:pPr algn="l">
+              <a:lnSpc>
+                <a:spcPct val="114000"/>
+              </a:lnSpc>
+            </a:pPr>
+            <a:r>
+              <a:rPr sz="1050" b="1">
+                <a:solidFill>
+                  <a:srgbClr val="1B2B28"/>
+                </a:solidFill>
+              </a:rPr>
+              <a:t>超优</a:t>
+            </a:r>
+            <a:r>
+              <a:rPr sz="850" b="0">
+                <a:solidFill>
+                  <a:srgbClr val="5C6E6A"/>
+                </a:solidFill>
+              </a:rPr>
+              <a:t>   验收口径：</a:t>
+            </a:r>
+            <a:r>
+              <a:rPr sz="850" b="0">
+                <a:solidFill>
+                  <a:srgbClr val="5C6E6A"/>
+                </a:solidFill>
+              </a:rPr>
+              <a:t>优秀+定时自动生成(mailto/计划任务)+移动端适配</a:t>
+            </a:r>
+          </a:p>
+        </p:txBody>
+      </p:sp>
+      <p:sp>
+        <p:nvSpPr>
+          <p:cNvPr id="40" name="Rounded Rectangle 39"/>
+          <p:cNvSpPr/>
+          <p:nvPr/>
+        </p:nvSpPr>
+        <p:spPr>
+          <a:xfrm>
+            <a:off x="11131803" y="4496813"/>
+            <a:ext cx="453644" cy="237744"/>
+          </a:xfrm>
+          <a:prstGeom prst="roundRect">
+            <a:avLst>
+              <a:gd name="adj" fmla="val 50000"/>
+            </a:avLst>
+          </a:prstGeom>
+          <a:solidFill>
+            <a:srgbClr val="0B5E54"/>
+          </a:solidFill>
+          <a:ln>
+            <a:noFill/>
+          </a:ln>
+          <a:effectLst/>
+        </p:spPr>
+        <p:style>
+          <a:lnRef idx="1">
+            <a:schemeClr val="accent1"/>
+          </a:lnRef>
+          <a:fillRef idx="3">
+            <a:schemeClr val="accent1"/>
+          </a:fillRef>
+          <a:effectRef idx="2">
+            <a:schemeClr val="accent1"/>
+          </a:effectRef>
+          <a:fontRef idx="minor">
+            <a:schemeClr val="lt1"/>
+          </a:fontRef>
+        </p:style>
+        <p:txBody>
+          <a:bodyPr rtlCol="0" anchor="ctr"/>
+          <a:lstStyle/>
+          <a:p>
+            <a:pPr algn="ctr"/>
+          </a:p>
+        </p:txBody>
+      </p:sp>
+      <p:sp>
+        <p:nvSpPr>
+          <p:cNvPr id="41" name="TextBox 40"/>
+          <p:cNvSpPr txBox="1"/>
+          <p:nvPr/>
+        </p:nvSpPr>
+        <p:spPr>
+          <a:xfrm>
+            <a:off x="11131803" y="4496813"/>
+            <a:ext cx="453644" cy="237744"/>
+          </a:xfrm>
+          <a:prstGeom prst="rect">
+            <a:avLst/>
+          </a:prstGeom>
+          <a:noFill/>
+        </p:spPr>
+        <p:txBody>
+          <a:bodyPr wrap="square" anchor="ctr" lIns="0" rIns="0" tIns="0" bIns="0">
+            <a:spAutoFit/>
+          </a:bodyPr>
+          <a:lstStyle/>
+          <a:p>
+            <a:pPr algn="ctr">
+              <a:lnSpc>
+                <a:spcPct val="114000"/>
+              </a:lnSpc>
+            </a:pPr>
+            <a:r>
+              <a:rPr sz="850" b="1">
+                <a:solidFill>
+                  <a:srgbClr val="FFFFFF"/>
+                </a:solidFill>
+              </a:rPr>
+              <a:t>达标</a:t>
+            </a:r>
+          </a:p>
+        </p:txBody>
+      </p:sp>
+      <p:sp>
+        <p:nvSpPr>
+          <p:cNvPr id="42" name="TextBox 41"/>
+          <p:cNvSpPr txBox="1"/>
+          <p:nvPr/>
+        </p:nvSpPr>
+        <p:spPr>
+          <a:xfrm>
+            <a:off x="932688" y="4752845"/>
+            <a:ext cx="10671047" cy="605538"/>
+          </a:xfrm>
+          <a:prstGeom prst="rect">
+            <a:avLst/>
+          </a:prstGeom>
+          <a:noFill/>
+        </p:spPr>
+        <p:txBody>
+          <a:bodyPr wrap="square" anchor="t" lIns="0" rIns="0" tIns="0" bIns="0">
+            <a:spAutoFit/>
+          </a:bodyPr>
+          <a:lstStyle/>
+          <a:p>
+            <a:pPr algn="l">
+              <a:lnSpc>
+                <a:spcPct val="114000"/>
+              </a:lnSpc>
+            </a:pPr>
+            <a:r>
+              <a:rPr sz="950" b="0">
+                <a:solidFill>
+                  <a:srgbClr val="1B2B28"/>
+                </a:solidFill>
+              </a:rPr>
+              <a:t>继承优秀(B)：达标；定时：schedule.at=07:30 解析为每日 07:30，下次触发为真实 datetime 且晚于此刻（墙钟值写 runtime/schedule_state.txt 与 output/timing.txt，不进判定行）；计划任务 4 件产物已渲染（crontab/systemd/launchd/mailto，写 runtime/schedule/）；mailto 收件人 line-lead@example.com 且 subject/body 齐；移动端：viewport=True flex=True media=True 窄屏断点 600px（config 上限 768px）</a:t>
+            </a:r>
+          </a:p>
+        </p:txBody>
+      </p:sp>
+      <p:sp>
+        <p:nvSpPr>
+          <p:cNvPr id="43" name="Rounded Rectangle 42"/>
+          <p:cNvSpPr/>
+          <p:nvPr/>
+        </p:nvSpPr>
+        <p:spPr>
+          <a:xfrm>
+            <a:off x="475488" y="5477256"/>
+            <a:ext cx="11237976" cy="941831"/>
+          </a:xfrm>
+          <a:prstGeom prst="roundRect">
+            <a:avLst>
+              <a:gd name="adj" fmla="val 5000"/>
+            </a:avLst>
+          </a:prstGeom>
+          <a:solidFill>
+            <a:srgbClr val="E4F1EE"/>
+          </a:solidFill>
+          <a:ln>
+            <a:noFill/>
+          </a:ln>
+          <a:effectLst/>
+        </p:spPr>
+        <p:style>
+          <a:lnRef idx="1">
+            <a:schemeClr val="accent1"/>
+          </a:lnRef>
+          <a:fillRef idx="3">
+            <a:schemeClr val="accent1"/>
+          </a:fillRef>
+          <a:effectRef idx="2">
+            <a:schemeClr val="accent1"/>
+          </a:effectRef>
+          <a:fontRef idx="minor">
+            <a:schemeClr val="lt1"/>
+          </a:fontRef>
+        </p:style>
+        <p:txBody>
+          <a:bodyPr rtlCol="0" anchor="ctr"/>
+          <a:lstStyle/>
+          <a:p>
+            <a:pPr algn="ctr"/>
+          </a:p>
+        </p:txBody>
+      </p:sp>
+      <p:sp>
+        <p:nvSpPr>
+          <p:cNvPr id="44" name="Rounded Rectangle 43"/>
+          <p:cNvSpPr/>
+          <p:nvPr/>
+        </p:nvSpPr>
+        <p:spPr>
+          <a:xfrm>
+            <a:off x="475488" y="5477256"/>
+            <a:ext cx="54864" cy="941831"/>
+          </a:xfrm>
+          <a:prstGeom prst="roundRect">
+            <a:avLst>
+              <a:gd name="adj" fmla="val 50000"/>
+            </a:avLst>
+          </a:prstGeom>
+          <a:solidFill>
+            <a:srgbClr val="C9A227"/>
+          </a:solidFill>
+          <a:ln>
+            <a:noFill/>
+          </a:ln>
+          <a:effectLst/>
+        </p:spPr>
+        <p:style>
+          <a:lnRef idx="1">
+            <a:schemeClr val="accent1"/>
+          </a:lnRef>
+          <a:fillRef idx="3">
+            <a:schemeClr val="accent1"/>
+          </a:fillRef>
+          <a:effectRef idx="2">
+            <a:schemeClr val="accent1"/>
+          </a:effectRef>
+          <a:fontRef idx="minor">
+            <a:schemeClr val="lt1"/>
+          </a:fontRef>
+        </p:style>
+        <p:txBody>
+          <a:bodyPr rtlCol="0" anchor="ctr"/>
+          <a:lstStyle/>
+          <a:p>
+            <a:pPr algn="ctr"/>
+          </a:p>
+        </p:txBody>
+      </p:sp>
+      <p:sp>
+        <p:nvSpPr>
+          <p:cNvPr id="45" name="TextBox 44"/>
+          <p:cNvSpPr txBox="1"/>
+          <p:nvPr/>
+        </p:nvSpPr>
+        <p:spPr>
+          <a:xfrm>
+            <a:off x="676656" y="5550408"/>
+            <a:ext cx="10908792" cy="795527"/>
+          </a:xfrm>
+          <a:prstGeom prst="rect">
+            <a:avLst/>
+          </a:prstGeom>
+          <a:noFill/>
+        </p:spPr>
+        <p:txBody>
+          <a:bodyPr wrap="square" anchor="t" lIns="0" rIns="0" tIns="0" bIns="0">
+            <a:spAutoFit/>
+          </a:bodyPr>
+          <a:lstStyle/>
+          <a:p>
+            <a:pPr algn="l">
+              <a:lnSpc>
+                <a:spcPct val="124000"/>
+              </a:lnSpc>
+            </a:pPr>
+            <a:r>
+              <a:rPr sz="850" b="0">
+                <a:solidFill>
+                  <a:srgbClr val="1B2B28"/>
+                </a:solidFill>
+              </a:rPr>
+              <a:t>出处：工程化项目/p33_kpi_cockpit/output/report.txt 第 15 节「分层达标」——本机 2026-10-28 05:08 实跑落盘，上表数字逐字摘录、未改写。</a:t>
+            </a:r>
+          </a:p>
+          <a:p>
+            <a:pPr algn="l">
+              <a:lnSpc>
+                <a:spcPct val="124000"/>
+              </a:lnSpc>
+            </a:pPr>
+            <a:r>
+              <a:rPr sz="850" b="0">
+                <a:solidFill>
+                  <a:srgbClr val="1B2B28"/>
+                </a:solidFill>
+              </a:rPr>
+              <a:t>复现：cd 工程化项目/p33_kpi_cockpit &amp;&amp; python run.py &amp;&amp; python -m pytest -q -o addopts=''</a:t>
+            </a:r>
+          </a:p>
+          <a:p>
+            <a:pPr algn="l">
+              <a:lnSpc>
+                <a:spcPct val="124000"/>
+              </a:lnSpc>
+            </a:pPr>
+            <a:r>
+              <a:rPr sz="850" b="0">
+                <a:solidFill>
+                  <a:srgbClr val="1B2B28"/>
+                </a:solidFill>
+              </a:rPr>
+              <a:t>口径：表中「判定」沿用报告原词——绿=达标/通过，黄=仅本节取证项通过（未取证子项在报告里逐条点名），红=未达标。</a:t>
             </a:r>
           </a:p>
         </p:txBody>
@@ -7997,20 +9448,22 @@
       <p:grpSpPr/>
       <p:sp>
         <p:nvSpPr>
-          <p:cNvPr id="2" name="Rectangle 1"/>
+          <p:cNvPr id="2" name="Rounded Rectangle 1"/>
           <p:cNvSpPr/>
           <p:nvPr/>
         </p:nvSpPr>
         <p:spPr>
           <a:xfrm>
             <a:off x="0" y="0"/>
-            <a:ext cx="12192000" cy="6858000"/>
-          </a:xfrm>
-          <a:prstGeom prst="rect">
-            <a:avLst/>
+            <a:ext cx="12191695" cy="64008"/>
+          </a:xfrm>
+          <a:prstGeom prst="roundRect">
+            <a:avLst>
+              <a:gd name="adj" fmla="val 50000"/>
+            </a:avLst>
           </a:prstGeom>
           <a:solidFill>
-            <a:srgbClr val="010328"/>
+            <a:srgbClr val="0B5E54"/>
           </a:solidFill>
           <a:ln>
             <a:noFill/>
@@ -8041,20 +9494,60 @@
       </p:sp>
       <p:sp>
         <p:nvSpPr>
-          <p:cNvPr id="3" name="Rectangle 2"/>
+          <p:cNvPr id="3" name="TextBox 2"/>
+          <p:cNvSpPr txBox="1"/>
+          <p:nvPr/>
+        </p:nvSpPr>
+        <p:spPr>
+          <a:xfrm>
+            <a:off x="475488" y="146304"/>
+            <a:ext cx="8229600" cy="292608"/>
+          </a:xfrm>
+          <a:prstGeom prst="rect">
+            <a:avLst/>
+          </a:prstGeom>
+          <a:noFill/>
+        </p:spPr>
+        <p:txBody>
+          <a:bodyPr wrap="square" anchor="t" lIns="0" rIns="0" tIns="0" bIns="0">
+            <a:spAutoFit/>
+          </a:bodyPr>
+          <a:lstStyle/>
+          <a:p>
+            <a:pPr algn="l">
+              <a:lnSpc>
+                <a:spcPct val="114000"/>
+              </a:lnSpc>
+            </a:pPr>
+            <a:r>
+              <a:rPr sz="1100" b="1">
+                <a:solidFill>
+                  <a:srgbClr val="0B5E54"/>
+                </a:solidFill>
+              </a:rPr>
+              <a:t>工单实战 · 运行留证</a:t>
+            </a:r>
+          </a:p>
+        </p:txBody>
+      </p:sp>
+      <p:sp>
+        <p:nvSpPr>
+          <p:cNvPr id="4" name="Rounded Rectangle 3"/>
           <p:cNvSpPr/>
           <p:nvPr/>
         </p:nvSpPr>
         <p:spPr>
           <a:xfrm>
-            <a:off x="0" y="2880360"/>
-            <a:ext cx="12192000" cy="50000"/>
-          </a:xfrm>
-          <a:prstGeom prst="rect">
-            <a:avLst/>
+            <a:off x="475488" y="475488"/>
+            <a:ext cx="2027872" cy="310896"/>
+          </a:xfrm>
+          <a:prstGeom prst="roundRect">
+            <a:avLst>
+              <a:gd name="adj" fmla="val 50000"/>
+            </a:avLst>
           </a:prstGeom>
           <a:solidFill>
-            <a:srgbClr val="F5670F"/>
+            <a:srgbClr val="C9A227"/>
           </a:solidFill>
           <a:ln>
             <a:noFill/>
@@ -8085,14 +9578,14 @@
       </p:sp>
       <p:sp>
         <p:nvSpPr>
-          <p:cNvPr id="4" name="TextBox 3"/>
+          <p:cNvPr id="5" name="TextBox 4"/>
           <p:cNvSpPr txBox="1"/>
           <p:nvPr/>
         </p:nvSpPr>
         <p:spPr>
           <a:xfrm>
-            <a:off x="0" y="1645920"/>
-            <a:ext cx="12192000" cy="1500000"/>
+            <a:off x="475488" y="475488"/>
+            <a:ext cx="2027872" cy="310896"/>
           </a:xfrm>
           <a:prstGeom prst="rect">
             <a:avLst/>
@@ -8100,41 +9593,37 @@
           <a:noFill/>
         </p:spPr>
         <p:txBody>
-          <a:bodyPr wrap="square" anchor="t">
+          <a:bodyPr wrap="square" anchor="ctr" lIns="0" rIns="0" tIns="0" bIns="0">
             <a:spAutoFit/>
           </a:bodyPr>
           <a:lstStyle/>
           <a:p>
             <a:pPr algn="ctr">
               <a:lnSpc>
-                <a:spcPct val="110000"/>
+                <a:spcPct val="114000"/>
               </a:lnSpc>
-              <a:spcAft>
-                <a:spcPts val="600"/>
-              </a:spcAft>
             </a:pPr>
             <a:r>
-              <a:rPr sz="5400" b="1">
+              <a:rPr sz="1050" b="1">
                 <a:solidFill>
                   <a:srgbClr val="FFFFFF"/>
                 </a:solidFill>
-                <a:latin typeface="微软雅黑"/>
               </a:rPr>
-              <a:t>THANKS</a:t>
-            </a:r>
-          </a:p>
-        </p:txBody>
-      </p:sp>
-      <p:sp>
-        <p:nvSpPr>
-          <p:cNvPr id="5" name="TextBox 4"/>
+              <a:t>SCREENSHOT · 终端逐字截图</a:t>
+            </a:r>
+          </a:p>
+        </p:txBody>
+      </p:sp>
+      <p:sp>
+        <p:nvSpPr>
+          <p:cNvPr id="6" name="TextBox 5"/>
           <p:cNvSpPr txBox="1"/>
           <p:nvPr/>
         </p:nvSpPr>
         <p:spPr>
           <a:xfrm>
-            <a:off x="0" y="3429000"/>
-            <a:ext cx="12192000" cy="800000"/>
+            <a:off x="475488" y="859536"/>
+            <a:ext cx="11237976" cy="502920"/>
           </a:xfrm>
           <a:prstGeom prst="rect">
             <a:avLst/>
@@ -8142,89 +9631,45 @@
           <a:noFill/>
         </p:spPr>
         <p:txBody>
-          <a:bodyPr wrap="square" anchor="t">
+          <a:bodyPr wrap="square" anchor="t" lIns="0" rIns="0" tIns="0" bIns="0">
             <a:spAutoFit/>
           </a:bodyPr>
           <a:lstStyle/>
           <a:p>
-            <a:pPr algn="ctr">
+            <a:pPr algn="l">
               <a:lnSpc>
-                <a:spcPct val="110000"/>
+                <a:spcPct val="114000"/>
               </a:lnSpc>
-              <a:spcAft>
-                <a:spcPts val="600"/>
-              </a:spcAft>
             </a:pPr>
             <a:r>
               <a:rPr sz="2200" b="1">
                 <a:solidFill>
-                  <a:srgbClr val="F5670F"/>
-                </a:solidFill>
-                <a:latin typeface="微软雅黑"/>
+                  <a:srgbClr val="1B2B28"/>
+                </a:solidFill>
               </a:rPr>
-              <a:t>感谢聆听 · 动手实践出真知</a:t>
-            </a:r>
-          </a:p>
-        </p:txBody>
-      </p:sp>
-      <p:sp>
-        <p:nvSpPr>
-          <p:cNvPr id="6" name="TextBox 5"/>
-          <p:cNvSpPr txBox="1"/>
-          <p:nvPr/>
-        </p:nvSpPr>
-        <p:spPr>
-          <a:xfrm>
-            <a:off x="0" y="4526280"/>
-            <a:ext cx="12192000" cy="600000"/>
-          </a:xfrm>
-          <a:prstGeom prst="rect">
-            <a:avLst/>
-          </a:prstGeom>
-          <a:noFill/>
-        </p:spPr>
-        <p:txBody>
-          <a:bodyPr wrap="square" anchor="t">
-            <a:spAutoFit/>
-          </a:bodyPr>
-          <a:lstStyle/>
-          <a:p>
-            <a:pPr algn="ctr">
-              <a:lnSpc>
-                <a:spcPct val="110000"/>
-              </a:lnSpc>
-              <a:spcAft>
-                <a:spcPts val="600"/>
-              </a:spcAft>
-            </a:pPr>
-            <a:r>
-              <a:rPr sz="1400" b="0">
-                <a:solidFill>
-                  <a:srgbClr val="BBC6E6"/>
-                </a:solidFill>
-                <a:latin typeface="微软雅黑"/>
-              </a:rPr>
-              <a:t>以生为本   |   做中学 · 学中做</a:t>
-            </a:r>
-          </a:p>
-        </p:txBody>
-      </p:sp>
-      <p:sp>
-        <p:nvSpPr>
-          <p:cNvPr id="7" name="Rectangle 6"/>
+              <a:t>P3.1/P3.2 分层达标 · 四档逐字输出截图</a:t>
+            </a:r>
+          </a:p>
+        </p:txBody>
+      </p:sp>
+      <p:sp>
+        <p:nvSpPr>
+          <p:cNvPr id="7" name="Rounded Rectangle 6"/>
           <p:cNvSpPr/>
           <p:nvPr/>
         </p:nvSpPr>
         <p:spPr>
           <a:xfrm>
-            <a:off x="500000" y="6500000"/>
-            <a:ext cx="11100000" cy="20000"/>
-          </a:xfrm>
-          <a:prstGeom prst="rect">
-            <a:avLst/>
+            <a:off x="475488" y="1389888"/>
+            <a:ext cx="1234440" cy="27432"/>
+          </a:xfrm>
+          <a:prstGeom prst="roundRect">
+            <a:avLst>
+              <a:gd name="adj" fmla="val 50000"/>
+            </a:avLst>
           </a:prstGeom>
           <a:solidFill>
-            <a:srgbClr val="C9D4EE"/>
+            <a:srgbClr val="C9A227"/>
           </a:solidFill>
           <a:ln>
             <a:noFill/>
@@ -8255,14 +9700,60 @@
       </p:sp>
       <p:sp>
         <p:nvSpPr>
-          <p:cNvPr id="8" name="TextBox 7"/>
+          <p:cNvPr id="8" name="Rounded Rectangle 7"/>
+          <p:cNvSpPr/>
+          <p:nvPr/>
+        </p:nvSpPr>
+        <p:spPr>
+          <a:xfrm>
+            <a:off x="475488" y="6419088"/>
+            <a:ext cx="11237976" cy="10972"/>
+          </a:xfrm>
+          <a:prstGeom prst="roundRect">
+            <a:avLst>
+              <a:gd name="adj" fmla="val 50000"/>
+            </a:avLst>
+          </a:prstGeom>
+          <a:solidFill>
+            <a:srgbClr val="E4F1EE"/>
+          </a:solidFill>
+          <a:ln>
+            <a:noFill/>
+          </a:ln>
+          <a:effectLst/>
+        </p:spPr>
+        <p:style>
+          <a:lnRef idx="1">
+            <a:schemeClr val="accent1"/>
+          </a:lnRef>
+          <a:fillRef idx="3">
+            <a:schemeClr val="accent1"/>
+          </a:fillRef>
+          <a:effectRef idx="2">
+            <a:schemeClr val="accent1"/>
+          </a:effectRef>
+          <a:fontRef idx="minor">
+            <a:schemeClr val="lt1"/>
+          </a:fontRef>
+        </p:style>
+        <p:txBody>
+          <a:bodyPr rtlCol="0" anchor="ctr"/>
+          <a:lstStyle/>
+          <a:p>
+            <a:pPr algn="ctr"/>
+          </a:p>
+        </p:txBody>
+      </p:sp>
+      <p:sp>
+        <p:nvSpPr>
+          <p:cNvPr id="9" name="TextBox 8"/>
           <p:cNvSpPr txBox="1"/>
           <p:nvPr/>
         </p:nvSpPr>
         <p:spPr>
           <a:xfrm>
-            <a:off x="500000" y="6540000"/>
-            <a:ext cx="7000000" cy="300000"/>
+            <a:off x="475488" y="6455664"/>
+            <a:ext cx="7315200" cy="292608"/>
           </a:xfrm>
           <a:prstGeom prst="rect">
             <a:avLst/>
@@ -8270,25 +9761,21 @@
           <a:noFill/>
         </p:spPr>
         <p:txBody>
-          <a:bodyPr wrap="square" anchor="t">
+          <a:bodyPr wrap="square" anchor="t" lIns="0" rIns="0" tIns="0" bIns="0">
             <a:spAutoFit/>
           </a:bodyPr>
           <a:lstStyle/>
           <a:p>
             <a:pPr algn="l">
               <a:lnSpc>
-                <a:spcPct val="110000"/>
+                <a:spcPct val="114000"/>
               </a:lnSpc>
-              <a:spcAft>
-                <a:spcPts val="600"/>
-              </a:spcAft>
             </a:pPr>
             <a:r>
-              <a:rPr sz="1000" b="0">
-                <a:solidFill>
-                  <a:srgbClr val="8A97B5"/>
-                </a:solidFill>
-                <a:latin typeface="微软雅黑"/>
+              <a:rPr sz="900" b="0">
+                <a:solidFill>
+                  <a:srgbClr val="5C6E6A"/>
+                </a:solidFill>
               </a:rPr>
               <a:t>两江智造集团 · Python程序设计（项目实战）</a:t>
             </a:r>
@@ -8297,14 +9784,14 @@
       </p:sp>
       <p:sp>
         <p:nvSpPr>
-          <p:cNvPr id="9" name="TextBox 8"/>
+          <p:cNvPr id="10" name="TextBox 9"/>
           <p:cNvSpPr txBox="1"/>
           <p:nvPr/>
         </p:nvSpPr>
         <p:spPr>
           <a:xfrm>
-            <a:off x="10600000" y="6540000"/>
-            <a:ext cx="1000000" cy="300000"/>
+            <a:off x="10597896" y="6537960"/>
+            <a:ext cx="996696" cy="301752"/>
           </a:xfrm>
           <a:prstGeom prst="rect">
             <a:avLst/>
@@ -8312,27 +9799,123 @@
           <a:noFill/>
         </p:spPr>
         <p:txBody>
-          <a:bodyPr wrap="square" anchor="ctr">
+          <a:bodyPr wrap="square" anchor="t" lIns="0" rIns="0" tIns="0" bIns="0">
             <a:spAutoFit/>
           </a:bodyPr>
           <a:lstStyle/>
           <a:p>
             <a:pPr algn="r">
               <a:lnSpc>
-                <a:spcPct val="110000"/>
+                <a:spcPct val="114000"/>
               </a:lnSpc>
-              <a:spcAft>
-                <a:spcPts val="600"/>
-              </a:spcAft>
             </a:pPr>
             <a:r>
               <a:rPr sz="1000" b="0">
                 <a:solidFill>
                   <a:srgbClr val="8A97B5"/>
                 </a:solidFill>
-                <a:latin typeface="微软雅黑"/>
               </a:rPr>
-              <a:t>9 / 10</a:t>
+              <a:t>6 / 10</a:t>
+            </a:r>
+          </a:p>
+        </p:txBody>
+      </p:sp>
+      <p:sp>
+        <p:nvSpPr>
+          <p:cNvPr id="11" name="TextBox 10"/>
+          <p:cNvSpPr txBox="1"/>
+          <p:nvPr/>
+        </p:nvSpPr>
+        <p:spPr>
+          <a:xfrm>
+            <a:off x="475488" y="1517904"/>
+            <a:ext cx="11237976" cy="237744"/>
+          </a:xfrm>
+          <a:prstGeom prst="rect">
+            <a:avLst/>
+          </a:prstGeom>
+          <a:noFill/>
+        </p:spPr>
+        <p:txBody>
+          <a:bodyPr wrap="square" anchor="t" lIns="0" rIns="0" tIns="0" bIns="0">
+            <a:spAutoFit/>
+          </a:bodyPr>
+          <a:lstStyle/>
+          <a:p>
+            <a:pPr algn="l">
+              <a:lnSpc>
+                <a:spcPct val="114000"/>
+              </a:lnSpc>
+            </a:pPr>
+            <a:r>
+              <a:rPr sz="1000" b="0">
+                <a:solidFill>
+                  <a:srgbClr val="5C6E6A"/>
+                </a:solidFill>
+              </a:rPr>
+              <a:t>终端窗口截图：由 report.txt 本节逐字渲染，未手工改写</a:t>
+            </a:r>
+          </a:p>
+        </p:txBody>
+      </p:sp>
+      <p:pic>
+        <p:nvPicPr>
+          <p:cNvPr id="12" name="Picture 11" descr="p33_kpi_cockpit_classroom.png"/>
+          <p:cNvPicPr>
+            <a:picLocks noChangeAspect="1"/>
+          </p:cNvPicPr>
+          <p:nvPr/>
+        </p:nvPicPr>
+        <p:blipFill>
+          <a:blip r:embed="rId2"/>
+          <a:stretch>
+            <a:fillRect/>
+          </a:stretch>
+        </p:blipFill>
+        <p:spPr>
+          <a:xfrm>
+            <a:off x="1478619" y="1792224"/>
+            <a:ext cx="9231712" cy="3849624"/>
+          </a:xfrm>
+          <a:prstGeom prst="rect">
+            <a:avLst/>
+          </a:prstGeom>
+        </p:spPr>
+      </p:pic>
+      <p:sp>
+        <p:nvSpPr>
+          <p:cNvPr id="13" name="TextBox 12"/>
+          <p:cNvSpPr txBox="1"/>
+          <p:nvPr/>
+        </p:nvSpPr>
+        <p:spPr>
+          <a:xfrm>
+            <a:off x="475488" y="5678424"/>
+            <a:ext cx="11237976" cy="256032"/>
+          </a:xfrm>
+          <a:prstGeom prst="rect">
+            <a:avLst/>
+          </a:prstGeom>
+          <a:noFill/>
+        </p:spPr>
+        <p:txBody>
+          <a:bodyPr wrap="square" anchor="t" lIns="0" rIns="0" tIns="0" bIns="0">
+            <a:spAutoFit/>
+          </a:bodyPr>
+          <a:lstStyle/>
+          <a:p>
+            <a:pPr algn="l">
+              <a:lnSpc>
+                <a:spcPct val="114000"/>
+              </a:lnSpc>
+            </a:pPr>
+            <a:r>
+              <a:rPr sz="850" b="0">
+                <a:solidFill>
+                  <a:srgbClr val="5C6E6A"/>
+                </a:solidFill>
+              </a:rPr>
+              <a:t>▲ p33_kpi_cockpit：分层达标 第 15 行起的四档逐字原文（绿=达标/通过，黄=仅本节取证项，橙=未实测项）</a:t>
             </a:r>
           </a:p>
         </p:txBody>
@@ -8357,20 +9940,22 @@
       <p:grpSpPr/>
       <p:sp>
         <p:nvSpPr>
-          <p:cNvPr id="2" name="Rectangle 1"/>
+          <p:cNvPr id="2" name="Rounded Rectangle 1"/>
           <p:cNvSpPr/>
           <p:nvPr/>
         </p:nvSpPr>
         <p:spPr>
           <a:xfrm>
             <a:off x="0" y="0"/>
-            <a:ext cx="12192000" cy="1150000"/>
-          </a:xfrm>
-          <a:prstGeom prst="rect">
-            <a:avLst/>
+            <a:ext cx="12191695" cy="64008"/>
+          </a:xfrm>
+          <a:prstGeom prst="roundRect">
+            <a:avLst>
+              <a:gd name="adj" fmla="val 50000"/>
+            </a:avLst>
           </a:prstGeom>
           <a:solidFill>
-            <a:srgbClr val="010328"/>
+            <a:srgbClr val="0B5E54"/>
           </a:solidFill>
           <a:ln>
             <a:noFill/>
@@ -8401,20 +9986,60 @@
       </p:sp>
       <p:sp>
         <p:nvSpPr>
-          <p:cNvPr id="3" name="Rectangle 2"/>
+          <p:cNvPr id="3" name="TextBox 2"/>
+          <p:cNvSpPr txBox="1"/>
+          <p:nvPr/>
+        </p:nvSpPr>
+        <p:spPr>
+          <a:xfrm>
+            <a:off x="475488" y="146304"/>
+            <a:ext cx="8229600" cy="292608"/>
+          </a:xfrm>
+          <a:prstGeom prst="rect">
+            <a:avLst/>
+          </a:prstGeom>
+          <a:noFill/>
+        </p:spPr>
+        <p:txBody>
+          <a:bodyPr wrap="square" anchor="t" lIns="0" rIns="0" tIns="0" bIns="0">
+            <a:spAutoFit/>
+          </a:bodyPr>
+          <a:lstStyle/>
+          <a:p>
+            <a:pPr algn="l">
+              <a:lnSpc>
+                <a:spcPct val="114000"/>
+              </a:lnSpc>
+            </a:pPr>
+            <a:r>
+              <a:rPr sz="1100" b="1">
+                <a:solidFill>
+                  <a:srgbClr val="0B5E54"/>
+                </a:solidFill>
+              </a:rPr>
+              <a:t>工单实战 · 运行留证</a:t>
+            </a:r>
+          </a:p>
+        </p:txBody>
+      </p:sp>
+      <p:sp>
+        <p:nvSpPr>
+          <p:cNvPr id="4" name="Rounded Rectangle 3"/>
           <p:cNvSpPr/>
           <p:nvPr/>
         </p:nvSpPr>
         <p:spPr>
           <a:xfrm>
-            <a:off x="0" y="1150000"/>
-            <a:ext cx="2600000" cy="70000"/>
-          </a:xfrm>
-          <a:prstGeom prst="rect">
-            <a:avLst/>
+            <a:off x="475488" y="475488"/>
+            <a:ext cx="2027872" cy="310896"/>
+          </a:xfrm>
+          <a:prstGeom prst="roundRect">
+            <a:avLst>
+              <a:gd name="adj" fmla="val 50000"/>
+            </a:avLst>
           </a:prstGeom>
           <a:solidFill>
-            <a:srgbClr val="F5670F"/>
+            <a:srgbClr val="C9A227"/>
           </a:solidFill>
           <a:ln>
             <a:noFill/>
@@ -8445,14 +10070,14 @@
       </p:sp>
       <p:sp>
         <p:nvSpPr>
-          <p:cNvPr id="4" name="TextBox 3"/>
+          <p:cNvPr id="5" name="TextBox 4"/>
           <p:cNvSpPr txBox="1"/>
           <p:nvPr/>
         </p:nvSpPr>
         <p:spPr>
           <a:xfrm>
-            <a:off x="700000" y="300000"/>
-            <a:ext cx="10792000" cy="700000"/>
+            <a:off x="475488" y="475488"/>
+            <a:ext cx="2027872" cy="310896"/>
           </a:xfrm>
           <a:prstGeom prst="rect">
             <a:avLst/>
@@ -8460,47 +10085,83 @@
           <a:noFill/>
         </p:spPr>
         <p:txBody>
-          <a:bodyPr wrap="square" anchor="t">
+          <a:bodyPr wrap="square" anchor="ctr" lIns="0" rIns="0" tIns="0" bIns="0">
             <a:spAutoFit/>
           </a:bodyPr>
           <a:lstStyle/>
           <a:p>
+            <a:pPr algn="ctr">
+              <a:lnSpc>
+                <a:spcPct val="114000"/>
+              </a:lnSpc>
+            </a:pPr>
+            <a:r>
+              <a:rPr sz="1050" b="1">
+                <a:solidFill>
+                  <a:srgbClr val="FFFFFF"/>
+                </a:solidFill>
+              </a:rPr>
+              <a:t>SCREENSHOT · 终端逐字截图</a:t>
+            </a:r>
+          </a:p>
+        </p:txBody>
+      </p:sp>
+      <p:sp>
+        <p:nvSpPr>
+          <p:cNvPr id="6" name="TextBox 5"/>
+          <p:cNvSpPr txBox="1"/>
+          <p:nvPr/>
+        </p:nvSpPr>
+        <p:spPr>
+          <a:xfrm>
+            <a:off x="475488" y="859536"/>
+            <a:ext cx="11237976" cy="502920"/>
+          </a:xfrm>
+          <a:prstGeom prst="rect">
+            <a:avLst/>
+          </a:prstGeom>
+          <a:noFill/>
+        </p:spPr>
+        <p:txBody>
+          <a:bodyPr wrap="square" anchor="t" lIns="0" rIns="0" tIns="0" bIns="0">
+            <a:spAutoFit/>
+          </a:bodyPr>
+          <a:lstStyle/>
+          <a:p>
             <a:pPr algn="l">
               <a:lnSpc>
-                <a:spcPct val="110000"/>
+                <a:spcPct val="114000"/>
               </a:lnSpc>
-              <a:spcAft>
-                <a:spcPts val="600"/>
-              </a:spcAft>
             </a:pPr>
             <a:r>
-              <a:rPr sz="2400" b="1">
-                <a:solidFill>
-                  <a:srgbClr val="FFFFFF"/>
-                </a:solidFill>
-                <a:latin typeface="微软雅黑"/>
+              <a:rPr sz="2200" b="1">
+                <a:solidFill>
+                  <a:srgbClr val="1B2B28"/>
+                </a:solidFill>
               </a:rPr>
-              <a:t>下次课预告（第6周）</a:t>
-            </a:r>
-          </a:p>
-        </p:txBody>
-      </p:sp>
-      <p:sp>
-        <p:nvSpPr>
-          <p:cNvPr id="5" name="Rectangle 4"/>
+              <a:t>P3.1/P3.2 · 测试全绿证据＋pytest 全量实跑</a:t>
+            </a:r>
+          </a:p>
+        </p:txBody>
+      </p:sp>
+      <p:sp>
+        <p:nvSpPr>
+          <p:cNvPr id="7" name="Rounded Rectangle 6"/>
           <p:cNvSpPr/>
           <p:nvPr/>
         </p:nvSpPr>
         <p:spPr>
           <a:xfrm>
-            <a:off x="760000" y="1900000"/>
-            <a:ext cx="10900000" cy="1600000"/>
-          </a:xfrm>
-          <a:prstGeom prst="rect">
-            <a:avLst/>
+            <a:off x="475488" y="1389888"/>
+            <a:ext cx="1234440" cy="27432"/>
+          </a:xfrm>
+          <a:prstGeom prst="roundRect">
+            <a:avLst>
+              <a:gd name="adj" fmla="val 50000"/>
+            </a:avLst>
           </a:prstGeom>
           <a:solidFill>
-            <a:srgbClr val="F3F6FD"/>
+            <a:srgbClr val="C9A227"/>
           </a:solidFill>
           <a:ln>
             <a:noFill/>
@@ -8531,20 +10192,22 @@
       </p:sp>
       <p:sp>
         <p:nvSpPr>
-          <p:cNvPr id="6" name="Rectangle 5"/>
+          <p:cNvPr id="8" name="Rounded Rectangle 7"/>
           <p:cNvSpPr/>
           <p:nvPr/>
         </p:nvSpPr>
         <p:spPr>
           <a:xfrm>
-            <a:off x="760000" y="1900000"/>
-            <a:ext cx="150000" cy="1600000"/>
-          </a:xfrm>
-          <a:prstGeom prst="rect">
-            <a:avLst/>
+            <a:off x="475488" y="6419088"/>
+            <a:ext cx="11237976" cy="10972"/>
+          </a:xfrm>
+          <a:prstGeom prst="roundRect">
+            <a:avLst>
+              <a:gd name="adj" fmla="val 50000"/>
+            </a:avLst>
           </a:prstGeom>
           <a:solidFill>
-            <a:srgbClr val="F5670F"/>
+            <a:srgbClr val="E4F1EE"/>
           </a:solidFill>
           <a:ln>
             <a:noFill/>
@@ -8575,14 +10238,14 @@
       </p:sp>
       <p:sp>
         <p:nvSpPr>
-          <p:cNvPr id="7" name="TextBox 6"/>
+          <p:cNvPr id="9" name="TextBox 8"/>
           <p:cNvSpPr txBox="1"/>
           <p:nvPr/>
         </p:nvSpPr>
         <p:spPr>
           <a:xfrm>
-            <a:off x="1020000" y="2050000"/>
-            <a:ext cx="10500000" cy="1400000"/>
+            <a:off x="475488" y="6455664"/>
+            <a:ext cx="7315200" cy="292608"/>
           </a:xfrm>
           <a:prstGeom prst="rect">
             <a:avLst/>
@@ -8590,60 +10253,137 @@
           <a:noFill/>
         </p:spPr>
         <p:txBody>
-          <a:bodyPr wrap="square" anchor="t">
+          <a:bodyPr wrap="square" anchor="t" lIns="0" rIns="0" tIns="0" bIns="0">
             <a:spAutoFit/>
           </a:bodyPr>
           <a:lstStyle/>
           <a:p>
             <a:pPr algn="l">
               <a:lnSpc>
-                <a:spcPct val="110000"/>
+                <a:spcPct val="114000"/>
               </a:lnSpc>
-              <a:spcAft>
-                <a:spcPts val="600"/>
-              </a:spcAft>
             </a:pPr>
             <a:r>
-              <a:rPr sz="1700" b="1">
-                <a:solidFill>
-                  <a:srgbClr val="010328"/>
-                </a:solidFill>
-                <a:latin typeface="微软雅黑"/>
+              <a:rPr sz="900" b="0">
+                <a:solidFill>
+                  <a:srgbClr val="5C6E6A"/>
+                </a:solidFill>
               </a:rPr>
-              <a:t>主题: 三线程骨架贯通(采集/订阅/处理)——应用：见工</a:t>
-            </a:r>
-          </a:p>
+              <a:t>两江智造集团 · Python程序设计（项目实战）</a:t>
+            </a:r>
+          </a:p>
+        </p:txBody>
+      </p:sp>
+      <p:sp>
+        <p:nvSpPr>
+          <p:cNvPr id="10" name="TextBox 9"/>
+          <p:cNvSpPr txBox="1"/>
+          <p:nvPr/>
+        </p:nvSpPr>
+        <p:spPr>
+          <a:xfrm>
+            <a:off x="10597896" y="6537960"/>
+            <a:ext cx="996696" cy="301752"/>
+          </a:xfrm>
+          <a:prstGeom prst="rect">
+            <a:avLst/>
+          </a:prstGeom>
+          <a:noFill/>
+        </p:spPr>
+        <p:txBody>
+          <a:bodyPr wrap="square" anchor="t" lIns="0" rIns="0" tIns="0" bIns="0">
+            <a:spAutoFit/>
+          </a:bodyPr>
+          <a:lstStyle/>
+          <a:p>
+            <a:pPr algn="r">
+              <a:lnSpc>
+                <a:spcPct val="114000"/>
+              </a:lnSpc>
+            </a:pPr>
+            <a:r>
+              <a:rPr sz="1000" b="0">
+                <a:solidFill>
+                  <a:srgbClr val="8A97B5"/>
+                </a:solidFill>
+              </a:rPr>
+              <a:t>7 / 10</a:t>
+            </a:r>
+          </a:p>
+        </p:txBody>
+      </p:sp>
+      <p:sp>
+        <p:nvSpPr>
+          <p:cNvPr id="11" name="TextBox 10"/>
+          <p:cNvSpPr txBox="1"/>
+          <p:nvPr/>
+        </p:nvSpPr>
+        <p:spPr>
+          <a:xfrm>
+            <a:off x="475488" y="1517904"/>
+            <a:ext cx="11237976" cy="237744"/>
+          </a:xfrm>
+          <a:prstGeom prst="rect">
+            <a:avLst/>
+          </a:prstGeom>
+          <a:noFill/>
+        </p:spPr>
+        <p:txBody>
+          <a:bodyPr wrap="square" anchor="t" lIns="0" rIns="0" tIns="0" bIns="0">
+            <a:spAutoFit/>
+          </a:bodyPr>
+          <a:lstStyle/>
           <a:p>
             <a:pPr algn="l">
               <a:lnSpc>
-                <a:spcPct val="110000"/>
+                <a:spcPct val="114000"/>
               </a:lnSpc>
-              <a:spcAft>
-                <a:spcPts val="600"/>
-              </a:spcAft>
             </a:pPr>
             <a:r>
-              <a:rPr sz="1300" b="0">
-                <a:solidFill>
-                  <a:srgbClr val="44546A"/>
-                </a:solidFill>
-                <a:latin typeface="微软雅黑"/>
+              <a:rPr sz="1000" b="0">
+                <a:solidFill>
+                  <a:srgbClr val="5C6E6A"/>
+                </a:solidFill>
               </a:rPr>
-              <a:t>预习快问: 为什么‘共享list.append’有隐患而Queue安全？</a:t>
-            </a:r>
-          </a:p>
-        </p:txBody>
-      </p:sp>
-      <p:sp>
-        <p:nvSpPr>
-          <p:cNvPr id="8" name="TextBox 7"/>
+              <a:t>pytest 全量实跑：本机真实运行输出，非示例、非节选</a:t>
+            </a:r>
+          </a:p>
+        </p:txBody>
+      </p:sp>
+      <p:pic>
+        <p:nvPicPr>
+          <p:cNvPr id="12" name="Picture 11" descr="p33_kpi_cockpit_pytest.png"/>
+          <p:cNvPicPr>
+            <a:picLocks noChangeAspect="1"/>
+          </p:cNvPicPr>
+          <p:nvPr/>
+        </p:nvPicPr>
+        <p:blipFill>
+          <a:blip r:embed="rId2"/>
+          <a:stretch>
+            <a:fillRect/>
+          </a:stretch>
+        </p:blipFill>
+        <p:spPr>
+          <a:xfrm>
+            <a:off x="475488" y="2265275"/>
+            <a:ext cx="11237976" cy="1989122"/>
+          </a:xfrm>
+          <a:prstGeom prst="rect">
+            <a:avLst/>
+          </a:prstGeom>
+        </p:spPr>
+      </p:pic>
+      <p:sp>
+        <p:nvSpPr>
+          <p:cNvPr id="13" name="TextBox 12"/>
           <p:cNvSpPr txBox="1"/>
           <p:nvPr/>
         </p:nvSpPr>
         <p:spPr>
           <a:xfrm>
-            <a:off x="760000" y="3900000"/>
-            <a:ext cx="10900000" cy="900000"/>
+            <a:off x="475488" y="4290972"/>
+            <a:ext cx="11237976" cy="256032"/>
           </a:xfrm>
           <a:prstGeom prst="rect">
             <a:avLst/>
@@ -8651,46 +10391,183 @@
           <a:noFill/>
         </p:spPr>
         <p:txBody>
-          <a:bodyPr wrap="square" anchor="t">
+          <a:bodyPr wrap="square" anchor="t" lIns="0" rIns="0" tIns="0" bIns="0">
             <a:spAutoFit/>
           </a:bodyPr>
           <a:lstStyle/>
           <a:p>
             <a:pPr algn="l">
               <a:lnSpc>
-                <a:spcPct val="110000"/>
+                <a:spcPct val="114000"/>
               </a:lnSpc>
-              <a:spcAft>
-                <a:spcPts val="600"/>
-              </a:spcAft>
             </a:pPr>
             <a:r>
-              <a:rPr sz="1400" b="1">
-                <a:solidFill>
-                  <a:srgbClr val="0545E8"/>
-                </a:solidFill>
-                <a:latin typeface="微软雅黑"/>
+              <a:rPr sz="850" b="0">
+                <a:solidFill>
+                  <a:srgbClr val="5C6E6A"/>
+                </a:solidFill>
               </a:rPr>
-              <a:t>课前完成：导学单 + 预习自测 + starter环境自检</a:t>
-            </a:r>
-          </a:p>
+              <a:t>▲ pytest：270 passed in 18.75s（本机实跑，非示例）</a:t>
+            </a:r>
+          </a:p>
+        </p:txBody>
+      </p:sp>
+      <p:sp>
+        <p:nvSpPr>
+          <p:cNvPr id="14" name="Rounded Rectangle 13"/>
+          <p:cNvSpPr/>
+          <p:nvPr/>
+        </p:nvSpPr>
+        <p:spPr>
+          <a:xfrm>
+            <a:off x="475488" y="4656732"/>
+            <a:ext cx="11237976" cy="822960"/>
+          </a:xfrm>
+          <a:prstGeom prst="roundRect">
+            <a:avLst>
+              <a:gd name="adj" fmla="val 5000"/>
+            </a:avLst>
+          </a:prstGeom>
+          <a:solidFill>
+            <a:srgbClr val="E4F1EE"/>
+          </a:solidFill>
+          <a:ln>
+            <a:noFill/>
+          </a:ln>
+          <a:effectLst/>
+        </p:spPr>
+        <p:style>
+          <a:lnRef idx="1">
+            <a:schemeClr val="accent1"/>
+          </a:lnRef>
+          <a:fillRef idx="3">
+            <a:schemeClr val="accent1"/>
+          </a:fillRef>
+          <a:effectRef idx="2">
+            <a:schemeClr val="accent1"/>
+          </a:effectRef>
+          <a:fontRef idx="minor">
+            <a:schemeClr val="lt1"/>
+          </a:fontRef>
+        </p:style>
+        <p:txBody>
+          <a:bodyPr rtlCol="0" anchor="ctr"/>
+          <a:lstStyle/>
+          <a:p>
+            <a:pPr algn="ctr"/>
+          </a:p>
+        </p:txBody>
+      </p:sp>
+      <p:sp>
+        <p:nvSpPr>
+          <p:cNvPr id="15" name="Rounded Rectangle 14"/>
+          <p:cNvSpPr/>
+          <p:nvPr/>
+        </p:nvSpPr>
+        <p:spPr>
+          <a:xfrm>
+            <a:off x="475488" y="4656732"/>
+            <a:ext cx="54864" cy="822960"/>
+          </a:xfrm>
+          <a:prstGeom prst="roundRect">
+            <a:avLst>
+              <a:gd name="adj" fmla="val 50000"/>
+            </a:avLst>
+          </a:prstGeom>
+          <a:solidFill>
+            <a:srgbClr val="C9A227"/>
+          </a:solidFill>
+          <a:ln>
+            <a:noFill/>
+          </a:ln>
+          <a:effectLst/>
+        </p:spPr>
+        <p:style>
+          <a:lnRef idx="1">
+            <a:schemeClr val="accent1"/>
+          </a:lnRef>
+          <a:fillRef idx="3">
+            <a:schemeClr val="accent1"/>
+          </a:fillRef>
+          <a:effectRef idx="2">
+            <a:schemeClr val="accent1"/>
+          </a:effectRef>
+          <a:fontRef idx="minor">
+            <a:schemeClr val="lt1"/>
+          </a:fontRef>
+        </p:style>
+        <p:txBody>
+          <a:bodyPr rtlCol="0" anchor="ctr"/>
+          <a:lstStyle/>
+          <a:p>
+            <a:pPr algn="ctr"/>
+          </a:p>
+        </p:txBody>
+      </p:sp>
+      <p:sp>
+        <p:nvSpPr>
+          <p:cNvPr id="16" name="TextBox 15"/>
+          <p:cNvSpPr txBox="1"/>
+          <p:nvPr/>
+        </p:nvSpPr>
+        <p:spPr>
+          <a:xfrm>
+            <a:off x="676656" y="4739028"/>
+            <a:ext cx="10908792" cy="658368"/>
+          </a:xfrm>
+          <a:prstGeom prst="rect">
+            <a:avLst/>
+          </a:prstGeom>
+          <a:noFill/>
+        </p:spPr>
+        <p:txBody>
+          <a:bodyPr wrap="square" anchor="t" lIns="0" rIns="0" tIns="0" bIns="0">
+            <a:spAutoFit/>
+          </a:bodyPr>
+          <a:lstStyle/>
           <a:p>
             <a:pPr algn="l">
               <a:lnSpc>
-                <a:spcPct val="110000"/>
+                <a:spcPct val="126000"/>
               </a:lnSpc>
-              <a:spcAft>
-                <a:spcPts val="600"/>
-              </a:spcAft>
             </a:pPr>
             <a:r>
-              <a:rPr sz="1250" b="0">
-                <a:solidFill>
-                  <a:srgbClr val="44546A"/>
-                </a:solidFill>
-                <a:latin typeface="微软雅黑"/>
+              <a:rPr sz="850" b="0">
+                <a:solidFill>
+                  <a:srgbClr val="1B2B28"/>
+                </a:solidFill>
               </a:rPr>
-              <a:t>带着问题来上课——Predict先于Run</a:t>
+              <a:t>本项目四档只有一套阶梯口径（课堂 D/C/B/A 即工单及格/良好/优秀/超优），逐字实测见上一页截图；本页补的是测试全绿证据。</a:t>
+            </a:r>
+          </a:p>
+          <a:p>
+            <a:pPr algn="l">
+              <a:lnSpc>
+                <a:spcPct val="126000"/>
+              </a:lnSpc>
+            </a:pPr>
+            <a:r>
+              <a:rPr sz="850" b="0">
+                <a:solidFill>
+                  <a:srgbClr val="1B2B28"/>
+                </a:solidFill>
+              </a:rPr>
+              <a:t>复现：cd 工程化项目/p33_kpi_cockpit &amp;&amp; python -m pytest -q -o addopts=''</a:t>
+            </a:r>
+          </a:p>
+          <a:p>
+            <a:pPr algn="l">
+              <a:lnSpc>
+                <a:spcPct val="126000"/>
+              </a:lnSpc>
+            </a:pPr>
+            <a:r>
+              <a:rPr sz="850" b="0">
+                <a:solidFill>
+                  <a:srgbClr val="1B2B28"/>
+                </a:solidFill>
+              </a:rPr>
+              <a:t>工单提交：截图需含终端标题栏的文件名与完整输出，退出码 0 才算全绿。</a:t>
             </a:r>
           </a:p>
         </p:txBody>
@@ -8715,22 +10592,20 @@
       <p:grpSpPr/>
       <p:sp>
         <p:nvSpPr>
-          <p:cNvPr id="2" name="Rounded Rectangle 1"/>
+          <p:cNvPr id="2" name="Rectangle 1"/>
           <p:cNvSpPr/>
           <p:nvPr/>
         </p:nvSpPr>
         <p:spPr>
           <a:xfrm>
             <a:off x="0" y="0"/>
-            <a:ext cx="12191695" cy="64008"/>
-          </a:xfrm>
-          <a:prstGeom prst="roundRect">
-            <a:avLst>
-              <a:gd name="adj" fmla="val 50000"/>
-            </a:avLst>
+            <a:ext cx="12192000" cy="1150000"/>
+          </a:xfrm>
+          <a:prstGeom prst="rect">
+            <a:avLst/>
           </a:prstGeom>
           <a:solidFill>
-            <a:srgbClr val="0B5E54"/>
+            <a:srgbClr val="010328"/>
           </a:solidFill>
           <a:ln>
             <a:noFill/>
@@ -8761,60 +10636,20 @@
       </p:sp>
       <p:sp>
         <p:nvSpPr>
-          <p:cNvPr id="3" name="TextBox 2"/>
-          <p:cNvSpPr txBox="1"/>
-          <p:nvPr/>
-        </p:nvSpPr>
-        <p:spPr>
-          <a:xfrm>
-            <a:off x="475488" y="146304"/>
-            <a:ext cx="8229600" cy="292608"/>
-          </a:xfrm>
-          <a:prstGeom prst="rect">
-            <a:avLst/>
-          </a:prstGeom>
-          <a:noFill/>
-        </p:spPr>
-        <p:txBody>
-          <a:bodyPr wrap="square" anchor="t" lIns="0" rIns="0" tIns="0" bIns="0">
-            <a:spAutoFit/>
-          </a:bodyPr>
-          <a:lstStyle/>
-          <a:p>
-            <a:pPr algn="l">
-              <a:lnSpc>
-                <a:spcPct val="114000"/>
-              </a:lnSpc>
-            </a:pPr>
-            <a:r>
-              <a:rPr sz="1100" b="1">
-                <a:solidFill>
-                  <a:srgbClr val="0B5E54"/>
-                </a:solidFill>
-              </a:rPr>
-              <a:t>工单实战 · 本次实跑结果</a:t>
-            </a:r>
-          </a:p>
-        </p:txBody>
-      </p:sp>
-      <p:sp>
-        <p:nvSpPr>
-          <p:cNvPr id="4" name="Rounded Rectangle 3"/>
+          <p:cNvPr id="3" name="Rectangle 2"/>
           <p:cNvSpPr/>
           <p:nvPr/>
         </p:nvSpPr>
         <p:spPr>
           <a:xfrm>
-            <a:off x="475488" y="475488"/>
-            <a:ext cx="1881187" cy="310896"/>
-          </a:xfrm>
-          <a:prstGeom prst="roundRect">
-            <a:avLst>
-              <a:gd name="adj" fmla="val 50000"/>
-            </a:avLst>
+            <a:off x="0" y="1150000"/>
+            <a:ext cx="2600000" cy="70000"/>
+          </a:xfrm>
+          <a:prstGeom prst="rect">
+            <a:avLst/>
           </a:prstGeom>
           <a:solidFill>
-            <a:srgbClr val="C9A227"/>
+            <a:srgbClr val="F5670F"/>
           </a:solidFill>
           <a:ln>
             <a:noFill/>
@@ -8845,14 +10680,14 @@
       </p:sp>
       <p:sp>
         <p:nvSpPr>
-          <p:cNvPr id="5" name="TextBox 4"/>
+          <p:cNvPr id="4" name="TextBox 3"/>
           <p:cNvSpPr txBox="1"/>
           <p:nvPr/>
         </p:nvSpPr>
         <p:spPr>
           <a:xfrm>
-            <a:off x="475488" y="475488"/>
-            <a:ext cx="1881187" cy="310896"/>
+            <a:off x="700000" y="300000"/>
+            <a:ext cx="10792000" cy="700000"/>
           </a:xfrm>
           <a:prstGeom prst="rect">
             <a:avLst/>
@@ -8860,83 +10695,47 @@
           <a:noFill/>
         </p:spPr>
         <p:txBody>
-          <a:bodyPr wrap="square" anchor="ctr" lIns="0" rIns="0" tIns="0" bIns="0">
+          <a:bodyPr wrap="square" anchor="t">
             <a:spAutoFit/>
           </a:bodyPr>
           <a:lstStyle/>
           <a:p>
-            <a:pPr algn="ctr">
-              <a:lnSpc>
-                <a:spcPct val="114000"/>
-              </a:lnSpc>
-            </a:pPr>
-            <a:r>
-              <a:rPr sz="1050" b="1">
-                <a:solidFill>
-                  <a:srgbClr val="FFFFFF"/>
-                </a:solidFill>
-              </a:rPr>
-              <a:t>REAL RUN · 四档逐字实测</a:t>
-            </a:r>
-          </a:p>
-        </p:txBody>
-      </p:sp>
-      <p:sp>
-        <p:nvSpPr>
-          <p:cNvPr id="6" name="TextBox 5"/>
-          <p:cNvSpPr txBox="1"/>
-          <p:nvPr/>
-        </p:nvSpPr>
-        <p:spPr>
-          <a:xfrm>
-            <a:off x="475488" y="859536"/>
-            <a:ext cx="11237976" cy="502920"/>
-          </a:xfrm>
-          <a:prstGeom prst="rect">
-            <a:avLst/>
-          </a:prstGeom>
-          <a:noFill/>
-        </p:spPr>
-        <p:txBody>
-          <a:bodyPr wrap="square" anchor="t" lIns="0" rIns="0" tIns="0" bIns="0">
-            <a:spAutoFit/>
-          </a:bodyPr>
-          <a:lstStyle/>
-          <a:p>
             <a:pPr algn="l">
               <a:lnSpc>
-                <a:spcPct val="114000"/>
+                <a:spcPct val="110000"/>
               </a:lnSpc>
+              <a:spcAft>
+                <a:spcPts val="600"/>
+              </a:spcAft>
             </a:pPr>
             <a:r>
-              <a:rPr sz="2200" b="1">
-                <a:solidFill>
-                  <a:srgbClr val="1B2B28"/>
-                </a:solidFill>
+              <a:rPr sz="2400" b="1">
+                <a:solidFill>
+                  <a:srgbClr val="FFFFFF"/>
+                </a:solidFill>
+                <a:latin typeface="微软雅黑"/>
               </a:rPr>
-              <a:t>P3.1/P3.2 p33_kpi_cockpit：本次 D/C/B/A 四档实测</a:t>
-            </a:r>
-          </a:p>
-        </p:txBody>
-      </p:sp>
-      <p:sp>
-        <p:nvSpPr>
-          <p:cNvPr id="7" name="Rounded Rectangle 6"/>
+              <a:t>总结评价与课后任务</a:t>
+            </a:r>
+          </a:p>
+        </p:txBody>
+      </p:sp>
+      <p:sp>
+        <p:nvSpPr>
+          <p:cNvPr id="5" name="Rectangle 4"/>
           <p:cNvSpPr/>
           <p:nvPr/>
         </p:nvSpPr>
         <p:spPr>
           <a:xfrm>
-            <a:off x="475488" y="1389888"/>
-            <a:ext cx="1234440" cy="27432"/>
-          </a:xfrm>
-          <a:prstGeom prst="roundRect">
-            <a:avLst>
-              <a:gd name="adj" fmla="val 50000"/>
-            </a:avLst>
+            <a:off x="800000" y="1950000"/>
+            <a:ext cx="10600000" cy="1500000"/>
+          </a:xfrm>
+          <a:prstGeom prst="rect">
+            <a:avLst/>
           </a:prstGeom>
           <a:solidFill>
-            <a:srgbClr val="C9A227"/>
+            <a:srgbClr val="F3F6FD"/>
           </a:solidFill>
           <a:ln>
             <a:noFill/>
@@ -8967,22 +10766,285 @@
       </p:sp>
       <p:sp>
         <p:nvSpPr>
-          <p:cNvPr id="8" name="Rounded Rectangle 7"/>
+          <p:cNvPr id="6" name="TextBox 5"/>
+          <p:cNvSpPr txBox="1"/>
+          <p:nvPr/>
+        </p:nvSpPr>
+        <p:spPr>
+          <a:xfrm>
+            <a:off x="1000000" y="2050000"/>
+            <a:ext cx="10300000" cy="1400000"/>
+          </a:xfrm>
+          <a:prstGeom prst="rect">
+            <a:avLst/>
+          </a:prstGeom>
+          <a:noFill/>
+        </p:spPr>
+        <p:txBody>
+          <a:bodyPr wrap="square" anchor="t">
+            <a:spAutoFit/>
+          </a:bodyPr>
+          <a:lstStyle/>
+          <a:p>
+            <a:pPr algn="l">
+              <a:lnSpc>
+                <a:spcPct val="110000"/>
+              </a:lnSpc>
+              <a:spcAft>
+                <a:spcPts val="600"/>
+              </a:spcAft>
+            </a:pPr>
+            <a:r>
+              <a:rPr sz="1500" b="1">
+                <a:solidFill>
+                  <a:srgbClr val="0545E8"/>
+                </a:solidFill>
+                <a:latin typeface="微软雅黑"/>
+              </a:rPr>
+              <a:t>评价（10分钟）：</a:t>
+            </a:r>
+          </a:p>
+          <a:p>
+            <a:pPr algn="l">
+              <a:lnSpc>
+                <a:spcPct val="110000"/>
+              </a:lnSpc>
+              <a:spcAft>
+                <a:spcPts val="600"/>
+              </a:spcAft>
+            </a:pPr>
+            <a:r>
+              <a:rPr sz="1400" b="0">
+                <a:solidFill>
+                  <a:srgbClr val="010328"/>
+                </a:solidFill>
+                <a:latin typeface="微软雅黑"/>
+              </a:rPr>
+              <a:t>按D/C/B/A量表当堂评分；工单24小时内反馈评语与改进建议。</a:t>
+            </a:r>
+          </a:p>
+        </p:txBody>
+      </p:sp>
+      <p:sp>
+        <p:nvSpPr>
+          <p:cNvPr id="7" name="TextBox 6"/>
+          <p:cNvSpPr txBox="1"/>
+          <p:nvPr/>
+        </p:nvSpPr>
+        <p:spPr>
+          <a:xfrm>
+            <a:off x="850000" y="3700000"/>
+            <a:ext cx="10600000" cy="700000"/>
+          </a:xfrm>
+          <a:prstGeom prst="rect">
+            <a:avLst/>
+          </a:prstGeom>
+          <a:noFill/>
+        </p:spPr>
+        <p:txBody>
+          <a:bodyPr wrap="square" anchor="t">
+            <a:spAutoFit/>
+          </a:bodyPr>
+          <a:lstStyle/>
+          <a:p>
+            <a:pPr algn="l">
+              <a:lnSpc>
+                <a:spcPct val="120000"/>
+              </a:lnSpc>
+              <a:spcAft>
+                <a:spcPts val="600"/>
+              </a:spcAft>
+            </a:pPr>
+            <a:r>
+              <a:rPr sz="1400" b="1">
+                <a:solidFill>
+                  <a:srgbClr val="F5670F"/>
+                </a:solidFill>
+                <a:latin typeface="微软雅黑"/>
+              </a:rPr>
+              <a:t>1. </a:t>
+            </a:r>
+            <a:r>
+              <a:rPr sz="1400" b="0">
+                <a:solidFill>
+                  <a:srgbClr val="010328"/>
+                </a:solidFill>
+                <a:latin typeface="微软雅黑"/>
+              </a:rPr>
+              <a:t>1. 完成工单P3.1《产线KPI实时仪表盘》：及格标准5个KPI+时间筛选可用；优秀标准≥7指标+钻取交互+加载&lt;2秒；</a:t>
+            </a:r>
+          </a:p>
+        </p:txBody>
+      </p:sp>
+      <p:sp>
+        <p:nvSpPr>
+          <p:cNvPr id="8" name="TextBox 7"/>
+          <p:cNvSpPr txBox="1"/>
+          <p:nvPr/>
+        </p:nvSpPr>
+        <p:spPr>
+          <a:xfrm>
+            <a:off x="850000" y="4420000"/>
+            <a:ext cx="10600000" cy="700000"/>
+          </a:xfrm>
+          <a:prstGeom prst="rect">
+            <a:avLst/>
+          </a:prstGeom>
+          <a:noFill/>
+        </p:spPr>
+        <p:txBody>
+          <a:bodyPr wrap="square" anchor="t">
+            <a:spAutoFit/>
+          </a:bodyPr>
+          <a:lstStyle/>
+          <a:p>
+            <a:pPr algn="l">
+              <a:lnSpc>
+                <a:spcPct val="120000"/>
+              </a:lnSpc>
+              <a:spcAft>
+                <a:spcPts val="600"/>
+              </a:spcAft>
+            </a:pPr>
+            <a:r>
+              <a:rPr sz="1400" b="1">
+                <a:solidFill>
+                  <a:srgbClr val="F5670F"/>
+                </a:solidFill>
+                <a:latin typeface="微软雅黑"/>
+              </a:rPr>
+              <a:t>2. </a:t>
+            </a:r>
+            <a:r>
+              <a:rPr sz="1400" b="0">
+                <a:solidFill>
+                  <a:srgbClr val="010328"/>
+                </a:solidFill>
+                <a:latin typeface="微软雅黑"/>
+              </a:rPr>
+              <a:t>2. 完成工单P3.2《每日生产分析报告系统》：及格标准四部分完整+PDF正确；优秀标准异常自动识别+&lt;1分钟+美观度≥4/5；</a:t>
+            </a:r>
+          </a:p>
+        </p:txBody>
+      </p:sp>
+      <p:sp>
+        <p:nvSpPr>
+          <p:cNvPr id="9" name="TextBox 8"/>
+          <p:cNvSpPr txBox="1"/>
+          <p:nvPr/>
+        </p:nvSpPr>
+        <p:spPr>
+          <a:xfrm>
+            <a:off x="850000" y="5140000"/>
+            <a:ext cx="10600000" cy="700000"/>
+          </a:xfrm>
+          <a:prstGeom prst="rect">
+            <a:avLst/>
+          </a:prstGeom>
+          <a:noFill/>
+        </p:spPr>
+        <p:txBody>
+          <a:bodyPr wrap="square" anchor="t">
+            <a:spAutoFit/>
+          </a:bodyPr>
+          <a:lstStyle/>
+          <a:p>
+            <a:pPr algn="l">
+              <a:lnSpc>
+                <a:spcPct val="120000"/>
+              </a:lnSpc>
+              <a:spcAft>
+                <a:spcPts val="600"/>
+              </a:spcAft>
+            </a:pPr>
+            <a:r>
+              <a:rPr sz="1400" b="1">
+                <a:solidFill>
+                  <a:srgbClr val="F5670F"/>
+                </a:solidFill>
+                <a:latin typeface="微软雅黑"/>
+              </a:rPr>
+              <a:t>3. </a:t>
+            </a:r>
+            <a:r>
+              <a:rPr sz="1400" b="0">
+                <a:solidFill>
+                  <a:srgbClr val="010328"/>
+                </a:solidFill>
+                <a:latin typeface="微软雅黑"/>
+              </a:rPr>
+              <a:t>3. 预习TCP/IP与MQTT协议基础。</a:t>
+            </a:r>
+          </a:p>
+        </p:txBody>
+      </p:sp>
+      <p:sp>
+        <p:nvSpPr>
+          <p:cNvPr id="10" name="TextBox 9"/>
+          <p:cNvSpPr txBox="1"/>
+          <p:nvPr/>
+        </p:nvSpPr>
+        <p:spPr>
+          <a:xfrm>
+            <a:off x="850000" y="5960000"/>
+            <a:ext cx="10600000" cy="500000"/>
+          </a:xfrm>
+          <a:prstGeom prst="rect">
+            <a:avLst/>
+          </a:prstGeom>
+          <a:noFill/>
+        </p:spPr>
+        <p:txBody>
+          <a:bodyPr wrap="square" anchor="t">
+            <a:spAutoFit/>
+          </a:bodyPr>
+          <a:lstStyle/>
+          <a:p>
+            <a:pPr algn="l">
+              <a:lnSpc>
+                <a:spcPct val="110000"/>
+              </a:lnSpc>
+              <a:spcAft>
+                <a:spcPts val="600"/>
+              </a:spcAft>
+            </a:pPr>
+            <a:r>
+              <a:rPr sz="1300" b="1">
+                <a:solidFill>
+                  <a:srgbClr val="0475B6"/>
+                </a:solidFill>
+                <a:latin typeface="微软雅黑"/>
+              </a:rPr>
+              <a:t>下次课预告：</a:t>
+            </a:r>
+            <a:r>
+              <a:rPr sz="1300" b="0">
+                <a:solidFill>
+                  <a:srgbClr val="44546A"/>
+                </a:solidFill>
+                <a:latin typeface="微软雅黑"/>
+              </a:rPr>
+              <a:t>见下次课工单任务书</a:t>
+            </a:r>
+          </a:p>
+        </p:txBody>
+      </p:sp>
+      <p:sp>
+        <p:nvSpPr>
+          <p:cNvPr id="11" name="Rectangle 10"/>
           <p:cNvSpPr/>
           <p:nvPr/>
         </p:nvSpPr>
         <p:spPr>
           <a:xfrm>
-            <a:off x="475488" y="6419088"/>
-            <a:ext cx="11237976" cy="10972"/>
-          </a:xfrm>
-          <a:prstGeom prst="roundRect">
-            <a:avLst>
-              <a:gd name="adj" fmla="val 50000"/>
-            </a:avLst>
+            <a:off x="500000" y="6500000"/>
+            <a:ext cx="11100000" cy="20000"/>
+          </a:xfrm>
+          <a:prstGeom prst="rect">
+            <a:avLst/>
           </a:prstGeom>
           <a:solidFill>
-            <a:srgbClr val="E4F1EE"/>
+            <a:srgbClr val="C9D4EE"/>
           </a:solidFill>
           <a:ln>
             <a:noFill/>
@@ -9013,14 +11075,14 @@
       </p:sp>
       <p:sp>
         <p:nvSpPr>
-          <p:cNvPr id="9" name="TextBox 8"/>
+          <p:cNvPr id="12" name="TextBox 11"/>
           <p:cNvSpPr txBox="1"/>
           <p:nvPr/>
         </p:nvSpPr>
         <p:spPr>
           <a:xfrm>
-            <a:off x="475488" y="6455664"/>
-            <a:ext cx="7315200" cy="292608"/>
+            <a:off x="500000" y="6540000"/>
+            <a:ext cx="7000000" cy="300000"/>
           </a:xfrm>
           <a:prstGeom prst="rect">
             <a:avLst/>
@@ -9028,21 +11090,25 @@
           <a:noFill/>
         </p:spPr>
         <p:txBody>
-          <a:bodyPr wrap="square" anchor="t" lIns="0" rIns="0" tIns="0" bIns="0">
+          <a:bodyPr wrap="square" anchor="t">
             <a:spAutoFit/>
           </a:bodyPr>
           <a:lstStyle/>
           <a:p>
             <a:pPr algn="l">
               <a:lnSpc>
-                <a:spcPct val="114000"/>
+                <a:spcPct val="110000"/>
               </a:lnSpc>
+              <a:spcAft>
+                <a:spcPts val="600"/>
+              </a:spcAft>
             </a:pPr>
             <a:r>
-              <a:rPr sz="900" b="0">
-                <a:solidFill>
-                  <a:srgbClr val="5C6E6A"/>
-                </a:solidFill>
+              <a:rPr sz="1000" b="0">
+                <a:solidFill>
+                  <a:srgbClr val="8A97B5"/>
+                </a:solidFill>
+                <a:latin typeface="微软雅黑"/>
               </a:rPr>
               <a:t>两江智造集团 · Python程序设计（项目实战）</a:t>
             </a:r>
@@ -9051,14 +11117,14 @@
       </p:sp>
       <p:sp>
         <p:nvSpPr>
-          <p:cNvPr id="10" name="TextBox 9"/>
+          <p:cNvPr id="13" name="TextBox 12"/>
           <p:cNvSpPr txBox="1"/>
           <p:nvPr/>
         </p:nvSpPr>
         <p:spPr>
           <a:xfrm>
-            <a:off x="10597896" y="6537960"/>
-            <a:ext cx="996696" cy="301752"/>
+            <a:off x="10600000" y="6540000"/>
+            <a:ext cx="1000000" cy="300000"/>
           </a:xfrm>
           <a:prstGeom prst="rect">
             <a:avLst/>
@@ -9066,1599 +11132,27 @@
           <a:noFill/>
         </p:spPr>
         <p:txBody>
-          <a:bodyPr wrap="square" anchor="t" lIns="0" rIns="0" tIns="0" bIns="0">
+          <a:bodyPr wrap="square" anchor="t">
             <a:spAutoFit/>
           </a:bodyPr>
           <a:lstStyle/>
           <a:p>
             <a:pPr algn="r">
               <a:lnSpc>
-                <a:spcPct val="114000"/>
+                <a:spcPct val="110000"/>
               </a:lnSpc>
+              <a:spcAft>
+                <a:spcPts val="600"/>
+              </a:spcAft>
             </a:pPr>
             <a:r>
               <a:rPr sz="1000" b="0">
                 <a:solidFill>
                   <a:srgbClr val="8A97B5"/>
                 </a:solidFill>
+                <a:latin typeface="微软雅黑"/>
               </a:rPr>
-              <a:t>5 / 10</a:t>
-            </a:r>
-          </a:p>
-        </p:txBody>
-      </p:sp>
-      <p:sp>
-        <p:nvSpPr>
-          <p:cNvPr id="11" name="Rounded Rectangle 10"/>
-          <p:cNvSpPr/>
-          <p:nvPr/>
-        </p:nvSpPr>
-        <p:spPr>
-          <a:xfrm>
-            <a:off x="475488" y="1554480"/>
-            <a:ext cx="11237976" cy="825497"/>
-          </a:xfrm>
-          <a:prstGeom prst="roundRect">
-            <a:avLst>
-              <a:gd name="adj" fmla="val 6000"/>
-            </a:avLst>
-          </a:prstGeom>
-          <a:solidFill>
-            <a:srgbClr val="FFFFFF"/>
-          </a:solidFill>
-          <a:ln w="9525">
-            <a:solidFill>
-              <a:srgbClr val="E4F1EE"/>
-            </a:solidFill>
-          </a:ln>
-          <a:effectLst/>
-        </p:spPr>
-        <p:style>
-          <a:lnRef idx="1">
-            <a:schemeClr val="accent1"/>
-          </a:lnRef>
-          <a:fillRef idx="3">
-            <a:schemeClr val="accent1"/>
-          </a:fillRef>
-          <a:effectRef idx="2">
-            <a:schemeClr val="accent1"/>
-          </a:effectRef>
-          <a:fontRef idx="minor">
-            <a:schemeClr val="lt1"/>
-          </a:fontRef>
-        </p:style>
-        <p:txBody>
-          <a:bodyPr rtlCol="0" anchor="ctr"/>
-          <a:lstStyle/>
-          <a:p>
-            <a:pPr algn="ctr"/>
-          </a:p>
-        </p:txBody>
-      </p:sp>
-      <p:sp>
-        <p:nvSpPr>
-          <p:cNvPr id="12" name="Rounded Rectangle 11"/>
-          <p:cNvSpPr/>
-          <p:nvPr/>
-        </p:nvSpPr>
-        <p:spPr>
-          <a:xfrm>
-            <a:off x="475488" y="1554480"/>
-            <a:ext cx="54864" cy="825497"/>
-          </a:xfrm>
-          <a:prstGeom prst="roundRect">
-            <a:avLst>
-              <a:gd name="adj" fmla="val 50000"/>
-            </a:avLst>
-          </a:prstGeom>
-          <a:solidFill>
-            <a:srgbClr val="5C6E6A"/>
-          </a:solidFill>
-          <a:ln>
-            <a:noFill/>
-          </a:ln>
-          <a:effectLst/>
-        </p:spPr>
-        <p:style>
-          <a:lnRef idx="1">
-            <a:schemeClr val="accent1"/>
-          </a:lnRef>
-          <a:fillRef idx="3">
-            <a:schemeClr val="accent1"/>
-          </a:fillRef>
-          <a:effectRef idx="2">
-            <a:schemeClr val="accent1"/>
-          </a:effectRef>
-          <a:fontRef idx="minor">
-            <a:schemeClr val="lt1"/>
-          </a:fontRef>
-        </p:style>
-        <p:txBody>
-          <a:bodyPr rtlCol="0" anchor="ctr"/>
-          <a:lstStyle/>
-          <a:p>
-            <a:pPr algn="ctr"/>
-          </a:p>
-        </p:txBody>
-      </p:sp>
-      <p:sp>
-        <p:nvSpPr>
-          <p:cNvPr id="13" name="Rounded Rectangle 12"/>
-          <p:cNvSpPr/>
-          <p:nvPr/>
-        </p:nvSpPr>
-        <p:spPr>
-          <a:xfrm>
-            <a:off x="621792" y="1636776"/>
-            <a:ext cx="237744" cy="237744"/>
-          </a:xfrm>
-          <a:prstGeom prst="roundRect">
-            <a:avLst>
-              <a:gd name="adj" fmla="val 28000"/>
-            </a:avLst>
-          </a:prstGeom>
-          <a:solidFill>
-            <a:srgbClr val="5C6E6A"/>
-          </a:solidFill>
-          <a:ln>
-            <a:noFill/>
-          </a:ln>
-          <a:effectLst/>
-        </p:spPr>
-        <p:style>
-          <a:lnRef idx="1">
-            <a:schemeClr val="accent1"/>
-          </a:lnRef>
-          <a:fillRef idx="3">
-            <a:schemeClr val="accent1"/>
-          </a:fillRef>
-          <a:effectRef idx="2">
-            <a:schemeClr val="accent1"/>
-          </a:effectRef>
-          <a:fontRef idx="minor">
-            <a:schemeClr val="lt1"/>
-          </a:fontRef>
-        </p:style>
-        <p:txBody>
-          <a:bodyPr rtlCol="0" anchor="ctr"/>
-          <a:lstStyle/>
-          <a:p>
-            <a:pPr algn="ctr"/>
-          </a:p>
-        </p:txBody>
-      </p:sp>
-      <p:sp>
-        <p:nvSpPr>
-          <p:cNvPr id="14" name="TextBox 13"/>
-          <p:cNvSpPr txBox="1"/>
-          <p:nvPr/>
-        </p:nvSpPr>
-        <p:spPr>
-          <a:xfrm>
-            <a:off x="621792" y="1636776"/>
-            <a:ext cx="237744" cy="237744"/>
-          </a:xfrm>
-          <a:prstGeom prst="rect">
-            <a:avLst/>
-          </a:prstGeom>
-          <a:noFill/>
-        </p:spPr>
-        <p:txBody>
-          <a:bodyPr wrap="square" anchor="ctr" lIns="0" rIns="0" tIns="0" bIns="0">
-            <a:spAutoFit/>
-          </a:bodyPr>
-          <a:lstStyle/>
-          <a:p>
-            <a:pPr algn="ctr">
-              <a:lnSpc>
-                <a:spcPct val="114000"/>
-              </a:lnSpc>
-            </a:pPr>
-            <a:r>
-              <a:rPr sz="1000" b="1">
-                <a:solidFill>
-                  <a:srgbClr val="FFFFFF"/>
-                </a:solidFill>
-              </a:rPr>
-              <a:t>D</a:t>
-            </a:r>
-          </a:p>
-        </p:txBody>
-      </p:sp>
-      <p:sp>
-        <p:nvSpPr>
-          <p:cNvPr id="15" name="TextBox 14"/>
-          <p:cNvSpPr txBox="1"/>
-          <p:nvPr/>
-        </p:nvSpPr>
-        <p:spPr>
-          <a:xfrm>
-            <a:off x="932688" y="1618488"/>
-            <a:ext cx="8778240" cy="274320"/>
-          </a:xfrm>
-          <a:prstGeom prst="rect">
-            <a:avLst/>
-          </a:prstGeom>
-          <a:noFill/>
-        </p:spPr>
-        <p:txBody>
-          <a:bodyPr wrap="square" anchor="ctr" lIns="0" rIns="0" tIns="0" bIns="0">
-            <a:spAutoFit/>
-          </a:bodyPr>
-          <a:lstStyle/>
-          <a:p>
-            <a:pPr algn="l">
-              <a:lnSpc>
-                <a:spcPct val="114000"/>
-              </a:lnSpc>
-            </a:pPr>
-            <a:r>
-              <a:rPr sz="1050" b="1">
-                <a:solidFill>
-                  <a:srgbClr val="1B2B28"/>
-                </a:solidFill>
-              </a:rPr>
-              <a:t>及格</a:t>
-            </a:r>
-            <a:r>
-              <a:rPr sz="850" b="0">
-                <a:solidFill>
-                  <a:srgbClr val="5C6E6A"/>
-                </a:solidFill>
-              </a:rPr>
-              <a:t>   验收口径：</a:t>
-            </a:r>
-            <a:r>
-              <a:rPr sz="850" b="0">
-                <a:solidFill>
-                  <a:srgbClr val="5C6E6A"/>
-                </a:solidFill>
-              </a:rPr>
-              <a:t>KPI可用+时间筛选；日报四部分完整+PDF正确</a:t>
-            </a:r>
-          </a:p>
-        </p:txBody>
-      </p:sp>
-      <p:sp>
-        <p:nvSpPr>
-          <p:cNvPr id="16" name="Rounded Rectangle 15"/>
-          <p:cNvSpPr/>
-          <p:nvPr/>
-        </p:nvSpPr>
-        <p:spPr>
-          <a:xfrm>
-            <a:off x="11131803" y="1645920"/>
-            <a:ext cx="453644" cy="237744"/>
-          </a:xfrm>
-          <a:prstGeom prst="roundRect">
-            <a:avLst>
-              <a:gd name="adj" fmla="val 50000"/>
-            </a:avLst>
-          </a:prstGeom>
-          <a:solidFill>
-            <a:srgbClr val="0B5E54"/>
-          </a:solidFill>
-          <a:ln>
-            <a:noFill/>
-          </a:ln>
-          <a:effectLst/>
-        </p:spPr>
-        <p:style>
-          <a:lnRef idx="1">
-            <a:schemeClr val="accent1"/>
-          </a:lnRef>
-          <a:fillRef idx="3">
-            <a:schemeClr val="accent1"/>
-          </a:fillRef>
-          <a:effectRef idx="2">
-            <a:schemeClr val="accent1"/>
-          </a:effectRef>
-          <a:fontRef idx="minor">
-            <a:schemeClr val="lt1"/>
-          </a:fontRef>
-        </p:style>
-        <p:txBody>
-          <a:bodyPr rtlCol="0" anchor="ctr"/>
-          <a:lstStyle/>
-          <a:p>
-            <a:pPr algn="ctr"/>
-          </a:p>
-        </p:txBody>
-      </p:sp>
-      <p:sp>
-        <p:nvSpPr>
-          <p:cNvPr id="17" name="TextBox 16"/>
-          <p:cNvSpPr txBox="1"/>
-          <p:nvPr/>
-        </p:nvSpPr>
-        <p:spPr>
-          <a:xfrm>
-            <a:off x="11131803" y="1645920"/>
-            <a:ext cx="453644" cy="237744"/>
-          </a:xfrm>
-          <a:prstGeom prst="rect">
-            <a:avLst/>
-          </a:prstGeom>
-          <a:noFill/>
-        </p:spPr>
-        <p:txBody>
-          <a:bodyPr wrap="square" anchor="ctr" lIns="0" rIns="0" tIns="0" bIns="0">
-            <a:spAutoFit/>
-          </a:bodyPr>
-          <a:lstStyle/>
-          <a:p>
-            <a:pPr algn="ctr">
-              <a:lnSpc>
-                <a:spcPct val="114000"/>
-              </a:lnSpc>
-            </a:pPr>
-            <a:r>
-              <a:rPr sz="850" b="1">
-                <a:solidFill>
-                  <a:srgbClr val="FFFFFF"/>
-                </a:solidFill>
-              </a:rPr>
-              <a:t>达标</a:t>
-            </a:r>
-          </a:p>
-        </p:txBody>
-      </p:sp>
-      <p:sp>
-        <p:nvSpPr>
-          <p:cNvPr id="18" name="TextBox 17"/>
-          <p:cNvSpPr txBox="1"/>
-          <p:nvPr/>
-        </p:nvSpPr>
-        <p:spPr>
-          <a:xfrm>
-            <a:off x="932688" y="1901952"/>
-            <a:ext cx="10671047" cy="423161"/>
-          </a:xfrm>
-          <a:prstGeom prst="rect">
-            <a:avLst/>
-          </a:prstGeom>
-          <a:noFill/>
-        </p:spPr>
-        <p:txBody>
-          <a:bodyPr wrap="square" anchor="t" lIns="0" rIns="0" tIns="0" bIns="0">
-            <a:spAutoFit/>
-          </a:bodyPr>
-          <a:lstStyle/>
-          <a:p>
-            <a:pPr algn="l">
-              <a:lnSpc>
-                <a:spcPct val="114000"/>
-              </a:lnSpc>
-            </a:pPr>
-            <a:r>
-              <a:rPr sz="950" b="0">
-                <a:solidFill>
-                  <a:srgbClr val="1B2B28"/>
-                </a:solidFill>
-              </a:rPr>
-              <a:t>必做 KPI 5/5 全有值；时间筛选：同一 core.filter_records 缩到单日 2026-03-01 命中 47 行（全量 1186）；四段 生产概览 / 详细分析 / 异常识别 / 数据附表 全部见于 daily_report.html；PDF daily_report.pdf 校验通过：42190 B / 4 页，%PDF- 头与 %%EOF 尾齐</a:t>
-            </a:r>
-          </a:p>
-        </p:txBody>
-      </p:sp>
-      <p:sp>
-        <p:nvSpPr>
-          <p:cNvPr id="19" name="Rounded Rectangle 18"/>
-          <p:cNvSpPr/>
-          <p:nvPr/>
-        </p:nvSpPr>
-        <p:spPr>
-          <a:xfrm>
-            <a:off x="475488" y="2443985"/>
-            <a:ext cx="11237976" cy="1007874"/>
-          </a:xfrm>
-          <a:prstGeom prst="roundRect">
-            <a:avLst>
-              <a:gd name="adj" fmla="val 6000"/>
-            </a:avLst>
-          </a:prstGeom>
-          <a:solidFill>
-            <a:srgbClr val="FFFFFF"/>
-          </a:solidFill>
-          <a:ln w="9525">
-            <a:solidFill>
-              <a:srgbClr val="E4F1EE"/>
-            </a:solidFill>
-          </a:ln>
-          <a:effectLst/>
-        </p:spPr>
-        <p:style>
-          <a:lnRef idx="1">
-            <a:schemeClr val="accent1"/>
-          </a:lnRef>
-          <a:fillRef idx="3">
-            <a:schemeClr val="accent1"/>
-          </a:fillRef>
-          <a:effectRef idx="2">
-            <a:schemeClr val="accent1"/>
-          </a:effectRef>
-          <a:fontRef idx="minor">
-            <a:schemeClr val="lt1"/>
-          </a:fontRef>
-        </p:style>
-        <p:txBody>
-          <a:bodyPr rtlCol="0" anchor="ctr"/>
-          <a:lstStyle/>
-          <a:p>
-            <a:pPr algn="ctr"/>
-          </a:p>
-        </p:txBody>
-      </p:sp>
-      <p:sp>
-        <p:nvSpPr>
-          <p:cNvPr id="20" name="Rounded Rectangle 19"/>
-          <p:cNvSpPr/>
-          <p:nvPr/>
-        </p:nvSpPr>
-        <p:spPr>
-          <a:xfrm>
-            <a:off x="475488" y="2443985"/>
-            <a:ext cx="54864" cy="1007874"/>
-          </a:xfrm>
-          <a:prstGeom prst="roundRect">
-            <a:avLst>
-              <a:gd name="adj" fmla="val 50000"/>
-            </a:avLst>
-          </a:prstGeom>
-          <a:solidFill>
-            <a:srgbClr val="157A6D"/>
-          </a:solidFill>
-          <a:ln>
-            <a:noFill/>
-          </a:ln>
-          <a:effectLst/>
-        </p:spPr>
-        <p:style>
-          <a:lnRef idx="1">
-            <a:schemeClr val="accent1"/>
-          </a:lnRef>
-          <a:fillRef idx="3">
-            <a:schemeClr val="accent1"/>
-          </a:fillRef>
-          <a:effectRef idx="2">
-            <a:schemeClr val="accent1"/>
-          </a:effectRef>
-          <a:fontRef idx="minor">
-            <a:schemeClr val="lt1"/>
-          </a:fontRef>
-        </p:style>
-        <p:txBody>
-          <a:bodyPr rtlCol="0" anchor="ctr"/>
-          <a:lstStyle/>
-          <a:p>
-            <a:pPr algn="ctr"/>
-          </a:p>
-        </p:txBody>
-      </p:sp>
-      <p:sp>
-        <p:nvSpPr>
-          <p:cNvPr id="21" name="Rounded Rectangle 20"/>
-          <p:cNvSpPr/>
-          <p:nvPr/>
-        </p:nvSpPr>
-        <p:spPr>
-          <a:xfrm>
-            <a:off x="621792" y="2526281"/>
-            <a:ext cx="237744" cy="237744"/>
-          </a:xfrm>
-          <a:prstGeom prst="roundRect">
-            <a:avLst>
-              <a:gd name="adj" fmla="val 28000"/>
-            </a:avLst>
-          </a:prstGeom>
-          <a:solidFill>
-            <a:srgbClr val="157A6D"/>
-          </a:solidFill>
-          <a:ln>
-            <a:noFill/>
-          </a:ln>
-          <a:effectLst/>
-        </p:spPr>
-        <p:style>
-          <a:lnRef idx="1">
-            <a:schemeClr val="accent1"/>
-          </a:lnRef>
-          <a:fillRef idx="3">
-            <a:schemeClr val="accent1"/>
-          </a:fillRef>
-          <a:effectRef idx="2">
-            <a:schemeClr val="accent1"/>
-          </a:effectRef>
-          <a:fontRef idx="minor">
-            <a:schemeClr val="lt1"/>
-          </a:fontRef>
-        </p:style>
-        <p:txBody>
-          <a:bodyPr rtlCol="0" anchor="ctr"/>
-          <a:lstStyle/>
-          <a:p>
-            <a:pPr algn="ctr"/>
-          </a:p>
-        </p:txBody>
-      </p:sp>
-      <p:sp>
-        <p:nvSpPr>
-          <p:cNvPr id="22" name="TextBox 21"/>
-          <p:cNvSpPr txBox="1"/>
-          <p:nvPr/>
-        </p:nvSpPr>
-        <p:spPr>
-          <a:xfrm>
-            <a:off x="621792" y="2526281"/>
-            <a:ext cx="237744" cy="237744"/>
-          </a:xfrm>
-          <a:prstGeom prst="rect">
-            <a:avLst/>
-          </a:prstGeom>
-          <a:noFill/>
-        </p:spPr>
-        <p:txBody>
-          <a:bodyPr wrap="square" anchor="ctr" lIns="0" rIns="0" tIns="0" bIns="0">
-            <a:spAutoFit/>
-          </a:bodyPr>
-          <a:lstStyle/>
-          <a:p>
-            <a:pPr algn="ctr">
-              <a:lnSpc>
-                <a:spcPct val="114000"/>
-              </a:lnSpc>
-            </a:pPr>
-            <a:r>
-              <a:rPr sz="1000" b="1">
-                <a:solidFill>
-                  <a:srgbClr val="FFFFFF"/>
-                </a:solidFill>
-              </a:rPr>
-              <a:t>C</a:t>
-            </a:r>
-          </a:p>
-        </p:txBody>
-      </p:sp>
-      <p:sp>
-        <p:nvSpPr>
-          <p:cNvPr id="23" name="TextBox 22"/>
-          <p:cNvSpPr txBox="1"/>
-          <p:nvPr/>
-        </p:nvSpPr>
-        <p:spPr>
-          <a:xfrm>
-            <a:off x="932688" y="2507993"/>
-            <a:ext cx="8778240" cy="274320"/>
-          </a:xfrm>
-          <a:prstGeom prst="rect">
-            <a:avLst/>
-          </a:prstGeom>
-          <a:noFill/>
-        </p:spPr>
-        <p:txBody>
-          <a:bodyPr wrap="square" anchor="ctr" lIns="0" rIns="0" tIns="0" bIns="0">
-            <a:spAutoFit/>
-          </a:bodyPr>
-          <a:lstStyle/>
-          <a:p>
-            <a:pPr algn="l">
-              <a:lnSpc>
-                <a:spcPct val="114000"/>
-              </a:lnSpc>
-            </a:pPr>
-            <a:r>
-              <a:rPr sz="1050" b="1">
-                <a:solidFill>
-                  <a:srgbClr val="1B2B28"/>
-                </a:solidFill>
-              </a:rPr>
-              <a:t>良好</a:t>
-            </a:r>
-            <a:r>
-              <a:rPr sz="850" b="0">
-                <a:solidFill>
-                  <a:srgbClr val="5C6E6A"/>
-                </a:solidFill>
-              </a:rPr>
-              <a:t>   验收口径：</a:t>
-            </a:r>
-            <a:r>
-              <a:rPr sz="850" b="0">
-                <a:solidFill>
-                  <a:srgbClr val="5C6E6A"/>
-                </a:solidFill>
-              </a:rPr>
-              <a:t>联动筛选流畅；日报生成&lt;2分钟</a:t>
-            </a:r>
-          </a:p>
-        </p:txBody>
-      </p:sp>
-      <p:sp>
-        <p:nvSpPr>
-          <p:cNvPr id="24" name="Rounded Rectangle 23"/>
-          <p:cNvSpPr/>
-          <p:nvPr/>
-        </p:nvSpPr>
-        <p:spPr>
-          <a:xfrm>
-            <a:off x="11131803" y="2535425"/>
-            <a:ext cx="453644" cy="237744"/>
-          </a:xfrm>
-          <a:prstGeom prst="roundRect">
-            <a:avLst>
-              <a:gd name="adj" fmla="val 50000"/>
-            </a:avLst>
-          </a:prstGeom>
-          <a:solidFill>
-            <a:srgbClr val="0B5E54"/>
-          </a:solidFill>
-          <a:ln>
-            <a:noFill/>
-          </a:ln>
-          <a:effectLst/>
-        </p:spPr>
-        <p:style>
-          <a:lnRef idx="1">
-            <a:schemeClr val="accent1"/>
-          </a:lnRef>
-          <a:fillRef idx="3">
-            <a:schemeClr val="accent1"/>
-          </a:fillRef>
-          <a:effectRef idx="2">
-            <a:schemeClr val="accent1"/>
-          </a:effectRef>
-          <a:fontRef idx="minor">
-            <a:schemeClr val="lt1"/>
-          </a:fontRef>
-        </p:style>
-        <p:txBody>
-          <a:bodyPr rtlCol="0" anchor="ctr"/>
-          <a:lstStyle/>
-          <a:p>
-            <a:pPr algn="ctr"/>
-          </a:p>
-        </p:txBody>
-      </p:sp>
-      <p:sp>
-        <p:nvSpPr>
-          <p:cNvPr id="25" name="TextBox 24"/>
-          <p:cNvSpPr txBox="1"/>
-          <p:nvPr/>
-        </p:nvSpPr>
-        <p:spPr>
-          <a:xfrm>
-            <a:off x="11131803" y="2535425"/>
-            <a:ext cx="453644" cy="237744"/>
-          </a:xfrm>
-          <a:prstGeom prst="rect">
-            <a:avLst/>
-          </a:prstGeom>
-          <a:noFill/>
-        </p:spPr>
-        <p:txBody>
-          <a:bodyPr wrap="square" anchor="ctr" lIns="0" rIns="0" tIns="0" bIns="0">
-            <a:spAutoFit/>
-          </a:bodyPr>
-          <a:lstStyle/>
-          <a:p>
-            <a:pPr algn="ctr">
-              <a:lnSpc>
-                <a:spcPct val="114000"/>
-              </a:lnSpc>
-            </a:pPr>
-            <a:r>
-              <a:rPr sz="850" b="1">
-                <a:solidFill>
-                  <a:srgbClr val="FFFFFF"/>
-                </a:solidFill>
-              </a:rPr>
-              <a:t>达标</a:t>
-            </a:r>
-          </a:p>
-        </p:txBody>
-      </p:sp>
-      <p:sp>
-        <p:nvSpPr>
-          <p:cNvPr id="26" name="TextBox 25"/>
-          <p:cNvSpPr txBox="1"/>
-          <p:nvPr/>
-        </p:nvSpPr>
-        <p:spPr>
-          <a:xfrm>
-            <a:off x="932688" y="2791457"/>
-            <a:ext cx="10671047" cy="605538"/>
-          </a:xfrm>
-          <a:prstGeom prst="rect">
-            <a:avLst/>
-          </a:prstGeom>
-          <a:noFill/>
-        </p:spPr>
-        <p:txBody>
-          <a:bodyPr wrap="square" anchor="t" lIns="0" rIns="0" tIns="0" bIns="0">
-            <a:spAutoFit/>
-          </a:bodyPr>
-          <a:lstStyle/>
-          <a:p>
-            <a:pPr algn="l">
-              <a:lnSpc>
-                <a:spcPct val="114000"/>
-              </a:lnSpc>
-            </a:pPr>
-            <a:r>
-              <a:rPr sz="950" b="0">
-                <a:solidFill>
-                  <a:srgbClr val="1B2B28"/>
-                </a:solidFill>
-              </a:rPr>
-              <a:t>联动程序化验证（同一 core.filter_records）：单日命中 47/1186 行；仅选 DEV-01 命中 296 行、总产量 14939＜全量 60273（筛选真的驱动重算）；app.py on_select="rerun" 接线 2 处 → core.drill_rows 联动明细 30 行（回路非空）；AppTest 无头真执行 app.py 并断言切换单日后命中变小（tests/test_dashboard.py，非肉眼验收）；日报耗时档位 &lt;1s（预算 120s，判定行不含毫秒，精确秒数在 timing.txt/runtime/）</a:t>
-            </a:r>
-          </a:p>
-        </p:txBody>
-      </p:sp>
-      <p:sp>
-        <p:nvSpPr>
-          <p:cNvPr id="27" name="Rounded Rectangle 26"/>
-          <p:cNvSpPr/>
-          <p:nvPr/>
-        </p:nvSpPr>
-        <p:spPr>
-          <a:xfrm>
-            <a:off x="475488" y="3515868"/>
-            <a:ext cx="11237976" cy="825497"/>
-          </a:xfrm>
-          <a:prstGeom prst="roundRect">
-            <a:avLst>
-              <a:gd name="adj" fmla="val 6000"/>
-            </a:avLst>
-          </a:prstGeom>
-          <a:solidFill>
-            <a:srgbClr val="FFFFFF"/>
-          </a:solidFill>
-          <a:ln w="9525">
-            <a:solidFill>
-              <a:srgbClr val="E4F1EE"/>
-            </a:solidFill>
-          </a:ln>
-          <a:effectLst/>
-        </p:spPr>
-        <p:style>
-          <a:lnRef idx="1">
-            <a:schemeClr val="accent1"/>
-          </a:lnRef>
-          <a:fillRef idx="3">
-            <a:schemeClr val="accent1"/>
-          </a:fillRef>
-          <a:effectRef idx="2">
-            <a:schemeClr val="accent1"/>
-          </a:effectRef>
-          <a:fontRef idx="minor">
-            <a:schemeClr val="lt1"/>
-          </a:fontRef>
-        </p:style>
-        <p:txBody>
-          <a:bodyPr rtlCol="0" anchor="ctr"/>
-          <a:lstStyle/>
-          <a:p>
-            <a:pPr algn="ctr"/>
-          </a:p>
-        </p:txBody>
-      </p:sp>
-      <p:sp>
-        <p:nvSpPr>
-          <p:cNvPr id="28" name="Rounded Rectangle 27"/>
-          <p:cNvSpPr/>
-          <p:nvPr/>
-        </p:nvSpPr>
-        <p:spPr>
-          <a:xfrm>
-            <a:off x="475488" y="3515868"/>
-            <a:ext cx="54864" cy="825497"/>
-          </a:xfrm>
-          <a:prstGeom prst="roundRect">
-            <a:avLst>
-              <a:gd name="adj" fmla="val 50000"/>
-            </a:avLst>
-          </a:prstGeom>
-          <a:solidFill>
-            <a:srgbClr val="0B5E54"/>
-          </a:solidFill>
-          <a:ln>
-            <a:noFill/>
-          </a:ln>
-          <a:effectLst/>
-        </p:spPr>
-        <p:style>
-          <a:lnRef idx="1">
-            <a:schemeClr val="accent1"/>
-          </a:lnRef>
-          <a:fillRef idx="3">
-            <a:schemeClr val="accent1"/>
-          </a:fillRef>
-          <a:effectRef idx="2">
-            <a:schemeClr val="accent1"/>
-          </a:effectRef>
-          <a:fontRef idx="minor">
-            <a:schemeClr val="lt1"/>
-          </a:fontRef>
-        </p:style>
-        <p:txBody>
-          <a:bodyPr rtlCol="0" anchor="ctr"/>
-          <a:lstStyle/>
-          <a:p>
-            <a:pPr algn="ctr"/>
-          </a:p>
-        </p:txBody>
-      </p:sp>
-      <p:sp>
-        <p:nvSpPr>
-          <p:cNvPr id="29" name="Rounded Rectangle 28"/>
-          <p:cNvSpPr/>
-          <p:nvPr/>
-        </p:nvSpPr>
-        <p:spPr>
-          <a:xfrm>
-            <a:off x="621792" y="3598163"/>
-            <a:ext cx="237744" cy="237744"/>
-          </a:xfrm>
-          <a:prstGeom prst="roundRect">
-            <a:avLst>
-              <a:gd name="adj" fmla="val 28000"/>
-            </a:avLst>
-          </a:prstGeom>
-          <a:solidFill>
-            <a:srgbClr val="0B5E54"/>
-          </a:solidFill>
-          <a:ln>
-            <a:noFill/>
-          </a:ln>
-          <a:effectLst/>
-        </p:spPr>
-        <p:style>
-          <a:lnRef idx="1">
-            <a:schemeClr val="accent1"/>
-          </a:lnRef>
-          <a:fillRef idx="3">
-            <a:schemeClr val="accent1"/>
-          </a:fillRef>
-          <a:effectRef idx="2">
-            <a:schemeClr val="accent1"/>
-          </a:effectRef>
-          <a:fontRef idx="minor">
-            <a:schemeClr val="lt1"/>
-          </a:fontRef>
-        </p:style>
-        <p:txBody>
-          <a:bodyPr rtlCol="0" anchor="ctr"/>
-          <a:lstStyle/>
-          <a:p>
-            <a:pPr algn="ctr"/>
-          </a:p>
-        </p:txBody>
-      </p:sp>
-      <p:sp>
-        <p:nvSpPr>
-          <p:cNvPr id="30" name="TextBox 29"/>
-          <p:cNvSpPr txBox="1"/>
-          <p:nvPr/>
-        </p:nvSpPr>
-        <p:spPr>
-          <a:xfrm>
-            <a:off x="621792" y="3598163"/>
-            <a:ext cx="237744" cy="237744"/>
-          </a:xfrm>
-          <a:prstGeom prst="rect">
-            <a:avLst/>
-          </a:prstGeom>
-          <a:noFill/>
-        </p:spPr>
-        <p:txBody>
-          <a:bodyPr wrap="square" anchor="ctr" lIns="0" rIns="0" tIns="0" bIns="0">
-            <a:spAutoFit/>
-          </a:bodyPr>
-          <a:lstStyle/>
-          <a:p>
-            <a:pPr algn="ctr">
-              <a:lnSpc>
-                <a:spcPct val="114000"/>
-              </a:lnSpc>
-            </a:pPr>
-            <a:r>
-              <a:rPr sz="1000" b="1">
-                <a:solidFill>
-                  <a:srgbClr val="FFFFFF"/>
-                </a:solidFill>
-              </a:rPr>
-              <a:t>B</a:t>
-            </a:r>
-          </a:p>
-        </p:txBody>
-      </p:sp>
-      <p:sp>
-        <p:nvSpPr>
-          <p:cNvPr id="31" name="TextBox 30"/>
-          <p:cNvSpPr txBox="1"/>
-          <p:nvPr/>
-        </p:nvSpPr>
-        <p:spPr>
-          <a:xfrm>
-            <a:off x="932688" y="3579875"/>
-            <a:ext cx="8778240" cy="274320"/>
-          </a:xfrm>
-          <a:prstGeom prst="rect">
-            <a:avLst/>
-          </a:prstGeom>
-          <a:noFill/>
-        </p:spPr>
-        <p:txBody>
-          <a:bodyPr wrap="square" anchor="ctr" lIns="0" rIns="0" tIns="0" bIns="0">
-            <a:spAutoFit/>
-          </a:bodyPr>
-          <a:lstStyle/>
-          <a:p>
-            <a:pPr algn="l">
-              <a:lnSpc>
-                <a:spcPct val="114000"/>
-              </a:lnSpc>
-            </a:pPr>
-            <a:r>
-              <a:rPr sz="1050" b="1">
-                <a:solidFill>
-                  <a:srgbClr val="1B2B28"/>
-                </a:solidFill>
-              </a:rPr>
-              <a:t>优秀</a:t>
-            </a:r>
-            <a:r>
-              <a:rPr sz="850" b="0">
-                <a:solidFill>
-                  <a:srgbClr val="5C6E6A"/>
-                </a:solidFill>
-              </a:rPr>
-              <a:t>   验收口径：</a:t>
-            </a:r>
-            <a:r>
-              <a:rPr sz="850" b="0">
-                <a:solidFill>
-                  <a:srgbClr val="5C6E6A"/>
-                </a:solidFill>
-              </a:rPr>
-              <a:t>≥7指标+钻取交互；异常自动识别；美观度≥4/5</a:t>
-            </a:r>
-          </a:p>
-        </p:txBody>
-      </p:sp>
-      <p:sp>
-        <p:nvSpPr>
-          <p:cNvPr id="32" name="Rounded Rectangle 31"/>
-          <p:cNvSpPr/>
-          <p:nvPr/>
-        </p:nvSpPr>
-        <p:spPr>
-          <a:xfrm>
-            <a:off x="11131803" y="3607308"/>
-            <a:ext cx="453644" cy="237744"/>
-          </a:xfrm>
-          <a:prstGeom prst="roundRect">
-            <a:avLst>
-              <a:gd name="adj" fmla="val 50000"/>
-            </a:avLst>
-          </a:prstGeom>
-          <a:solidFill>
-            <a:srgbClr val="0B5E54"/>
-          </a:solidFill>
-          <a:ln>
-            <a:noFill/>
-          </a:ln>
-          <a:effectLst/>
-        </p:spPr>
-        <p:style>
-          <a:lnRef idx="1">
-            <a:schemeClr val="accent1"/>
-          </a:lnRef>
-          <a:fillRef idx="3">
-            <a:schemeClr val="accent1"/>
-          </a:fillRef>
-          <a:effectRef idx="2">
-            <a:schemeClr val="accent1"/>
-          </a:effectRef>
-          <a:fontRef idx="minor">
-            <a:schemeClr val="lt1"/>
-          </a:fontRef>
-        </p:style>
-        <p:txBody>
-          <a:bodyPr rtlCol="0" anchor="ctr"/>
-          <a:lstStyle/>
-          <a:p>
-            <a:pPr algn="ctr"/>
-          </a:p>
-        </p:txBody>
-      </p:sp>
-      <p:sp>
-        <p:nvSpPr>
-          <p:cNvPr id="33" name="TextBox 32"/>
-          <p:cNvSpPr txBox="1"/>
-          <p:nvPr/>
-        </p:nvSpPr>
-        <p:spPr>
-          <a:xfrm>
-            <a:off x="11131803" y="3607308"/>
-            <a:ext cx="453644" cy="237744"/>
-          </a:xfrm>
-          <a:prstGeom prst="rect">
-            <a:avLst/>
-          </a:prstGeom>
-          <a:noFill/>
-        </p:spPr>
-        <p:txBody>
-          <a:bodyPr wrap="square" anchor="ctr" lIns="0" rIns="0" tIns="0" bIns="0">
-            <a:spAutoFit/>
-          </a:bodyPr>
-          <a:lstStyle/>
-          <a:p>
-            <a:pPr algn="ctr">
-              <a:lnSpc>
-                <a:spcPct val="114000"/>
-              </a:lnSpc>
-            </a:pPr>
-            <a:r>
-              <a:rPr sz="850" b="1">
-                <a:solidFill>
-                  <a:srgbClr val="FFFFFF"/>
-                </a:solidFill>
-              </a:rPr>
-              <a:t>达标</a:t>
-            </a:r>
-          </a:p>
-        </p:txBody>
-      </p:sp>
-      <p:sp>
-        <p:nvSpPr>
-          <p:cNvPr id="34" name="TextBox 33"/>
-          <p:cNvSpPr txBox="1"/>
-          <p:nvPr/>
-        </p:nvSpPr>
-        <p:spPr>
-          <a:xfrm>
-            <a:off x="932688" y="3863339"/>
-            <a:ext cx="10671047" cy="423161"/>
-          </a:xfrm>
-          <a:prstGeom prst="rect">
-            <a:avLst/>
-          </a:prstGeom>
-          <a:noFill/>
-        </p:spPr>
-        <p:txBody>
-          <a:bodyPr wrap="square" anchor="t" lIns="0" rIns="0" tIns="0" bIns="0">
-            <a:spAutoFit/>
-          </a:bodyPr>
-          <a:lstStyle/>
-          <a:p>
-            <a:pPr algn="l">
-              <a:lnSpc>
-                <a:spcPct val="114000"/>
-              </a:lnSpc>
-            </a:pPr>
-            <a:r>
-              <a:rPr sz="950" b="0">
-                <a:solidFill>
-                  <a:srgbClr val="1B2B28"/>
-                </a:solidFill>
-              </a:rPr>
-              <a:t>指标实得 9 个；钻取：复放选择事件 x=['2026-03-03', '2026-03-05', '2026-03-07'] → 联动明细 30 行（上限 30）指纹 crc32=e89f637a（跨 PYTHONHASHSEED 稳定）；异常自动识别命中 357 条（temp&gt;90.0 或 vib&gt;4.5，逐条附处置建议）；美观度 5/5（≥4 达标；标题层级 1/1、单位标注 1/1、配色 1/1、图例 1/1、响应式 1/1；扣分项：无）</a:t>
-            </a:r>
-          </a:p>
-        </p:txBody>
-      </p:sp>
-      <p:sp>
-        <p:nvSpPr>
-          <p:cNvPr id="35" name="Rounded Rectangle 34"/>
-          <p:cNvSpPr/>
-          <p:nvPr/>
-        </p:nvSpPr>
-        <p:spPr>
-          <a:xfrm>
-            <a:off x="475488" y="4405373"/>
-            <a:ext cx="11237976" cy="1007874"/>
-          </a:xfrm>
-          <a:prstGeom prst="roundRect">
-            <a:avLst>
-              <a:gd name="adj" fmla="val 6000"/>
-            </a:avLst>
-          </a:prstGeom>
-          <a:solidFill>
-            <a:srgbClr val="FFFFFF"/>
-          </a:solidFill>
-          <a:ln w="9525">
-            <a:solidFill>
-              <a:srgbClr val="E4F1EE"/>
-            </a:solidFill>
-          </a:ln>
-          <a:effectLst/>
-        </p:spPr>
-        <p:style>
-          <a:lnRef idx="1">
-            <a:schemeClr val="accent1"/>
-          </a:lnRef>
-          <a:fillRef idx="3">
-            <a:schemeClr val="accent1"/>
-          </a:fillRef>
-          <a:effectRef idx="2">
-            <a:schemeClr val="accent1"/>
-          </a:effectRef>
-          <a:fontRef idx="minor">
-            <a:schemeClr val="lt1"/>
-          </a:fontRef>
-        </p:style>
-        <p:txBody>
-          <a:bodyPr rtlCol="0" anchor="ctr"/>
-          <a:lstStyle/>
-          <a:p>
-            <a:pPr algn="ctr"/>
-          </a:p>
-        </p:txBody>
-      </p:sp>
-      <p:sp>
-        <p:nvSpPr>
-          <p:cNvPr id="36" name="Rounded Rectangle 35"/>
-          <p:cNvSpPr/>
-          <p:nvPr/>
-        </p:nvSpPr>
-        <p:spPr>
-          <a:xfrm>
-            <a:off x="475488" y="4405373"/>
-            <a:ext cx="54864" cy="1007874"/>
-          </a:xfrm>
-          <a:prstGeom prst="roundRect">
-            <a:avLst>
-              <a:gd name="adj" fmla="val 50000"/>
-            </a:avLst>
-          </a:prstGeom>
-          <a:solidFill>
-            <a:srgbClr val="C9A227"/>
-          </a:solidFill>
-          <a:ln>
-            <a:noFill/>
-          </a:ln>
-          <a:effectLst/>
-        </p:spPr>
-        <p:style>
-          <a:lnRef idx="1">
-            <a:schemeClr val="accent1"/>
-          </a:lnRef>
-          <a:fillRef idx="3">
-            <a:schemeClr val="accent1"/>
-          </a:fillRef>
-          <a:effectRef idx="2">
-            <a:schemeClr val="accent1"/>
-          </a:effectRef>
-          <a:fontRef idx="minor">
-            <a:schemeClr val="lt1"/>
-          </a:fontRef>
-        </p:style>
-        <p:txBody>
-          <a:bodyPr rtlCol="0" anchor="ctr"/>
-          <a:lstStyle/>
-          <a:p>
-            <a:pPr algn="ctr"/>
-          </a:p>
-        </p:txBody>
-      </p:sp>
-      <p:sp>
-        <p:nvSpPr>
-          <p:cNvPr id="37" name="Rounded Rectangle 36"/>
-          <p:cNvSpPr/>
-          <p:nvPr/>
-        </p:nvSpPr>
-        <p:spPr>
-          <a:xfrm>
-            <a:off x="621792" y="4487669"/>
-            <a:ext cx="237744" cy="237744"/>
-          </a:xfrm>
-          <a:prstGeom prst="roundRect">
-            <a:avLst>
-              <a:gd name="adj" fmla="val 28000"/>
-            </a:avLst>
-          </a:prstGeom>
-          <a:solidFill>
-            <a:srgbClr val="C9A227"/>
-          </a:solidFill>
-          <a:ln>
-            <a:noFill/>
-          </a:ln>
-          <a:effectLst/>
-        </p:spPr>
-        <p:style>
-          <a:lnRef idx="1">
-            <a:schemeClr val="accent1"/>
-          </a:lnRef>
-          <a:fillRef idx="3">
-            <a:schemeClr val="accent1"/>
-          </a:fillRef>
-          <a:effectRef idx="2">
-            <a:schemeClr val="accent1"/>
-          </a:effectRef>
-          <a:fontRef idx="minor">
-            <a:schemeClr val="lt1"/>
-          </a:fontRef>
-        </p:style>
-        <p:txBody>
-          <a:bodyPr rtlCol="0" anchor="ctr"/>
-          <a:lstStyle/>
-          <a:p>
-            <a:pPr algn="ctr"/>
-          </a:p>
-        </p:txBody>
-      </p:sp>
-      <p:sp>
-        <p:nvSpPr>
-          <p:cNvPr id="38" name="TextBox 37"/>
-          <p:cNvSpPr txBox="1"/>
-          <p:nvPr/>
-        </p:nvSpPr>
-        <p:spPr>
-          <a:xfrm>
-            <a:off x="621792" y="4487669"/>
-            <a:ext cx="237744" cy="237744"/>
-          </a:xfrm>
-          <a:prstGeom prst="rect">
-            <a:avLst/>
-          </a:prstGeom>
-          <a:noFill/>
-        </p:spPr>
-        <p:txBody>
-          <a:bodyPr wrap="square" anchor="ctr" lIns="0" rIns="0" tIns="0" bIns="0">
-            <a:spAutoFit/>
-          </a:bodyPr>
-          <a:lstStyle/>
-          <a:p>
-            <a:pPr algn="ctr">
-              <a:lnSpc>
-                <a:spcPct val="114000"/>
-              </a:lnSpc>
-            </a:pPr>
-            <a:r>
-              <a:rPr sz="1000" b="1">
-                <a:solidFill>
-                  <a:srgbClr val="FFFFFF"/>
-                </a:solidFill>
-              </a:rPr>
-              <a:t>A</a:t>
-            </a:r>
-          </a:p>
-        </p:txBody>
-      </p:sp>
-      <p:sp>
-        <p:nvSpPr>
-          <p:cNvPr id="39" name="TextBox 38"/>
-          <p:cNvSpPr txBox="1"/>
-          <p:nvPr/>
-        </p:nvSpPr>
-        <p:spPr>
-          <a:xfrm>
-            <a:off x="932688" y="4469381"/>
-            <a:ext cx="8778240" cy="274320"/>
-          </a:xfrm>
-          <a:prstGeom prst="rect">
-            <a:avLst/>
-          </a:prstGeom>
-          <a:noFill/>
-        </p:spPr>
-        <p:txBody>
-          <a:bodyPr wrap="square" anchor="ctr" lIns="0" rIns="0" tIns="0" bIns="0">
-            <a:spAutoFit/>
-          </a:bodyPr>
-          <a:lstStyle/>
-          <a:p>
-            <a:pPr algn="l">
-              <a:lnSpc>
-                <a:spcPct val="114000"/>
-              </a:lnSpc>
-            </a:pPr>
-            <a:r>
-              <a:rPr sz="1050" b="1">
-                <a:solidFill>
-                  <a:srgbClr val="1B2B28"/>
-                </a:solidFill>
-              </a:rPr>
-              <a:t>超优</a:t>
-            </a:r>
-            <a:r>
-              <a:rPr sz="850" b="0">
-                <a:solidFill>
-                  <a:srgbClr val="5C6E6A"/>
-                </a:solidFill>
-              </a:rPr>
-              <a:t>   验收口径：</a:t>
-            </a:r>
-            <a:r>
-              <a:rPr sz="850" b="0">
-                <a:solidFill>
-                  <a:srgbClr val="5C6E6A"/>
-                </a:solidFill>
-              </a:rPr>
-              <a:t>优秀+定时自动生成(mailto/计划任务)+移动端适配</a:t>
-            </a:r>
-          </a:p>
-        </p:txBody>
-      </p:sp>
-      <p:sp>
-        <p:nvSpPr>
-          <p:cNvPr id="40" name="Rounded Rectangle 39"/>
-          <p:cNvSpPr/>
-          <p:nvPr/>
-        </p:nvSpPr>
-        <p:spPr>
-          <a:xfrm>
-            <a:off x="11131803" y="4496813"/>
-            <a:ext cx="453644" cy="237744"/>
-          </a:xfrm>
-          <a:prstGeom prst="roundRect">
-            <a:avLst>
-              <a:gd name="adj" fmla="val 50000"/>
-            </a:avLst>
-          </a:prstGeom>
-          <a:solidFill>
-            <a:srgbClr val="0B5E54"/>
-          </a:solidFill>
-          <a:ln>
-            <a:noFill/>
-          </a:ln>
-          <a:effectLst/>
-        </p:spPr>
-        <p:style>
-          <a:lnRef idx="1">
-            <a:schemeClr val="accent1"/>
-          </a:lnRef>
-          <a:fillRef idx="3">
-            <a:schemeClr val="accent1"/>
-          </a:fillRef>
-          <a:effectRef idx="2">
-            <a:schemeClr val="accent1"/>
-          </a:effectRef>
-          <a:fontRef idx="minor">
-            <a:schemeClr val="lt1"/>
-          </a:fontRef>
-        </p:style>
-        <p:txBody>
-          <a:bodyPr rtlCol="0" anchor="ctr"/>
-          <a:lstStyle/>
-          <a:p>
-            <a:pPr algn="ctr"/>
-          </a:p>
-        </p:txBody>
-      </p:sp>
-      <p:sp>
-        <p:nvSpPr>
-          <p:cNvPr id="41" name="TextBox 40"/>
-          <p:cNvSpPr txBox="1"/>
-          <p:nvPr/>
-        </p:nvSpPr>
-        <p:spPr>
-          <a:xfrm>
-            <a:off x="11131803" y="4496813"/>
-            <a:ext cx="453644" cy="237744"/>
-          </a:xfrm>
-          <a:prstGeom prst="rect">
-            <a:avLst/>
-          </a:prstGeom>
-          <a:noFill/>
-        </p:spPr>
-        <p:txBody>
-          <a:bodyPr wrap="square" anchor="ctr" lIns="0" rIns="0" tIns="0" bIns="0">
-            <a:spAutoFit/>
-          </a:bodyPr>
-          <a:lstStyle/>
-          <a:p>
-            <a:pPr algn="ctr">
-              <a:lnSpc>
-                <a:spcPct val="114000"/>
-              </a:lnSpc>
-            </a:pPr>
-            <a:r>
-              <a:rPr sz="850" b="1">
-                <a:solidFill>
-                  <a:srgbClr val="FFFFFF"/>
-                </a:solidFill>
-              </a:rPr>
-              <a:t>达标</a:t>
-            </a:r>
-          </a:p>
-        </p:txBody>
-      </p:sp>
-      <p:sp>
-        <p:nvSpPr>
-          <p:cNvPr id="42" name="TextBox 41"/>
-          <p:cNvSpPr txBox="1"/>
-          <p:nvPr/>
-        </p:nvSpPr>
-        <p:spPr>
-          <a:xfrm>
-            <a:off x="932688" y="4752845"/>
-            <a:ext cx="10671047" cy="605538"/>
-          </a:xfrm>
-          <a:prstGeom prst="rect">
-            <a:avLst/>
-          </a:prstGeom>
-          <a:noFill/>
-        </p:spPr>
-        <p:txBody>
-          <a:bodyPr wrap="square" anchor="t" lIns="0" rIns="0" tIns="0" bIns="0">
-            <a:spAutoFit/>
-          </a:bodyPr>
-          <a:lstStyle/>
-          <a:p>
-            <a:pPr algn="l">
-              <a:lnSpc>
-                <a:spcPct val="114000"/>
-              </a:lnSpc>
-            </a:pPr>
-            <a:r>
-              <a:rPr sz="950" b="0">
-                <a:solidFill>
-                  <a:srgbClr val="1B2B28"/>
-                </a:solidFill>
-              </a:rPr>
-              <a:t>继承优秀(B)：达标；定时：schedule.at=07:30 解析为每日 07:30，下次触发为真实 datetime 且晚于此刻（墙钟值写 runtime/schedule_state.txt 与 output/timing.txt，不进判定行）；计划任务 4 件产物已渲染（crontab/systemd/launchd/mailto，写 runtime/schedule/）；mailto 收件人 line-lead@example.com 且 subject/body 齐；移动端：viewport=True flex=True media=True 窄屏断点 600px（config 上限 768px）</a:t>
-            </a:r>
-          </a:p>
-        </p:txBody>
-      </p:sp>
-      <p:sp>
-        <p:nvSpPr>
-          <p:cNvPr id="43" name="Rounded Rectangle 42"/>
-          <p:cNvSpPr/>
-          <p:nvPr/>
-        </p:nvSpPr>
-        <p:spPr>
-          <a:xfrm>
-            <a:off x="475488" y="5477256"/>
-            <a:ext cx="11237976" cy="941831"/>
-          </a:xfrm>
-          <a:prstGeom prst="roundRect">
-            <a:avLst>
-              <a:gd name="adj" fmla="val 5000"/>
-            </a:avLst>
-          </a:prstGeom>
-          <a:solidFill>
-            <a:srgbClr val="E4F1EE"/>
-          </a:solidFill>
-          <a:ln>
-            <a:noFill/>
-          </a:ln>
-          <a:effectLst/>
-        </p:spPr>
-        <p:style>
-          <a:lnRef idx="1">
-            <a:schemeClr val="accent1"/>
-          </a:lnRef>
-          <a:fillRef idx="3">
-            <a:schemeClr val="accent1"/>
-          </a:fillRef>
-          <a:effectRef idx="2">
-            <a:schemeClr val="accent1"/>
-          </a:effectRef>
-          <a:fontRef idx="minor">
-            <a:schemeClr val="lt1"/>
-          </a:fontRef>
-        </p:style>
-        <p:txBody>
-          <a:bodyPr rtlCol="0" anchor="ctr"/>
-          <a:lstStyle/>
-          <a:p>
-            <a:pPr algn="ctr"/>
-          </a:p>
-        </p:txBody>
-      </p:sp>
-      <p:sp>
-        <p:nvSpPr>
-          <p:cNvPr id="44" name="Rounded Rectangle 43"/>
-          <p:cNvSpPr/>
-          <p:nvPr/>
-        </p:nvSpPr>
-        <p:spPr>
-          <a:xfrm>
-            <a:off x="475488" y="5477256"/>
-            <a:ext cx="54864" cy="941831"/>
-          </a:xfrm>
-          <a:prstGeom prst="roundRect">
-            <a:avLst>
-              <a:gd name="adj" fmla="val 50000"/>
-            </a:avLst>
-          </a:prstGeom>
-          <a:solidFill>
-            <a:srgbClr val="C9A227"/>
-          </a:solidFill>
-          <a:ln>
-            <a:noFill/>
-          </a:ln>
-          <a:effectLst/>
-        </p:spPr>
-        <p:style>
-          <a:lnRef idx="1">
-            <a:schemeClr val="accent1"/>
-          </a:lnRef>
-          <a:fillRef idx="3">
-            <a:schemeClr val="accent1"/>
-          </a:fillRef>
-          <a:effectRef idx="2">
-            <a:schemeClr val="accent1"/>
-          </a:effectRef>
-          <a:fontRef idx="minor">
-            <a:schemeClr val="lt1"/>
-          </a:fontRef>
-        </p:style>
-        <p:txBody>
-          <a:bodyPr rtlCol="0" anchor="ctr"/>
-          <a:lstStyle/>
-          <a:p>
-            <a:pPr algn="ctr"/>
-          </a:p>
-        </p:txBody>
-      </p:sp>
-      <p:sp>
-        <p:nvSpPr>
-          <p:cNvPr id="45" name="TextBox 44"/>
-          <p:cNvSpPr txBox="1"/>
-          <p:nvPr/>
-        </p:nvSpPr>
-        <p:spPr>
-          <a:xfrm>
-            <a:off x="676656" y="5550408"/>
-            <a:ext cx="10908792" cy="795527"/>
-          </a:xfrm>
-          <a:prstGeom prst="rect">
-            <a:avLst/>
-          </a:prstGeom>
-          <a:noFill/>
-        </p:spPr>
-        <p:txBody>
-          <a:bodyPr wrap="square" anchor="t" lIns="0" rIns="0" tIns="0" bIns="0">
-            <a:spAutoFit/>
-          </a:bodyPr>
-          <a:lstStyle/>
-          <a:p>
-            <a:pPr algn="l">
-              <a:lnSpc>
-                <a:spcPct val="124000"/>
-              </a:lnSpc>
-            </a:pPr>
-            <a:r>
-              <a:rPr sz="850" b="0">
-                <a:solidFill>
-                  <a:srgbClr val="1B2B28"/>
-                </a:solidFill>
-              </a:rPr>
-              <a:t>出处：工程化项目/p33_kpi_cockpit/output/report.txt 第 15 节「分层达标」——本机 2026-10-28 05:08 实跑落盘，上表数字逐字摘录、未改写。</a:t>
-            </a:r>
-          </a:p>
-          <a:p>
-            <a:pPr algn="l">
-              <a:lnSpc>
-                <a:spcPct val="124000"/>
-              </a:lnSpc>
-            </a:pPr>
-            <a:r>
-              <a:rPr sz="850" b="0">
-                <a:solidFill>
-                  <a:srgbClr val="1B2B28"/>
-                </a:solidFill>
-              </a:rPr>
-              <a:t>复现：cd 工程化项目/p33_kpi_cockpit &amp;&amp; python run.py &amp;&amp; python -m pytest -q -o addopts=''</a:t>
-            </a:r>
-          </a:p>
-          <a:p>
-            <a:pPr algn="l">
-              <a:lnSpc>
-                <a:spcPct val="124000"/>
-              </a:lnSpc>
-            </a:pPr>
-            <a:r>
-              <a:rPr sz="850" b="0">
-                <a:solidFill>
-                  <a:srgbClr val="1B2B28"/>
-                </a:solidFill>
-              </a:rPr>
-              <a:t>口径：表中「判定」沿用报告原词——绿=达标/通过，黄=仅本节取证项通过（未取证子项在报告里逐条点名），红=未达标。</a:t>
+              <a:t>8 / 10</a:t>
             </a:r>
           </a:p>
         </p:txBody>
@@ -10683,22 +11177,20 @@
       <p:grpSpPr/>
       <p:sp>
         <p:nvSpPr>
-          <p:cNvPr id="2" name="Rounded Rectangle 1"/>
+          <p:cNvPr id="2" name="Rectangle 1"/>
           <p:cNvSpPr/>
           <p:nvPr/>
         </p:nvSpPr>
         <p:spPr>
           <a:xfrm>
             <a:off x="0" y="0"/>
-            <a:ext cx="12191695" cy="64008"/>
-          </a:xfrm>
-          <a:prstGeom prst="roundRect">
-            <a:avLst>
-              <a:gd name="adj" fmla="val 50000"/>
-            </a:avLst>
+            <a:ext cx="12192000" cy="6858000"/>
+          </a:xfrm>
+          <a:prstGeom prst="rect">
+            <a:avLst/>
           </a:prstGeom>
           <a:solidFill>
-            <a:srgbClr val="0B5E54"/>
+            <a:srgbClr val="010328"/>
           </a:solidFill>
           <a:ln>
             <a:noFill/>
@@ -10729,60 +11221,20 @@
       </p:sp>
       <p:sp>
         <p:nvSpPr>
-          <p:cNvPr id="3" name="TextBox 2"/>
-          <p:cNvSpPr txBox="1"/>
-          <p:nvPr/>
-        </p:nvSpPr>
-        <p:spPr>
-          <a:xfrm>
-            <a:off x="475488" y="146304"/>
-            <a:ext cx="8229600" cy="292608"/>
-          </a:xfrm>
-          <a:prstGeom prst="rect">
-            <a:avLst/>
-          </a:prstGeom>
-          <a:noFill/>
-        </p:spPr>
-        <p:txBody>
-          <a:bodyPr wrap="square" anchor="t" lIns="0" rIns="0" tIns="0" bIns="0">
-            <a:spAutoFit/>
-          </a:bodyPr>
-          <a:lstStyle/>
-          <a:p>
-            <a:pPr algn="l">
-              <a:lnSpc>
-                <a:spcPct val="114000"/>
-              </a:lnSpc>
-            </a:pPr>
-            <a:r>
-              <a:rPr sz="1100" b="1">
-                <a:solidFill>
-                  <a:srgbClr val="0B5E54"/>
-                </a:solidFill>
-              </a:rPr>
-              <a:t>工单实战 · 运行留证</a:t>
-            </a:r>
-          </a:p>
-        </p:txBody>
-      </p:sp>
-      <p:sp>
-        <p:nvSpPr>
-          <p:cNvPr id="4" name="Rounded Rectangle 3"/>
+          <p:cNvPr id="3" name="Rectangle 2"/>
           <p:cNvSpPr/>
           <p:nvPr/>
         </p:nvSpPr>
         <p:spPr>
           <a:xfrm>
-            <a:off x="475488" y="475488"/>
-            <a:ext cx="2027872" cy="310896"/>
-          </a:xfrm>
-          <a:prstGeom prst="roundRect">
-            <a:avLst>
-              <a:gd name="adj" fmla="val 50000"/>
-            </a:avLst>
+            <a:off x="0" y="2880360"/>
+            <a:ext cx="12192000" cy="50000"/>
+          </a:xfrm>
+          <a:prstGeom prst="rect">
+            <a:avLst/>
           </a:prstGeom>
           <a:solidFill>
-            <a:srgbClr val="C9A227"/>
+            <a:srgbClr val="F5670F"/>
           </a:solidFill>
           <a:ln>
             <a:noFill/>
@@ -10813,14 +11265,56 @@
       </p:sp>
       <p:sp>
         <p:nvSpPr>
+          <p:cNvPr id="4" name="TextBox 3"/>
+          <p:cNvSpPr txBox="1"/>
+          <p:nvPr/>
+        </p:nvSpPr>
+        <p:spPr>
+          <a:xfrm>
+            <a:off x="0" y="1645920"/>
+            <a:ext cx="12192000" cy="1500000"/>
+          </a:xfrm>
+          <a:prstGeom prst="rect">
+            <a:avLst/>
+          </a:prstGeom>
+          <a:noFill/>
+        </p:spPr>
+        <p:txBody>
+          <a:bodyPr wrap="square" anchor="t">
+            <a:spAutoFit/>
+          </a:bodyPr>
+          <a:lstStyle/>
+          <a:p>
+            <a:pPr algn="ctr">
+              <a:lnSpc>
+                <a:spcPct val="110000"/>
+              </a:lnSpc>
+              <a:spcAft>
+                <a:spcPts val="600"/>
+              </a:spcAft>
+            </a:pPr>
+            <a:r>
+              <a:rPr sz="5400" b="1">
+                <a:solidFill>
+                  <a:srgbClr val="FFFFFF"/>
+                </a:solidFill>
+                <a:latin typeface="微软雅黑"/>
+              </a:rPr>
+              <a:t>THANKS</a:t>
+            </a:r>
+          </a:p>
+        </p:txBody>
+      </p:sp>
+      <p:sp>
+        <p:nvSpPr>
           <p:cNvPr id="5" name="TextBox 4"/>
           <p:cNvSpPr txBox="1"/>
           <p:nvPr/>
         </p:nvSpPr>
         <p:spPr>
           <a:xfrm>
-            <a:off x="475488" y="475488"/>
-            <a:ext cx="2027872" cy="310896"/>
+            <a:off x="0" y="3429000"/>
+            <a:ext cx="12192000" cy="800000"/>
           </a:xfrm>
           <a:prstGeom prst="rect">
             <a:avLst/>
@@ -10828,23 +11322,27 @@
           <a:noFill/>
         </p:spPr>
         <p:txBody>
-          <a:bodyPr wrap="square" anchor="ctr" lIns="0" rIns="0" tIns="0" bIns="0">
+          <a:bodyPr wrap="square" anchor="t">
             <a:spAutoFit/>
           </a:bodyPr>
           <a:lstStyle/>
           <a:p>
             <a:pPr algn="ctr">
               <a:lnSpc>
-                <a:spcPct val="114000"/>
+                <a:spcPct val="110000"/>
               </a:lnSpc>
+              <a:spcAft>
+                <a:spcPts val="600"/>
+              </a:spcAft>
             </a:pPr>
             <a:r>
-              <a:rPr sz="1050" b="1">
-                <a:solidFill>
-                  <a:srgbClr val="FFFFFF"/>
-                </a:solidFill>
+              <a:rPr sz="2200" b="1">
+                <a:solidFill>
+                  <a:srgbClr val="F5670F"/>
+                </a:solidFill>
+                <a:latin typeface="微软雅黑"/>
               </a:rPr>
-              <a:t>SCREENSHOT · 终端逐字截图</a:t>
+              <a:t>感谢聆听 · 动手实践出真知</a:t>
             </a:r>
           </a:p>
         </p:txBody>
@@ -10857,8 +11355,8 @@
         </p:nvSpPr>
         <p:spPr>
           <a:xfrm>
-            <a:off x="475488" y="859536"/>
-            <a:ext cx="11237976" cy="502920"/>
+            <a:off x="0" y="4526280"/>
+            <a:ext cx="12192000" cy="600000"/>
           </a:xfrm>
           <a:prstGeom prst="rect">
             <a:avLst/>
@@ -10866,45 +11364,47 @@
           <a:noFill/>
         </p:spPr>
         <p:txBody>
-          <a:bodyPr wrap="square" anchor="t" lIns="0" rIns="0" tIns="0" bIns="0">
+          <a:bodyPr wrap="square" anchor="t">
             <a:spAutoFit/>
           </a:bodyPr>
           <a:lstStyle/>
           <a:p>
-            <a:pPr algn="l">
+            <a:pPr algn="ctr">
               <a:lnSpc>
-                <a:spcPct val="114000"/>
+                <a:spcPct val="110000"/>
               </a:lnSpc>
+              <a:spcAft>
+                <a:spcPts val="600"/>
+              </a:spcAft>
             </a:pPr>
             <a:r>
-              <a:rPr sz="2200" b="1">
-                <a:solidFill>
-                  <a:srgbClr val="1B2B28"/>
-                </a:solidFill>
+              <a:rPr sz="1400" b="0">
+                <a:solidFill>
+                  <a:srgbClr val="BBC6E6"/>
+                </a:solidFill>
+                <a:latin typeface="微软雅黑"/>
               </a:rPr>
-              <a:t>P3.1/P3.2 分层达标 · 四档逐字输出截图</a:t>
-            </a:r>
-          </a:p>
-        </p:txBody>
-      </p:sp>
-      <p:sp>
-        <p:nvSpPr>
-          <p:cNvPr id="7" name="Rounded Rectangle 6"/>
+              <a:t>以生为本   |   做中学 · 学中做</a:t>
+            </a:r>
+          </a:p>
+        </p:txBody>
+      </p:sp>
+      <p:sp>
+        <p:nvSpPr>
+          <p:cNvPr id="7" name="Rectangle 6"/>
           <p:cNvSpPr/>
           <p:nvPr/>
         </p:nvSpPr>
         <p:spPr>
           <a:xfrm>
-            <a:off x="475488" y="1389888"/>
-            <a:ext cx="1234440" cy="27432"/>
-          </a:xfrm>
-          <a:prstGeom prst="roundRect">
-            <a:avLst>
-              <a:gd name="adj" fmla="val 50000"/>
-            </a:avLst>
+            <a:off x="500000" y="6500000"/>
+            <a:ext cx="11100000" cy="20000"/>
+          </a:xfrm>
+          <a:prstGeom prst="rect">
+            <a:avLst/>
           </a:prstGeom>
           <a:solidFill>
-            <a:srgbClr val="C9A227"/>
+            <a:srgbClr val="C9D4EE"/>
           </a:solidFill>
           <a:ln>
             <a:noFill/>
@@ -10935,47 +11435,43 @@
       </p:sp>
       <p:sp>
         <p:nvSpPr>
-          <p:cNvPr id="8" name="Rounded Rectangle 7"/>
-          <p:cNvSpPr/>
-          <p:nvPr/>
-        </p:nvSpPr>
-        <p:spPr>
-          <a:xfrm>
-            <a:off x="475488" y="6419088"/>
-            <a:ext cx="11237976" cy="10972"/>
-          </a:xfrm>
-          <a:prstGeom prst="roundRect">
-            <a:avLst>
-              <a:gd name="adj" fmla="val 50000"/>
-            </a:avLst>
-          </a:prstGeom>
-          <a:solidFill>
-            <a:srgbClr val="E4F1EE"/>
-          </a:solidFill>
-          <a:ln>
-            <a:noFill/>
-          </a:ln>
-          <a:effectLst/>
-        </p:spPr>
-        <p:style>
-          <a:lnRef idx="1">
-            <a:schemeClr val="accent1"/>
-          </a:lnRef>
-          <a:fillRef idx="3">
-            <a:schemeClr val="accent1"/>
-          </a:fillRef>
-          <a:effectRef idx="2">
-            <a:schemeClr val="accent1"/>
-          </a:effectRef>
-          <a:fontRef idx="minor">
-            <a:schemeClr val="lt1"/>
-          </a:fontRef>
-        </p:style>
-        <p:txBody>
-          <a:bodyPr rtlCol="0" anchor="ctr"/>
-          <a:lstStyle/>
-          <a:p>
-            <a:pPr algn="ctr"/>
+          <p:cNvPr id="8" name="TextBox 7"/>
+          <p:cNvSpPr txBox="1"/>
+          <p:nvPr/>
+        </p:nvSpPr>
+        <p:spPr>
+          <a:xfrm>
+            <a:off x="500000" y="6540000"/>
+            <a:ext cx="7000000" cy="300000"/>
+          </a:xfrm>
+          <a:prstGeom prst="rect">
+            <a:avLst/>
+          </a:prstGeom>
+          <a:noFill/>
+        </p:spPr>
+        <p:txBody>
+          <a:bodyPr wrap="square" anchor="t">
+            <a:spAutoFit/>
+          </a:bodyPr>
+          <a:lstStyle/>
+          <a:p>
+            <a:pPr algn="l">
+              <a:lnSpc>
+                <a:spcPct val="110000"/>
+              </a:lnSpc>
+              <a:spcAft>
+                <a:spcPts val="600"/>
+              </a:spcAft>
+            </a:pPr>
+            <a:r>
+              <a:rPr sz="1000" b="0">
+                <a:solidFill>
+                  <a:srgbClr val="8A97B5"/>
+                </a:solidFill>
+                <a:latin typeface="微软雅黑"/>
+              </a:rPr>
+              <a:t>两江智造集团 · Python程序设计（项目实战）</a:t>
+            </a:r>
           </a:p>
         </p:txBody>
       </p:sp>
@@ -10987,8 +11483,8 @@
         </p:nvSpPr>
         <p:spPr>
           <a:xfrm>
-            <a:off x="475488" y="6455664"/>
-            <a:ext cx="7315200" cy="292608"/>
+            <a:off x="10600000" y="6540000"/>
+            <a:ext cx="1000000" cy="300000"/>
           </a:xfrm>
           <a:prstGeom prst="rect">
             <a:avLst/>
@@ -10996,161 +11492,27 @@
           <a:noFill/>
         </p:spPr>
         <p:txBody>
-          <a:bodyPr wrap="square" anchor="t" lIns="0" rIns="0" tIns="0" bIns="0">
+          <a:bodyPr wrap="square" anchor="ctr">
             <a:spAutoFit/>
           </a:bodyPr>
           <a:lstStyle/>
           <a:p>
-            <a:pPr algn="l">
-              <a:lnSpc>
-                <a:spcPct val="114000"/>
-              </a:lnSpc>
-            </a:pPr>
-            <a:r>
-              <a:rPr sz="900" b="0">
-                <a:solidFill>
-                  <a:srgbClr val="5C6E6A"/>
-                </a:solidFill>
-              </a:rPr>
-              <a:t>两江智造集团 · Python程序设计（项目实战）</a:t>
-            </a:r>
-          </a:p>
-        </p:txBody>
-      </p:sp>
-      <p:sp>
-        <p:nvSpPr>
-          <p:cNvPr id="10" name="TextBox 9"/>
-          <p:cNvSpPr txBox="1"/>
-          <p:nvPr/>
-        </p:nvSpPr>
-        <p:spPr>
-          <a:xfrm>
-            <a:off x="10597896" y="6537960"/>
-            <a:ext cx="996696" cy="301752"/>
-          </a:xfrm>
-          <a:prstGeom prst="rect">
-            <a:avLst/>
-          </a:prstGeom>
-          <a:noFill/>
-        </p:spPr>
-        <p:txBody>
-          <a:bodyPr wrap="square" anchor="t" lIns="0" rIns="0" tIns="0" bIns="0">
-            <a:spAutoFit/>
-          </a:bodyPr>
-          <a:lstStyle/>
-          <a:p>
             <a:pPr algn="r">
               <a:lnSpc>
-                <a:spcPct val="114000"/>
+                <a:spcPct val="110000"/>
               </a:lnSpc>
+              <a:spcAft>
+                <a:spcPts val="600"/>
+              </a:spcAft>
             </a:pPr>
             <a:r>
               <a:rPr sz="1000" b="0">
                 <a:solidFill>
                   <a:srgbClr val="8A97B5"/>
                 </a:solidFill>
+                <a:latin typeface="微软雅黑"/>
               </a:rPr>
-              <a:t>6 / 10</a:t>
-            </a:r>
-          </a:p>
-        </p:txBody>
-      </p:sp>
-      <p:sp>
-        <p:nvSpPr>
-          <p:cNvPr id="11" name="TextBox 10"/>
-          <p:cNvSpPr txBox="1"/>
-          <p:nvPr/>
-        </p:nvSpPr>
-        <p:spPr>
-          <a:xfrm>
-            <a:off x="475488" y="1517904"/>
-            <a:ext cx="11237976" cy="237744"/>
-          </a:xfrm>
-          <a:prstGeom prst="rect">
-            <a:avLst/>
-          </a:prstGeom>
-          <a:noFill/>
-        </p:spPr>
-        <p:txBody>
-          <a:bodyPr wrap="square" anchor="t" lIns="0" rIns="0" tIns="0" bIns="0">
-            <a:spAutoFit/>
-          </a:bodyPr>
-          <a:lstStyle/>
-          <a:p>
-            <a:pPr algn="l">
-              <a:lnSpc>
-                <a:spcPct val="114000"/>
-              </a:lnSpc>
-            </a:pPr>
-            <a:r>
-              <a:rPr sz="1000" b="0">
-                <a:solidFill>
-                  <a:srgbClr val="5C6E6A"/>
-                </a:solidFill>
-              </a:rPr>
-              <a:t>终端窗口截图：由 report.txt 本节逐字渲染，未手工改写</a:t>
-            </a:r>
-          </a:p>
-        </p:txBody>
-      </p:sp>
-      <p:pic>
-        <p:nvPicPr>
-          <p:cNvPr id="12" name="Picture 11" descr="p33_kpi_cockpit_classroom.png"/>
-          <p:cNvPicPr>
-            <a:picLocks noChangeAspect="1"/>
-          </p:cNvPicPr>
-          <p:nvPr/>
-        </p:nvPicPr>
-        <p:blipFill>
-          <a:blip r:embed="rId2"/>
-          <a:stretch>
-            <a:fillRect/>
-          </a:stretch>
-        </p:blipFill>
-        <p:spPr>
-          <a:xfrm>
-            <a:off x="1478619" y="1792224"/>
-            <a:ext cx="9231712" cy="3849624"/>
-          </a:xfrm>
-          <a:prstGeom prst="rect">
-            <a:avLst/>
-          </a:prstGeom>
-        </p:spPr>
-      </p:pic>
-      <p:sp>
-        <p:nvSpPr>
-          <p:cNvPr id="13" name="TextBox 12"/>
-          <p:cNvSpPr txBox="1"/>
-          <p:nvPr/>
-        </p:nvSpPr>
-        <p:spPr>
-          <a:xfrm>
-            <a:off x="475488" y="5678424"/>
-            <a:ext cx="11237976" cy="256032"/>
-          </a:xfrm>
-          <a:prstGeom prst="rect">
-            <a:avLst/>
-          </a:prstGeom>
-          <a:noFill/>
-        </p:spPr>
-        <p:txBody>
-          <a:bodyPr wrap="square" anchor="t" lIns="0" rIns="0" tIns="0" bIns="0">
-            <a:spAutoFit/>
-          </a:bodyPr>
-          <a:lstStyle/>
-          <a:p>
-            <a:pPr algn="l">
-              <a:lnSpc>
-                <a:spcPct val="114000"/>
-              </a:lnSpc>
-            </a:pPr>
-            <a:r>
-              <a:rPr sz="850" b="0">
-                <a:solidFill>
-                  <a:srgbClr val="5C6E6A"/>
-                </a:solidFill>
-              </a:rPr>
-              <a:t>▲ p33_kpi_cockpit：分层达标 第 15 行起的四档逐字原文（绿=达标/通过，黄=仅本节取证项，橙=未实测项）</a:t>
+              <a:t>9 / 10</a:t>
             </a:r>
           </a:p>
         </p:txBody>
